--- a/Blank/Lecture_07_ Embeddings_02.pptx
+++ b/Blank/Lecture_07_ Embeddings_02.pptx
@@ -257,7 +257,7 @@
   </p:defaultTextStyle>
   <p:extLst>
     <p:ext uri="GoogleSlidesCustomDataVersion2">
-      <go:slidesCustomData xmlns:go="http://customooxmlschemas.google.com/" r:id="rId20" roundtripDataSignature="AMtx7misLOrTYy5XqJM+kIRiIIuBXDHjMA=="/>
+      <go:slidesCustomData xmlns:go="http://customooxmlschemas.google.com/" r:id="rId20" roundtripDataSignature="AMtx7mgtNIr+pRuWM9h9NWPnHv0+f7SgMw=="/>
     </p:ext>
   </p:extLst>
 </p:presentation>
@@ -843,7 +843,7 @@
       </p:grpSpPr>
       <p:sp>
         <p:nvSpPr>
-          <p:cNvPr id="31" name="Google Shape;31;g3b8409de4d6_0_50:notes"/>
+          <p:cNvPr id="31" name="Google Shape;31;g3bbeee67e43_0_26:notes"/>
           <p:cNvSpPr/>
           <p:nvPr>
             <p:ph idx="2" type="sldImg"/>
@@ -888,7 +888,7 @@
       </p:sp>
       <p:sp>
         <p:nvSpPr>
-          <p:cNvPr id="32" name="Google Shape;32;g3b8409de4d6_0_50:notes"/>
+          <p:cNvPr id="32" name="Google Shape;32;g3bbeee67e43_0_26:notes"/>
           <p:cNvSpPr txBox="1"/>
           <p:nvPr>
             <p:ph idx="1" type="body"/>
@@ -946,7 +946,7 @@
   <p:cSld>
     <p:spTree>
       <p:nvGrpSpPr>
-        <p:cNvPr id="89" name="Shape 89"/>
+        <p:cNvPr id="142" name="Shape 142"/>
         <p:cNvGrpSpPr/>
         <p:nvPr/>
       </p:nvGrpSpPr>
@@ -960,7 +960,7 @@
       </p:grpSpPr>
       <p:sp>
         <p:nvSpPr>
-          <p:cNvPr id="90" name="Google Shape;90;g3bc426a098a_0_41:notes"/>
+          <p:cNvPr id="143" name="Google Shape;143;g3bca1707a95_0_89:notes"/>
           <p:cNvSpPr/>
           <p:nvPr>
             <p:ph idx="2" type="sldImg"/>
@@ -995,7 +995,7 @@
       </p:sp>
       <p:sp>
         <p:nvSpPr>
-          <p:cNvPr id="91" name="Google Shape;91;g3bc426a098a_0_41:notes"/>
+          <p:cNvPr id="144" name="Google Shape;144;g3bca1707a95_0_89:notes"/>
           <p:cNvSpPr txBox="1"/>
           <p:nvPr>
             <p:ph idx="1" type="body"/>
@@ -1045,7 +1045,7 @@
   <p:cSld>
     <p:spTree>
       <p:nvGrpSpPr>
-        <p:cNvPr id="95" name="Shape 95"/>
+        <p:cNvPr id="164" name="Shape 164"/>
         <p:cNvGrpSpPr/>
         <p:nvPr/>
       </p:nvGrpSpPr>
@@ -1059,7 +1059,7 @@
       </p:grpSpPr>
       <p:sp>
         <p:nvSpPr>
-          <p:cNvPr id="96" name="Google Shape;96;g3bc426a098a_0_5:notes"/>
+          <p:cNvPr id="165" name="Google Shape;165;g3bca1707a95_0_113:notes"/>
           <p:cNvSpPr/>
           <p:nvPr>
             <p:ph idx="2" type="sldImg"/>
@@ -1094,7 +1094,7 @@
       </p:sp>
       <p:sp>
         <p:nvSpPr>
-          <p:cNvPr id="97" name="Google Shape;97;g3bc426a098a_0_5:notes"/>
+          <p:cNvPr id="166" name="Google Shape;166;g3bca1707a95_0_113:notes"/>
           <p:cNvSpPr txBox="1"/>
           <p:nvPr>
             <p:ph idx="1" type="body"/>
@@ -1144,7 +1144,7 @@
   <p:cSld>
     <p:spTree>
       <p:nvGrpSpPr>
-        <p:cNvPr id="103" name="Shape 103"/>
+        <p:cNvPr id="177" name="Shape 177"/>
         <p:cNvGrpSpPr/>
         <p:nvPr/>
       </p:nvGrpSpPr>
@@ -1158,7 +1158,7 @@
       </p:grpSpPr>
       <p:sp>
         <p:nvSpPr>
-          <p:cNvPr id="104" name="Google Shape;104;g3bc426a098a_0_36:notes"/>
+          <p:cNvPr id="178" name="Google Shape;178;g3bc426a098a_0_5:notes"/>
           <p:cNvSpPr/>
           <p:nvPr>
             <p:ph idx="2" type="sldImg"/>
@@ -1193,7 +1193,7 @@
       </p:sp>
       <p:sp>
         <p:nvSpPr>
-          <p:cNvPr id="105" name="Google Shape;105;g3bc426a098a_0_36:notes"/>
+          <p:cNvPr id="179" name="Google Shape;179;g3bc426a098a_0_5:notes"/>
           <p:cNvSpPr txBox="1"/>
           <p:nvPr>
             <p:ph idx="1" type="body"/>
@@ -1243,7 +1243,7 @@
   <p:cSld>
     <p:spTree>
       <p:nvGrpSpPr>
-        <p:cNvPr id="109" name="Shape 109"/>
+        <p:cNvPr id="185" name="Shape 185"/>
         <p:cNvGrpSpPr/>
         <p:nvPr/>
       </p:nvGrpSpPr>
@@ -1257,7 +1257,7 @@
       </p:grpSpPr>
       <p:sp>
         <p:nvSpPr>
-          <p:cNvPr id="110" name="Google Shape;110;g3bc426a098a_0_15:notes"/>
+          <p:cNvPr id="186" name="Google Shape;186;g3bca1707a95_0_266:notes"/>
           <p:cNvSpPr/>
           <p:nvPr>
             <p:ph idx="2" type="sldImg"/>
@@ -1292,7 +1292,7 @@
       </p:sp>
       <p:sp>
         <p:nvSpPr>
-          <p:cNvPr id="111" name="Google Shape;111;g3bc426a098a_0_15:notes"/>
+          <p:cNvPr id="187" name="Google Shape;187;g3bca1707a95_0_266:notes"/>
           <p:cNvSpPr txBox="1"/>
           <p:nvPr>
             <p:ph idx="1" type="body"/>
@@ -1342,7 +1342,7 @@
   <p:cSld>
     <p:spTree>
       <p:nvGrpSpPr>
-        <p:cNvPr id="116" name="Shape 116"/>
+        <p:cNvPr id="191" name="Shape 191"/>
         <p:cNvGrpSpPr/>
         <p:nvPr/>
       </p:nvGrpSpPr>
@@ -1356,7 +1356,7 @@
       </p:grpSpPr>
       <p:sp>
         <p:nvSpPr>
-          <p:cNvPr id="117" name="Google Shape;117;g3bc426a098a_0_26:notes"/>
+          <p:cNvPr id="192" name="Google Shape;192;g3bca1707a95_0_161:notes"/>
           <p:cNvSpPr/>
           <p:nvPr>
             <p:ph idx="2" type="sldImg"/>
@@ -1391,7 +1391,7 @@
       </p:sp>
       <p:sp>
         <p:nvSpPr>
-          <p:cNvPr id="118" name="Google Shape;118;g3bc426a098a_0_26:notes"/>
+          <p:cNvPr id="193" name="Google Shape;193;g3bca1707a95_0_161:notes"/>
           <p:cNvSpPr txBox="1"/>
           <p:nvPr>
             <p:ph idx="1" type="body"/>
@@ -1441,7 +1441,7 @@
   <p:cSld>
     <p:spTree>
       <p:nvGrpSpPr>
-        <p:cNvPr id="122" name="Shape 122"/>
+        <p:cNvPr id="197" name="Shape 197"/>
         <p:cNvGrpSpPr/>
         <p:nvPr/>
       </p:nvGrpSpPr>
@@ -1455,106 +1455,7 @@
       </p:grpSpPr>
       <p:sp>
         <p:nvSpPr>
-          <p:cNvPr id="123" name="Google Shape;123;g3bc426a098a_0_21:notes"/>
-          <p:cNvSpPr/>
-          <p:nvPr>
-            <p:ph idx="2" type="sldImg"/>
-          </p:nvPr>
-        </p:nvSpPr>
-        <p:spPr>
-          <a:xfrm>
-            <a:off x="1143309" y="685800"/>
-            <a:ext cx="4572000" cy="3429000"/>
-          </a:xfrm>
-          <a:custGeom>
-            <a:rect b="b" l="l" r="r" t="t"/>
-            <a:pathLst>
-              <a:path extrusionOk="0" h="120000" w="120000">
-                <a:moveTo>
-                  <a:pt x="0" y="0"/>
-                </a:moveTo>
-                <a:lnTo>
-                  <a:pt x="120000" y="0"/>
-                </a:lnTo>
-                <a:lnTo>
-                  <a:pt x="120000" y="120000"/>
-                </a:lnTo>
-                <a:lnTo>
-                  <a:pt x="0" y="120000"/>
-                </a:lnTo>
-                <a:close/>
-              </a:path>
-            </a:pathLst>
-          </a:custGeom>
-        </p:spPr>
-      </p:sp>
-      <p:sp>
-        <p:nvSpPr>
-          <p:cNvPr id="124" name="Google Shape;124;g3bc426a098a_0_21:notes"/>
-          <p:cNvSpPr txBox="1"/>
-          <p:nvPr>
-            <p:ph idx="1" type="body"/>
-          </p:nvPr>
-        </p:nvSpPr>
-        <p:spPr>
-          <a:xfrm>
-            <a:off x="685800" y="4343400"/>
-            <a:ext cx="5486400" cy="4114800"/>
-          </a:xfrm>
-          <a:prstGeom prst="rect">
-            <a:avLst/>
-          </a:prstGeom>
-        </p:spPr>
-        <p:txBody>
-          <a:bodyPr anchorCtr="0" anchor="t" bIns="91425" lIns="91425" spcFirstLastPara="1" rIns="91425" wrap="square" tIns="91425">
-            <a:noAutofit/>
-          </a:bodyPr>
-          <a:lstStyle/>
-          <a:p>
-            <a:pPr indent="0" lvl="0" marL="0" rtl="0" algn="l">
-              <a:spcBef>
-                <a:spcPts val="0"/>
-              </a:spcBef>
-              <a:spcAft>
-                <a:spcPts val="0"/>
-              </a:spcAft>
-              <a:buNone/>
-            </a:pPr>
-            <a:r>
-              <a:t/>
-            </a:r>
-            <a:endParaRPr/>
-          </a:p>
-        </p:txBody>
-      </p:sp>
-    </p:spTree>
-  </p:cSld>
-  <p:clrMapOvr>
-    <a:masterClrMapping/>
-  </p:clrMapOvr>
-</p:notes>
-</file>
-
-<file path=ppt/notesSlides/notesSlide2.xml><?xml version="1.0" encoding="utf-8"?>
-<p:notes xmlns:a="http://schemas.openxmlformats.org/drawingml/2006/main" xmlns:r="http://schemas.openxmlformats.org/officeDocument/2006/relationships" xmlns:mc="http://schemas.openxmlformats.org/markup-compatibility/2006" xmlns:mv="urn:schemas-microsoft-com:mac:vml" xmlns:p="http://schemas.openxmlformats.org/presentationml/2006/main" xmlns:c="http://schemas.openxmlformats.org/drawingml/2006/chart" xmlns:dgm="http://schemas.openxmlformats.org/drawingml/2006/diagram" xmlns:o="urn:schemas-microsoft-com:office:office" xmlns:v="urn:schemas-microsoft-com:vml" xmlns:pvml="urn:schemas-microsoft-com:office:powerpoint" xmlns:com="http://schemas.openxmlformats.org/drawingml/2006/compatibility" xmlns:p14="http://schemas.microsoft.com/office/powerpoint/2010/main" xmlns:p15="http://schemas.microsoft.com/office/powerpoint/2012/main" xmlns:ahyp="http://schemas.microsoft.com/office/drawing/2018/hyperlinkcolor" showMasterPhAnim="0" showMasterSp="0">
-  <p:cSld>
-    <p:spTree>
-      <p:nvGrpSpPr>
-        <p:cNvPr id="38" name="Shape 38"/>
-        <p:cNvGrpSpPr/>
-        <p:nvPr/>
-      </p:nvGrpSpPr>
-      <p:grpSpPr>
-        <a:xfrm>
-          <a:off x="0" y="0"/>
-          <a:ext cx="0" cy="0"/>
-          <a:chOff x="0" y="0"/>
-          <a:chExt cx="0" cy="0"/>
-        </a:xfrm>
-      </p:grpSpPr>
-      <p:sp>
-        <p:nvSpPr>
-          <p:cNvPr id="39" name="Google Shape;39;g3b8409de4d6_0_60:notes"/>
+          <p:cNvPr id="198" name="Google Shape;198;g3bca1707a95_0_166:notes"/>
           <p:cNvSpPr/>
           <p:nvPr>
             <p:ph idx="2" type="sldImg"/>
@@ -1599,7 +1500,7 @@
       </p:sp>
       <p:sp>
         <p:nvSpPr>
-          <p:cNvPr id="40" name="Google Shape;40;g3b8409de4d6_0_60:notes"/>
+          <p:cNvPr id="199" name="Google Shape;199;g3bca1707a95_0_166:notes"/>
           <p:cNvSpPr txBox="1"/>
           <p:nvPr>
             <p:ph idx="1" type="body"/>
@@ -1635,6 +1536,105 @@
                 <a:spcPts val="0"/>
               </a:spcAft>
               <a:buSzPts val="1400"/>
+              <a:buNone/>
+            </a:pPr>
+            <a:r>
+              <a:t/>
+            </a:r>
+            <a:endParaRPr/>
+          </a:p>
+        </p:txBody>
+      </p:sp>
+    </p:spTree>
+  </p:cSld>
+  <p:clrMapOvr>
+    <a:masterClrMapping/>
+  </p:clrMapOvr>
+</p:notes>
+</file>
+
+<file path=ppt/notesSlides/notesSlide2.xml><?xml version="1.0" encoding="utf-8"?>
+<p:notes xmlns:a="http://schemas.openxmlformats.org/drawingml/2006/main" xmlns:r="http://schemas.openxmlformats.org/officeDocument/2006/relationships" xmlns:mc="http://schemas.openxmlformats.org/markup-compatibility/2006" xmlns:mv="urn:schemas-microsoft-com:mac:vml" xmlns:p="http://schemas.openxmlformats.org/presentationml/2006/main" xmlns:c="http://schemas.openxmlformats.org/drawingml/2006/chart" xmlns:dgm="http://schemas.openxmlformats.org/drawingml/2006/diagram" xmlns:o="urn:schemas-microsoft-com:office:office" xmlns:v="urn:schemas-microsoft-com:vml" xmlns:pvml="urn:schemas-microsoft-com:office:powerpoint" xmlns:com="http://schemas.openxmlformats.org/drawingml/2006/compatibility" xmlns:p14="http://schemas.microsoft.com/office/powerpoint/2010/main" xmlns:p15="http://schemas.microsoft.com/office/powerpoint/2012/main" xmlns:ahyp="http://schemas.microsoft.com/office/drawing/2018/hyperlinkcolor" showMasterPhAnim="0" showMasterSp="0">
+  <p:cSld>
+    <p:spTree>
+      <p:nvGrpSpPr>
+        <p:cNvPr id="35" name="Shape 35"/>
+        <p:cNvGrpSpPr/>
+        <p:nvPr/>
+      </p:nvGrpSpPr>
+      <p:grpSpPr>
+        <a:xfrm>
+          <a:off x="0" y="0"/>
+          <a:ext cx="0" cy="0"/>
+          <a:chOff x="0" y="0"/>
+          <a:chExt cx="0" cy="0"/>
+        </a:xfrm>
+      </p:grpSpPr>
+      <p:sp>
+        <p:nvSpPr>
+          <p:cNvPr id="36" name="Google Shape;36;g3bca1707a95_0_7:notes"/>
+          <p:cNvSpPr/>
+          <p:nvPr>
+            <p:ph idx="2" type="sldImg"/>
+          </p:nvPr>
+        </p:nvSpPr>
+        <p:spPr>
+          <a:xfrm>
+            <a:off x="1143309" y="685800"/>
+            <a:ext cx="4572000" cy="3429000"/>
+          </a:xfrm>
+          <a:custGeom>
+            <a:rect b="b" l="l" r="r" t="t"/>
+            <a:pathLst>
+              <a:path extrusionOk="0" h="120000" w="120000">
+                <a:moveTo>
+                  <a:pt x="0" y="0"/>
+                </a:moveTo>
+                <a:lnTo>
+                  <a:pt x="120000" y="0"/>
+                </a:lnTo>
+                <a:lnTo>
+                  <a:pt x="120000" y="120000"/>
+                </a:lnTo>
+                <a:lnTo>
+                  <a:pt x="0" y="120000"/>
+                </a:lnTo>
+                <a:close/>
+              </a:path>
+            </a:pathLst>
+          </a:custGeom>
+        </p:spPr>
+      </p:sp>
+      <p:sp>
+        <p:nvSpPr>
+          <p:cNvPr id="37" name="Google Shape;37;g3bca1707a95_0_7:notes"/>
+          <p:cNvSpPr txBox="1"/>
+          <p:nvPr>
+            <p:ph idx="1" type="body"/>
+          </p:nvPr>
+        </p:nvSpPr>
+        <p:spPr>
+          <a:xfrm>
+            <a:off x="685800" y="4343400"/>
+            <a:ext cx="5486400" cy="4114800"/>
+          </a:xfrm>
+          <a:prstGeom prst="rect">
+            <a:avLst/>
+          </a:prstGeom>
+        </p:spPr>
+        <p:txBody>
+          <a:bodyPr anchorCtr="0" anchor="t" bIns="91425" lIns="91425" spcFirstLastPara="1" rIns="91425" wrap="square" tIns="91425">
+            <a:noAutofit/>
+          </a:bodyPr>
+          <a:lstStyle/>
+          <a:p>
+            <a:pPr indent="0" lvl="0" marL="0" rtl="0" algn="l">
+              <a:spcBef>
+                <a:spcPts val="0"/>
+              </a:spcBef>
+              <a:spcAft>
+                <a:spcPts val="0"/>
+              </a:spcAft>
               <a:buNone/>
             </a:pPr>
             <a:r>
@@ -1657,7 +1657,7 @@
   <p:cSld>
     <p:spTree>
       <p:nvGrpSpPr>
-        <p:cNvPr id="45" name="Shape 45"/>
+        <p:cNvPr id="41" name="Shape 41"/>
         <p:cNvGrpSpPr/>
         <p:nvPr/>
       </p:nvGrpSpPr>
@@ -1671,7 +1671,7 @@
       </p:grpSpPr>
       <p:sp>
         <p:nvSpPr>
-          <p:cNvPr id="46" name="Google Shape;46;g3bbeee67e43_0_26:notes"/>
+          <p:cNvPr id="42" name="Google Shape;42;g3bca1707a95_0_222:notes"/>
           <p:cNvSpPr/>
           <p:nvPr>
             <p:ph idx="2" type="sldImg"/>
@@ -1716,7 +1716,7 @@
       </p:sp>
       <p:sp>
         <p:nvSpPr>
-          <p:cNvPr id="47" name="Google Shape;47;g3bbeee67e43_0_26:notes"/>
+          <p:cNvPr id="43" name="Google Shape;43;g3bca1707a95_0_222:notes"/>
           <p:cNvSpPr txBox="1"/>
           <p:nvPr>
             <p:ph idx="1" type="body"/>
@@ -1774,7 +1774,7 @@
   <p:cSld>
     <p:spTree>
       <p:nvGrpSpPr>
-        <p:cNvPr id="50" name="Shape 50"/>
+        <p:cNvPr id="64" name="Shape 64"/>
         <p:cNvGrpSpPr/>
         <p:nvPr/>
       </p:nvGrpSpPr>
@@ -1788,7 +1788,7 @@
       </p:grpSpPr>
       <p:sp>
         <p:nvSpPr>
-          <p:cNvPr id="51" name="Google Shape;51;g3bc35b5116e_0_22:notes"/>
+          <p:cNvPr id="65" name="Google Shape;65;g3bca1707a95_0_244:notes"/>
           <p:cNvSpPr/>
           <p:nvPr>
             <p:ph idx="2" type="sldImg"/>
@@ -1833,7 +1833,7 @@
       </p:sp>
       <p:sp>
         <p:nvSpPr>
-          <p:cNvPr id="52" name="Google Shape;52;g3bc35b5116e_0_22:notes"/>
+          <p:cNvPr id="66" name="Google Shape;66;g3bca1707a95_0_244:notes"/>
           <p:cNvSpPr txBox="1"/>
           <p:nvPr>
             <p:ph idx="1" type="body"/>
@@ -1891,7 +1891,7 @@
   <p:cSld>
     <p:spTree>
       <p:nvGrpSpPr>
-        <p:cNvPr id="59" name="Shape 59"/>
+        <p:cNvPr id="87" name="Shape 87"/>
         <p:cNvGrpSpPr/>
         <p:nvPr/>
       </p:nvGrpSpPr>
@@ -1905,7 +1905,7 @@
       </p:grpSpPr>
       <p:sp>
         <p:nvSpPr>
-          <p:cNvPr id="60" name="Google Shape;60;g3bc35b5116e_0_90:notes"/>
+          <p:cNvPr id="88" name="Google Shape;88;g3bc35b5116e_0_22:notes"/>
           <p:cNvSpPr/>
           <p:nvPr>
             <p:ph idx="2" type="sldImg"/>
@@ -1950,7 +1950,7 @@
       </p:sp>
       <p:sp>
         <p:nvSpPr>
-          <p:cNvPr id="61" name="Google Shape;61;g3bc35b5116e_0_90:notes"/>
+          <p:cNvPr id="89" name="Google Shape;89;g3bc35b5116e_0_22:notes"/>
           <p:cNvSpPr txBox="1"/>
           <p:nvPr>
             <p:ph idx="1" type="body"/>
@@ -2008,7 +2008,7 @@
   <p:cSld>
     <p:spTree>
       <p:nvGrpSpPr>
-        <p:cNvPr id="65" name="Shape 65"/>
+        <p:cNvPr id="96" name="Shape 96"/>
         <p:cNvGrpSpPr/>
         <p:nvPr/>
       </p:nvGrpSpPr>
@@ -2022,7 +2022,7 @@
       </p:grpSpPr>
       <p:sp>
         <p:nvSpPr>
-          <p:cNvPr id="66" name="Google Shape;66;g3bc426a098a_0_31:notes"/>
+          <p:cNvPr id="97" name="Google Shape;97;g3bca1707a95_0_209:notes"/>
           <p:cNvSpPr/>
           <p:nvPr>
             <p:ph idx="2" type="sldImg"/>
@@ -2057,7 +2057,7 @@
       </p:sp>
       <p:sp>
         <p:nvSpPr>
-          <p:cNvPr id="67" name="Google Shape;67;g3bc426a098a_0_31:notes"/>
+          <p:cNvPr id="98" name="Google Shape;98;g3bca1707a95_0_209:notes"/>
           <p:cNvSpPr txBox="1"/>
           <p:nvPr>
             <p:ph idx="1" type="body"/>
@@ -2107,7 +2107,7 @@
   <p:cSld>
     <p:spTree>
       <p:nvGrpSpPr>
-        <p:cNvPr id="71" name="Shape 71"/>
+        <p:cNvPr id="108" name="Shape 108"/>
         <p:cNvGrpSpPr/>
         <p:nvPr/>
       </p:nvGrpSpPr>
@@ -2121,7 +2121,7 @@
       </p:grpSpPr>
       <p:sp>
         <p:nvSpPr>
-          <p:cNvPr id="72" name="Google Shape;72;g3bc35b5116e_0_107:notes"/>
+          <p:cNvPr id="109" name="Google Shape;109;g3bc35b5116e_0_90:notes"/>
           <p:cNvSpPr/>
           <p:nvPr>
             <p:ph idx="2" type="sldImg"/>
@@ -2166,7 +2166,7 @@
       </p:sp>
       <p:sp>
         <p:nvSpPr>
-          <p:cNvPr id="73" name="Google Shape;73;g3bc35b5116e_0_107:notes"/>
+          <p:cNvPr id="110" name="Google Shape;110;g3bc35b5116e_0_90:notes"/>
           <p:cNvSpPr txBox="1"/>
           <p:nvPr>
             <p:ph idx="1" type="body"/>
@@ -2224,7 +2224,7 @@
   <p:cSld>
     <p:spTree>
       <p:nvGrpSpPr>
-        <p:cNvPr id="77" name="Shape 77"/>
+        <p:cNvPr id="115" name="Shape 115"/>
         <p:cNvGrpSpPr/>
         <p:nvPr/>
       </p:nvGrpSpPr>
@@ -2238,7 +2238,106 @@
       </p:grpSpPr>
       <p:sp>
         <p:nvSpPr>
-          <p:cNvPr id="78" name="Google Shape;78;g3bc426a098a_0_10:notes"/>
+          <p:cNvPr id="116" name="Google Shape;116;g3bca1707a95_0_35:notes"/>
+          <p:cNvSpPr/>
+          <p:nvPr>
+            <p:ph idx="2" type="sldImg"/>
+          </p:nvPr>
+        </p:nvSpPr>
+        <p:spPr>
+          <a:xfrm>
+            <a:off x="1143309" y="685800"/>
+            <a:ext cx="4572000" cy="3429000"/>
+          </a:xfrm>
+          <a:custGeom>
+            <a:rect b="b" l="l" r="r" t="t"/>
+            <a:pathLst>
+              <a:path extrusionOk="0" h="120000" w="120000">
+                <a:moveTo>
+                  <a:pt x="0" y="0"/>
+                </a:moveTo>
+                <a:lnTo>
+                  <a:pt x="120000" y="0"/>
+                </a:lnTo>
+                <a:lnTo>
+                  <a:pt x="120000" y="120000"/>
+                </a:lnTo>
+                <a:lnTo>
+                  <a:pt x="0" y="120000"/>
+                </a:lnTo>
+                <a:close/>
+              </a:path>
+            </a:pathLst>
+          </a:custGeom>
+        </p:spPr>
+      </p:sp>
+      <p:sp>
+        <p:nvSpPr>
+          <p:cNvPr id="117" name="Google Shape;117;g3bca1707a95_0_35:notes"/>
+          <p:cNvSpPr txBox="1"/>
+          <p:nvPr>
+            <p:ph idx="1" type="body"/>
+          </p:nvPr>
+        </p:nvSpPr>
+        <p:spPr>
+          <a:xfrm>
+            <a:off x="685800" y="4343400"/>
+            <a:ext cx="5486400" cy="4114800"/>
+          </a:xfrm>
+          <a:prstGeom prst="rect">
+            <a:avLst/>
+          </a:prstGeom>
+        </p:spPr>
+        <p:txBody>
+          <a:bodyPr anchorCtr="0" anchor="t" bIns="91425" lIns="91425" spcFirstLastPara="1" rIns="91425" wrap="square" tIns="91425">
+            <a:noAutofit/>
+          </a:bodyPr>
+          <a:lstStyle/>
+          <a:p>
+            <a:pPr indent="0" lvl="0" marL="0" rtl="0" algn="l">
+              <a:spcBef>
+                <a:spcPts val="0"/>
+              </a:spcBef>
+              <a:spcAft>
+                <a:spcPts val="0"/>
+              </a:spcAft>
+              <a:buNone/>
+            </a:pPr>
+            <a:r>
+              <a:t/>
+            </a:r>
+            <a:endParaRPr/>
+          </a:p>
+        </p:txBody>
+      </p:sp>
+    </p:spTree>
+  </p:cSld>
+  <p:clrMapOvr>
+    <a:masterClrMapping/>
+  </p:clrMapOvr>
+</p:notes>
+</file>
+
+<file path=ppt/notesSlides/notesSlide9.xml><?xml version="1.0" encoding="utf-8"?>
+<p:notes xmlns:a="http://schemas.openxmlformats.org/drawingml/2006/main" xmlns:r="http://schemas.openxmlformats.org/officeDocument/2006/relationships" xmlns:mc="http://schemas.openxmlformats.org/markup-compatibility/2006" xmlns:mv="urn:schemas-microsoft-com:mac:vml" xmlns:p="http://schemas.openxmlformats.org/presentationml/2006/main" xmlns:c="http://schemas.openxmlformats.org/drawingml/2006/chart" xmlns:dgm="http://schemas.openxmlformats.org/drawingml/2006/diagram" xmlns:o="urn:schemas-microsoft-com:office:office" xmlns:v="urn:schemas-microsoft-com:vml" xmlns:pvml="urn:schemas-microsoft-com:office:powerpoint" xmlns:com="http://schemas.openxmlformats.org/drawingml/2006/compatibility" xmlns:p14="http://schemas.microsoft.com/office/powerpoint/2010/main" xmlns:p15="http://schemas.microsoft.com/office/powerpoint/2012/main" xmlns:ahyp="http://schemas.microsoft.com/office/drawing/2018/hyperlinkcolor" showMasterPhAnim="0" showMasterSp="0">
+  <p:cSld>
+    <p:spTree>
+      <p:nvGrpSpPr>
+        <p:cNvPr id="122" name="Shape 122"/>
+        <p:cNvGrpSpPr/>
+        <p:nvPr/>
+      </p:nvGrpSpPr>
+      <p:grpSpPr>
+        <a:xfrm>
+          <a:off x="0" y="0"/>
+          <a:ext cx="0" cy="0"/>
+          <a:chOff x="0" y="0"/>
+          <a:chExt cx="0" cy="0"/>
+        </a:xfrm>
+      </p:grpSpPr>
+      <p:sp>
+        <p:nvSpPr>
+          <p:cNvPr id="123" name="Google Shape;123;g3bca1707a95_0_62:notes"/>
           <p:cNvSpPr/>
           <p:nvPr>
             <p:ph idx="2" type="sldImg"/>
@@ -2283,124 +2382,7 @@
       </p:sp>
       <p:sp>
         <p:nvSpPr>
-          <p:cNvPr id="79" name="Google Shape;79;g3bc426a098a_0_10:notes"/>
-          <p:cNvSpPr txBox="1"/>
-          <p:nvPr>
-            <p:ph idx="1" type="body"/>
-          </p:nvPr>
-        </p:nvSpPr>
-        <p:spPr>
-          <a:xfrm>
-            <a:off x="685800" y="4343400"/>
-            <a:ext cx="5486400" cy="4114800"/>
-          </a:xfrm>
-          <a:prstGeom prst="rect">
-            <a:avLst/>
-          </a:prstGeom>
-          <a:noFill/>
-          <a:ln>
-            <a:noFill/>
-          </a:ln>
-        </p:spPr>
-        <p:txBody>
-          <a:bodyPr anchorCtr="0" anchor="t" bIns="91425" lIns="91425" spcFirstLastPara="1" rIns="91425" wrap="square" tIns="91425">
-            <a:noAutofit/>
-          </a:bodyPr>
-          <a:lstStyle/>
-          <a:p>
-            <a:pPr indent="0" lvl="0" marL="0" rtl="0" algn="l">
-              <a:lnSpc>
-                <a:spcPct val="100000"/>
-              </a:lnSpc>
-              <a:spcBef>
-                <a:spcPts val="0"/>
-              </a:spcBef>
-              <a:spcAft>
-                <a:spcPts val="0"/>
-              </a:spcAft>
-              <a:buSzPts val="1400"/>
-              <a:buNone/>
-            </a:pPr>
-            <a:r>
-              <a:t/>
-            </a:r>
-            <a:endParaRPr/>
-          </a:p>
-        </p:txBody>
-      </p:sp>
-    </p:spTree>
-  </p:cSld>
-  <p:clrMapOvr>
-    <a:masterClrMapping/>
-  </p:clrMapOvr>
-</p:notes>
-</file>
-
-<file path=ppt/notesSlides/notesSlide9.xml><?xml version="1.0" encoding="utf-8"?>
-<p:notes xmlns:a="http://schemas.openxmlformats.org/drawingml/2006/main" xmlns:r="http://schemas.openxmlformats.org/officeDocument/2006/relationships" xmlns:mc="http://schemas.openxmlformats.org/markup-compatibility/2006" xmlns:mv="urn:schemas-microsoft-com:mac:vml" xmlns:p="http://schemas.openxmlformats.org/presentationml/2006/main" xmlns:c="http://schemas.openxmlformats.org/drawingml/2006/chart" xmlns:dgm="http://schemas.openxmlformats.org/drawingml/2006/diagram" xmlns:o="urn:schemas-microsoft-com:office:office" xmlns:v="urn:schemas-microsoft-com:vml" xmlns:pvml="urn:schemas-microsoft-com:office:powerpoint" xmlns:com="http://schemas.openxmlformats.org/drawingml/2006/compatibility" xmlns:p14="http://schemas.microsoft.com/office/powerpoint/2010/main" xmlns:p15="http://schemas.microsoft.com/office/powerpoint/2012/main" xmlns:ahyp="http://schemas.microsoft.com/office/drawing/2018/hyperlinkcolor" showMasterPhAnim="0" showMasterSp="0">
-  <p:cSld>
-    <p:spTree>
-      <p:nvGrpSpPr>
-        <p:cNvPr id="83" name="Shape 83"/>
-        <p:cNvGrpSpPr/>
-        <p:nvPr/>
-      </p:nvGrpSpPr>
-      <p:grpSpPr>
-        <a:xfrm>
-          <a:off x="0" y="0"/>
-          <a:ext cx="0" cy="0"/>
-          <a:chOff x="0" y="0"/>
-          <a:chExt cx="0" cy="0"/>
-        </a:xfrm>
-      </p:grpSpPr>
-      <p:sp>
-        <p:nvSpPr>
-          <p:cNvPr id="84" name="Google Shape;84;g3bc426a098a_0_0:notes"/>
-          <p:cNvSpPr/>
-          <p:nvPr>
-            <p:ph idx="2" type="sldImg"/>
-          </p:nvPr>
-        </p:nvSpPr>
-        <p:spPr>
-          <a:xfrm>
-            <a:off x="1143309" y="685800"/>
-            <a:ext cx="4572000" cy="3429000"/>
-          </a:xfrm>
-          <a:custGeom>
-            <a:rect b="b" l="l" r="r" t="t"/>
-            <a:pathLst>
-              <a:path extrusionOk="0" h="120000" w="120000">
-                <a:moveTo>
-                  <a:pt x="0" y="0"/>
-                </a:moveTo>
-                <a:lnTo>
-                  <a:pt x="120000" y="0"/>
-                </a:lnTo>
-                <a:lnTo>
-                  <a:pt x="120000" y="120000"/>
-                </a:lnTo>
-                <a:lnTo>
-                  <a:pt x="0" y="120000"/>
-                </a:lnTo>
-                <a:close/>
-              </a:path>
-            </a:pathLst>
-          </a:custGeom>
-          <a:noFill/>
-          <a:ln cap="flat" cmpd="sng" w="9525">
-            <a:solidFill>
-              <a:srgbClr val="000000"/>
-            </a:solidFill>
-            <a:prstDash val="solid"/>
-            <a:round/>
-            <a:headEnd len="sm" w="sm" type="none"/>
-            <a:tailEnd len="sm" w="sm" type="none"/>
-          </a:ln>
-        </p:spPr>
-      </p:sp>
-      <p:sp>
-        <p:nvSpPr>
-          <p:cNvPr id="85" name="Google Shape;85;g3bc426a098a_0_0:notes"/>
+          <p:cNvPr id="124" name="Google Shape;124;g3bca1707a95_0_62:notes"/>
           <p:cNvSpPr txBox="1"/>
           <p:nvPr>
             <p:ph idx="1" type="body"/>
@@ -7214,16 +7196,16 @@
       </p:grpSpPr>
       <p:sp>
         <p:nvSpPr>
-          <p:cNvPr id="34" name="Google Shape;34;g3b8409de4d6_0_50"/>
+          <p:cNvPr id="34" name="Google Shape;34;g3bbeee67e43_0_26"/>
           <p:cNvSpPr txBox="1"/>
           <p:nvPr>
-            <p:ph type="title"/>
+            <p:ph type="ctrTitle"/>
           </p:nvPr>
         </p:nvSpPr>
         <p:spPr>
           <a:xfrm>
-            <a:off x="457200" y="274638"/>
-            <a:ext cx="8229600" cy="1143000"/>
+            <a:off x="685800" y="2655750"/>
+            <a:ext cx="7772400" cy="1546500"/>
           </a:xfrm>
           <a:prstGeom prst="rect">
             <a:avLst/>
@@ -7234,438 +7216,63 @@
           </a:ln>
         </p:spPr>
         <p:txBody>
-          <a:bodyPr anchorCtr="0" anchor="b" bIns="91425" lIns="91425" spcFirstLastPara="1" rIns="91425" wrap="square" tIns="91425">
+          <a:bodyPr anchorCtr="0" anchor="ctr" bIns="91425" lIns="91425" spcFirstLastPara="1" rIns="91425" wrap="square" tIns="91425">
             <a:noAutofit/>
           </a:bodyPr>
           <a:lstStyle/>
           <a:p>
-            <a:pPr indent="0" lvl="0" marL="0" rtl="0" algn="l">
-              <a:lnSpc>
-                <a:spcPct val="100000"/>
-              </a:lnSpc>
-              <a:spcBef>
-                <a:spcPts val="0"/>
-              </a:spcBef>
-              <a:spcAft>
-                <a:spcPts val="0"/>
-              </a:spcAft>
-              <a:buSzPts val="3600"/>
+            <a:pPr indent="0" lvl="0" marL="0" rtl="0" algn="ctr">
+              <a:lnSpc>
+                <a:spcPct val="100000"/>
+              </a:lnSpc>
+              <a:spcBef>
+                <a:spcPts val="0"/>
+              </a:spcBef>
+              <a:spcAft>
+                <a:spcPts val="0"/>
+              </a:spcAft>
+              <a:buSzPts val="4800"/>
               <a:buNone/>
             </a:pPr>
             <a:r>
+              <a:rPr lang="en">
+                <a:solidFill>
+                  <a:srgbClr val="002B5B"/>
+                </a:solidFill>
+              </a:rPr>
+              <a:t>CSE </a:t>
+            </a:r>
+            <a:r>
               <a:rPr lang="en"/>
-              <a:t>Programming Practice 01</a:t>
-            </a:r>
-            <a:endParaRPr/>
-          </a:p>
-        </p:txBody>
-      </p:sp>
-      <p:sp>
-        <p:nvSpPr>
-          <p:cNvPr id="35" name="Google Shape;35;g3b8409de4d6_0_50"/>
-          <p:cNvSpPr txBox="1"/>
-          <p:nvPr>
-            <p:ph idx="1" type="body"/>
-          </p:nvPr>
-        </p:nvSpPr>
-        <p:spPr>
-          <a:xfrm>
-            <a:off x="457200" y="1600200"/>
-            <a:ext cx="8229600" cy="3801000"/>
-          </a:xfrm>
-          <a:prstGeom prst="rect">
-            <a:avLst/>
-          </a:prstGeom>
-          <a:noFill/>
-          <a:ln>
-            <a:noFill/>
-          </a:ln>
-        </p:spPr>
-        <p:txBody>
-          <a:bodyPr anchorCtr="0" anchor="t" bIns="91425" lIns="91425" spcFirstLastPara="1" rIns="91425" wrap="square" tIns="91425">
-            <a:noAutofit/>
-          </a:bodyPr>
-          <a:lstStyle/>
-          <a:p>
-            <a:pPr indent="0" lvl="0" marL="0" rtl="0" algn="l">
-              <a:lnSpc>
-                <a:spcPct val="100000"/>
-              </a:lnSpc>
-              <a:spcBef>
-                <a:spcPts val="600"/>
-              </a:spcBef>
-              <a:spcAft>
-                <a:spcPts val="0"/>
-              </a:spcAft>
-              <a:buSzPts val="3000"/>
-              <a:buNone/>
-            </a:pPr>
-            <a:r>
-              <a:rPr lang="en"/>
-              <a:t>Given two points as </a:t>
-            </a:r>
-            <a:r>
-              <a:rPr b="1" lang="en">
-                <a:solidFill>
-                  <a:srgbClr val="5AABBC"/>
-                </a:solidFill>
-                <a:latin typeface="Consolas"/>
-                <a:ea typeface="Consolas"/>
-                <a:cs typeface="Consolas"/>
-                <a:sym typeface="Consolas"/>
+              <a:t>1</a:t>
+            </a:r>
+            <a:r>
+              <a:rPr lang="en">
+                <a:solidFill>
+                  <a:srgbClr val="002B5B"/>
+                </a:solidFill>
               </a:rPr>
-              <a:t>tuples</a:t>
-            </a:r>
-            <a:r>
-              <a:rPr lang="en"/>
-              <a:t>, write a function to calculate the distance between the two points.</a:t>
-            </a:r>
-            <a:endParaRPr/>
-          </a:p>
-          <a:p>
-            <a:pPr indent="0" lvl="0" marL="0" rtl="0" algn="l">
-              <a:lnSpc>
-                <a:spcPct val="100000"/>
-              </a:lnSpc>
-              <a:spcBef>
-                <a:spcPts val="600"/>
-              </a:spcBef>
-              <a:spcAft>
-                <a:spcPts val="0"/>
-              </a:spcAft>
-              <a:buSzPts val="3000"/>
-              <a:buNone/>
-            </a:pPr>
-            <a:r>
-              <a:t/>
-            </a:r>
-            <a:endParaRPr/>
-          </a:p>
-          <a:p>
-            <a:pPr indent="0" lvl="0" marL="0" rtl="0" algn="l">
-              <a:lnSpc>
-                <a:spcPct val="100000"/>
-              </a:lnSpc>
-              <a:spcBef>
-                <a:spcPts val="600"/>
-              </a:spcBef>
-              <a:spcAft>
-                <a:spcPts val="0"/>
-              </a:spcAft>
-              <a:buSzPts val="3000"/>
-              <a:buNone/>
-            </a:pPr>
-            <a:r>
-              <a:rPr b="1" lang="en">
+              <a:t>0124</a:t>
+            </a:r>
+            <a:br>
+              <a:rPr lang="en">
+                <a:solidFill>
+                  <a:srgbClr val="002B5B"/>
+                </a:solidFill>
+              </a:rPr>
+            </a:br>
+            <a:r>
+              <a:rPr lang="en">
                 <a:solidFill>
                   <a:srgbClr val="DCB439"/>
                 </a:solidFill>
-                <a:latin typeface="Consolas"/>
-                <a:ea typeface="Consolas"/>
-                <a:cs typeface="Consolas"/>
-                <a:sym typeface="Consolas"/>
               </a:rPr>
-              <a:t>print</a:t>
-            </a:r>
-            <a:r>
-              <a:rPr lang="en">
-                <a:latin typeface="Consolas"/>
-                <a:ea typeface="Consolas"/>
-                <a:cs typeface="Consolas"/>
-                <a:sym typeface="Consolas"/>
-              </a:rPr>
-              <a:t>(</a:t>
-            </a:r>
-            <a:r>
-              <a:rPr b="1" lang="en">
-                <a:solidFill>
-                  <a:srgbClr val="5AABBC"/>
-                </a:solidFill>
-                <a:latin typeface="Consolas"/>
-                <a:ea typeface="Consolas"/>
-                <a:cs typeface="Consolas"/>
-                <a:sym typeface="Consolas"/>
-              </a:rPr>
-              <a:t>distance</a:t>
-            </a:r>
-            <a:r>
-              <a:rPr lang="en">
-                <a:latin typeface="Consolas"/>
-                <a:ea typeface="Consolas"/>
-                <a:cs typeface="Consolas"/>
-                <a:sym typeface="Consolas"/>
-              </a:rPr>
-              <a:t>((</a:t>
-            </a:r>
-            <a:r>
-              <a:rPr b="1" lang="en" sz="2600">
-                <a:solidFill>
-                  <a:srgbClr val="465510"/>
-                </a:solidFill>
-                <a:latin typeface="Consolas"/>
-                <a:ea typeface="Consolas"/>
-                <a:cs typeface="Consolas"/>
-                <a:sym typeface="Consolas"/>
-              </a:rPr>
-              <a:t>2, 2</a:t>
-            </a:r>
-            <a:r>
-              <a:rPr lang="en">
-                <a:latin typeface="Consolas"/>
-                <a:ea typeface="Consolas"/>
-                <a:cs typeface="Consolas"/>
-                <a:sym typeface="Consolas"/>
-              </a:rPr>
-              <a:t>), (</a:t>
-            </a:r>
-            <a:r>
-              <a:rPr b="1" lang="en" sz="2600">
-                <a:solidFill>
-                  <a:srgbClr val="465510"/>
-                </a:solidFill>
-                <a:latin typeface="Consolas"/>
-                <a:ea typeface="Consolas"/>
-                <a:cs typeface="Consolas"/>
-                <a:sym typeface="Consolas"/>
-              </a:rPr>
-              <a:t>1, 1</a:t>
-            </a:r>
-            <a:r>
-              <a:rPr lang="en">
-                <a:latin typeface="Consolas"/>
-                <a:ea typeface="Consolas"/>
-                <a:cs typeface="Consolas"/>
-                <a:sym typeface="Consolas"/>
-              </a:rPr>
-              <a:t>)))</a:t>
+              <a:t>Embeddings 02</a:t>
             </a:r>
             <a:endParaRPr>
-              <a:latin typeface="Consolas"/>
-              <a:ea typeface="Consolas"/>
-              <a:cs typeface="Consolas"/>
-              <a:sym typeface="Consolas"/>
-            </a:endParaRPr>
-          </a:p>
-          <a:p>
-            <a:pPr indent="0" lvl="0" marL="0" rtl="0" algn="l">
-              <a:lnSpc>
-                <a:spcPct val="100000"/>
-              </a:lnSpc>
-              <a:spcBef>
-                <a:spcPts val="600"/>
-              </a:spcBef>
-              <a:spcAft>
-                <a:spcPts val="0"/>
-              </a:spcAft>
-              <a:buSzPts val="3000"/>
-              <a:buNone/>
-            </a:pPr>
-            <a:r>
-              <a:rPr b="1" lang="en" sz="2600">
-                <a:latin typeface="Consolas"/>
-                <a:ea typeface="Consolas"/>
-                <a:cs typeface="Consolas"/>
-                <a:sym typeface="Consolas"/>
-              </a:rPr>
-              <a:t>&gt; </a:t>
-            </a:r>
-            <a:r>
-              <a:rPr b="1" lang="en" sz="2600">
-                <a:solidFill>
-                  <a:srgbClr val="465510"/>
-                </a:solidFill>
-                <a:latin typeface="Consolas"/>
-                <a:ea typeface="Consolas"/>
-                <a:cs typeface="Consolas"/>
-                <a:sym typeface="Consolas"/>
-              </a:rPr>
-              <a:t>1.4142135623731</a:t>
-            </a:r>
-            <a:endParaRPr b="1" sz="2600">
               <a:solidFill>
-                <a:srgbClr val="465510"/>
+                <a:srgbClr val="DCB439"/>
               </a:solidFill>
-              <a:latin typeface="Consolas"/>
-              <a:ea typeface="Consolas"/>
-              <a:cs typeface="Consolas"/>
-              <a:sym typeface="Consolas"/>
-            </a:endParaRPr>
-          </a:p>
-        </p:txBody>
-      </p:sp>
-      <p:pic>
-        <p:nvPicPr>
-          <p:cNvPr id="36" name="Google Shape;36;g3b8409de4d6_0_50"/>
-          <p:cNvPicPr preferRelativeResize="0"/>
-          <p:nvPr/>
-        </p:nvPicPr>
-        <p:blipFill rotWithShape="1">
-          <a:blip r:embed="rId3">
-            <a:alphaModFix/>
-          </a:blip>
-          <a:srcRect b="5565" l="0" r="0" t="28104"/>
-          <a:stretch/>
-        </p:blipFill>
-        <p:spPr>
-          <a:xfrm>
-            <a:off x="4233000" y="4084575"/>
-            <a:ext cx="4512675" cy="1684625"/>
-          </a:xfrm>
-          <a:prstGeom prst="rect">
-            <a:avLst/>
-          </a:prstGeom>
-          <a:noFill/>
-          <a:ln>
-            <a:noFill/>
-          </a:ln>
-        </p:spPr>
-      </p:pic>
-      <p:sp>
-        <p:nvSpPr>
-          <p:cNvPr id="37" name="Google Shape;37;g3b8409de4d6_0_50"/>
-          <p:cNvSpPr txBox="1"/>
-          <p:nvPr/>
-        </p:nvSpPr>
-        <p:spPr>
-          <a:xfrm>
-            <a:off x="457200" y="4410288"/>
-            <a:ext cx="3905700" cy="1033200"/>
-          </a:xfrm>
-          <a:prstGeom prst="rect">
-            <a:avLst/>
-          </a:prstGeom>
-          <a:noFill/>
-          <a:ln>
-            <a:noFill/>
-          </a:ln>
-        </p:spPr>
-        <p:txBody>
-          <a:bodyPr anchorCtr="0" anchor="t" bIns="91425" lIns="91425" spcFirstLastPara="1" rIns="91425" wrap="square" tIns="91425">
-            <a:noAutofit/>
-          </a:bodyPr>
-          <a:lstStyle/>
-          <a:p>
-            <a:pPr indent="0" lvl="0" marL="0" marR="0" rtl="0" algn="l">
-              <a:lnSpc>
-                <a:spcPct val="100000"/>
-              </a:lnSpc>
-              <a:spcBef>
-                <a:spcPts val="0"/>
-              </a:spcBef>
-              <a:spcAft>
-                <a:spcPts val="0"/>
-              </a:spcAft>
-              <a:buClr>
-                <a:srgbClr val="000000"/>
-              </a:buClr>
-              <a:buSzPts val="1800"/>
-              <a:buFont typeface="Arial"/>
-              <a:buNone/>
-            </a:pPr>
-            <a:r>
-              <a:rPr b="1" i="0" lang="en" sz="1800" u="none" cap="none" strike="noStrike">
-                <a:solidFill>
-                  <a:srgbClr val="DCB439"/>
-                </a:solidFill>
-                <a:latin typeface="Arial"/>
-                <a:ea typeface="Arial"/>
-                <a:cs typeface="Arial"/>
-                <a:sym typeface="Arial"/>
-              </a:rPr>
-              <a:t>NOTE:</a:t>
-            </a:r>
-            <a:r>
-              <a:rPr b="0" i="0" lang="en" sz="1800" u="none" cap="none" strike="noStrike">
-                <a:solidFill>
-                  <a:srgbClr val="000000"/>
-                </a:solidFill>
-                <a:latin typeface="Arial"/>
-                <a:ea typeface="Arial"/>
-                <a:cs typeface="Arial"/>
-                <a:sym typeface="Arial"/>
-              </a:rPr>
-              <a:t> We can </a:t>
-            </a:r>
-            <a:r>
-              <a:rPr b="1" i="0" lang="en" sz="1800" u="none" cap="none" strike="noStrike">
-                <a:solidFill>
-                  <a:srgbClr val="5AABBC"/>
-                </a:solidFill>
-                <a:latin typeface="Consolas"/>
-                <a:ea typeface="Consolas"/>
-                <a:cs typeface="Consolas"/>
-                <a:sym typeface="Consolas"/>
-              </a:rPr>
-              <a:t>import math</a:t>
-            </a:r>
-            <a:r>
-              <a:rPr b="0" i="0" lang="en" sz="1800" u="none" cap="none" strike="noStrike">
-                <a:solidFill>
-                  <a:srgbClr val="000000"/>
-                </a:solidFill>
-                <a:latin typeface="Arial"/>
-                <a:ea typeface="Arial"/>
-                <a:cs typeface="Arial"/>
-                <a:sym typeface="Arial"/>
-              </a:rPr>
-              <a:t> and use the </a:t>
-            </a:r>
-            <a:r>
-              <a:rPr b="1" i="0" lang="en" sz="1800" u="none" cap="none" strike="noStrike">
-                <a:solidFill>
-                  <a:srgbClr val="A31515"/>
-                </a:solidFill>
-                <a:latin typeface="Consolas"/>
-                <a:ea typeface="Consolas"/>
-                <a:cs typeface="Consolas"/>
-                <a:sym typeface="Consolas"/>
-              </a:rPr>
-              <a:t>math.sqrt()</a:t>
-            </a:r>
-            <a:r>
-              <a:rPr b="0" i="0" lang="en" sz="1800" u="none" cap="none" strike="noStrike">
-                <a:solidFill>
-                  <a:srgbClr val="000000"/>
-                </a:solidFill>
-                <a:latin typeface="Arial"/>
-                <a:ea typeface="Arial"/>
-                <a:cs typeface="Arial"/>
-                <a:sym typeface="Arial"/>
-              </a:rPr>
-              <a:t> and </a:t>
-            </a:r>
-            <a:r>
-              <a:rPr b="1" i="0" lang="en" sz="1800" u="none" cap="none" strike="noStrike">
-                <a:solidFill>
-                  <a:srgbClr val="A31515"/>
-                </a:solidFill>
-                <a:latin typeface="Consolas"/>
-                <a:ea typeface="Consolas"/>
-                <a:cs typeface="Consolas"/>
-                <a:sym typeface="Consolas"/>
-              </a:rPr>
-              <a:t>math.pow()</a:t>
-            </a:r>
-            <a:r>
-              <a:rPr b="0" i="0" lang="en" sz="1800" u="none" cap="none" strike="noStrike">
-                <a:solidFill>
-                  <a:srgbClr val="000000"/>
-                </a:solidFill>
-                <a:latin typeface="Arial"/>
-                <a:ea typeface="Arial"/>
-                <a:cs typeface="Arial"/>
-                <a:sym typeface="Arial"/>
-              </a:rPr>
-              <a:t> functions!</a:t>
-            </a:r>
-            <a:endParaRPr b="1" i="0" sz="1800" u="none" cap="none" strike="noStrike">
-              <a:solidFill>
-                <a:srgbClr val="A31415"/>
-              </a:solidFill>
-              <a:latin typeface="Consolas"/>
-              <a:ea typeface="Consolas"/>
-              <a:cs typeface="Consolas"/>
-              <a:sym typeface="Consolas"/>
             </a:endParaRPr>
           </a:p>
         </p:txBody>
@@ -7683,7 +7290,7 @@
   <p:cSld>
     <p:spTree>
       <p:nvGrpSpPr>
-        <p:cNvPr id="92" name="Shape 92"/>
+        <p:cNvPr id="145" name="Shape 145"/>
         <p:cNvGrpSpPr/>
         <p:nvPr/>
       </p:nvGrpSpPr>
@@ -7697,7 +7304,7 @@
       </p:grpSpPr>
       <p:sp>
         <p:nvSpPr>
-          <p:cNvPr id="93" name="Google Shape;93;g3bc426a098a_0_41"/>
+          <p:cNvPr id="146" name="Google Shape;146;g3bca1707a95_0_89"/>
           <p:cNvSpPr txBox="1"/>
           <p:nvPr>
             <p:ph type="title"/>
@@ -7737,20 +7344,73 @@
       </p:sp>
       <p:sp>
         <p:nvSpPr>
-          <p:cNvPr id="94" name="Google Shape;94;g3bc426a098a_0_41"/>
+          <p:cNvPr id="147" name="Google Shape;147;g3bca1707a95_0_89"/>
+          <p:cNvSpPr/>
+          <p:nvPr/>
+        </p:nvSpPr>
+        <p:spPr>
+          <a:xfrm>
+            <a:off x="3616325" y="2609025"/>
+            <a:ext cx="1977600" cy="2671200"/>
+          </a:xfrm>
+          <a:prstGeom prst="roundRect">
+            <a:avLst>
+              <a:gd fmla="val 16667" name="adj"/>
+            </a:avLst>
+          </a:prstGeom>
+          <a:solidFill>
+            <a:srgbClr val="FFF995"/>
+          </a:solidFill>
+          <a:ln cap="flat" cmpd="sng" w="19050">
+            <a:solidFill>
+              <a:srgbClr val="000000"/>
+            </a:solidFill>
+            <a:prstDash val="solid"/>
+            <a:round/>
+            <a:headEnd len="sm" w="sm" type="none"/>
+            <a:tailEnd len="sm" w="sm" type="none"/>
+          </a:ln>
+        </p:spPr>
+        <p:txBody>
+          <a:bodyPr anchorCtr="0" anchor="ctr" bIns="91425" lIns="91425" spcFirstLastPara="1" rIns="91425" wrap="square" tIns="91425">
+            <a:noAutofit/>
+          </a:bodyPr>
+          <a:lstStyle/>
+          <a:p>
+            <a:pPr indent="0" lvl="0" marL="0" rtl="0" algn="ctr">
+              <a:spcBef>
+                <a:spcPts val="0"/>
+              </a:spcBef>
+              <a:spcAft>
+                <a:spcPts val="0"/>
+              </a:spcAft>
+              <a:buNone/>
+            </a:pPr>
+            <a:r>
+              <a:t/>
+            </a:r>
+            <a:endParaRPr/>
+          </a:p>
+        </p:txBody>
+      </p:sp>
+      <p:sp>
+        <p:nvSpPr>
+          <p:cNvPr id="148" name="Google Shape;148;g3bca1707a95_0_89"/>
           <p:cNvSpPr txBox="1"/>
-          <p:nvPr>
-            <p:ph idx="1" type="body"/>
-          </p:nvPr>
+          <p:nvPr/>
         </p:nvSpPr>
         <p:spPr>
           <a:xfrm>
-            <a:off x="457200" y="1600200"/>
-            <a:ext cx="8229600" cy="4967700"/>
+            <a:off x="3550075" y="3375175"/>
+            <a:ext cx="2029200" cy="1263000"/>
           </a:xfrm>
           <a:prstGeom prst="rect">
             <a:avLst/>
           </a:prstGeom>
+          <a:noFill/>
+          <a:ln>
+            <a:noFill/>
+          </a:ln>
         </p:spPr>
         <p:txBody>
           <a:bodyPr anchorCtr="0" anchor="t" bIns="91425" lIns="91425" spcFirstLastPara="1" rIns="91425" wrap="square" tIns="91425">
@@ -7758,9 +7418,9 @@
           </a:bodyPr>
           <a:lstStyle/>
           <a:p>
-            <a:pPr indent="0" lvl="0" marL="0" rtl="0" algn="l">
-              <a:spcBef>
-                <a:spcPts val="600"/>
+            <a:pPr indent="0" lvl="0" marL="0" rtl="0" algn="ctr">
+              <a:spcBef>
+                <a:spcPts val="0"/>
               </a:spcBef>
               <a:spcAft>
                 <a:spcPts val="0"/>
@@ -7768,12 +7428,830 @@
               <a:buNone/>
             </a:pPr>
             <a:r>
+              <a:rPr b="1" lang="en" sz="2400">
+                <a:solidFill>
+                  <a:srgbClr val="A31415"/>
+                </a:solidFill>
+              </a:rPr>
+              <a:t>Magic Box</a:t>
+            </a:r>
+            <a:endParaRPr b="1" sz="2400">
+              <a:solidFill>
+                <a:srgbClr val="A31415"/>
+              </a:solidFill>
+            </a:endParaRPr>
+          </a:p>
+          <a:p>
+            <a:pPr indent="0" lvl="0" marL="0" rtl="0" algn="ctr">
+              <a:spcBef>
+                <a:spcPts val="0"/>
+              </a:spcBef>
+              <a:spcAft>
+                <a:spcPts val="0"/>
+              </a:spcAft>
+              <a:buNone/>
+            </a:pPr>
+            <a:r>
               <a:t/>
+            </a:r>
+            <a:endParaRPr sz="2400">
+              <a:solidFill>
+                <a:schemeClr val="dk1"/>
+              </a:solidFill>
+            </a:endParaRPr>
+          </a:p>
+          <a:p>
+            <a:pPr indent="0" lvl="0" marL="0" rtl="0" algn="ctr">
+              <a:spcBef>
+                <a:spcPts val="0"/>
+              </a:spcBef>
+              <a:spcAft>
+                <a:spcPts val="0"/>
+              </a:spcAft>
+              <a:buNone/>
+            </a:pPr>
+            <a:r>
+              <a:rPr b="1" lang="en" sz="2400">
+                <a:solidFill>
+                  <a:srgbClr val="5AABBC"/>
+                </a:solidFill>
+                <a:latin typeface="Consolas"/>
+                <a:ea typeface="Consolas"/>
+                <a:cs typeface="Consolas"/>
+                <a:sym typeface="Consolas"/>
+              </a:rPr>
+              <a:t>SLM</a:t>
+            </a:r>
+            <a:endParaRPr b="1" sz="2400">
+              <a:solidFill>
+                <a:srgbClr val="5AABBC"/>
+              </a:solidFill>
+              <a:latin typeface="Consolas"/>
+              <a:ea typeface="Consolas"/>
+              <a:cs typeface="Consolas"/>
+              <a:sym typeface="Consolas"/>
+            </a:endParaRPr>
+          </a:p>
+        </p:txBody>
+      </p:sp>
+      <p:sp>
+        <p:nvSpPr>
+          <p:cNvPr id="149" name="Google Shape;149;g3bca1707a95_0_89"/>
+          <p:cNvSpPr/>
+          <p:nvPr/>
+        </p:nvSpPr>
+        <p:spPr>
+          <a:xfrm>
+            <a:off x="610975" y="2215600"/>
+            <a:ext cx="2546700" cy="952500"/>
+          </a:xfrm>
+          <a:prstGeom prst="roundRect">
+            <a:avLst>
+              <a:gd fmla="val 16667" name="adj"/>
+            </a:avLst>
+          </a:prstGeom>
+          <a:solidFill>
+            <a:srgbClr val="95DCFF"/>
+          </a:solidFill>
+          <a:ln cap="flat" cmpd="sng" w="19050">
+            <a:solidFill>
+              <a:srgbClr val="000000"/>
+            </a:solidFill>
+            <a:prstDash val="solid"/>
+            <a:round/>
+            <a:headEnd len="sm" w="sm" type="none"/>
+            <a:tailEnd len="sm" w="sm" type="none"/>
+          </a:ln>
+        </p:spPr>
+        <p:txBody>
+          <a:bodyPr anchorCtr="0" anchor="ctr" bIns="91425" lIns="91425" spcFirstLastPara="1" rIns="91425" wrap="square" tIns="91425">
+            <a:noAutofit/>
+          </a:bodyPr>
+          <a:lstStyle/>
+          <a:p>
+            <a:pPr indent="0" lvl="0" marL="0" rtl="0" algn="ctr">
+              <a:spcBef>
+                <a:spcPts val="0"/>
+              </a:spcBef>
+              <a:spcAft>
+                <a:spcPts val="0"/>
+              </a:spcAft>
+              <a:buNone/>
+            </a:pPr>
+            <a:r>
+              <a:rPr lang="en"/>
+              <a:t>Prompt: </a:t>
+            </a:r>
+            <a:endParaRPr/>
+          </a:p>
+          <a:p>
+            <a:pPr indent="0" lvl="0" marL="0" rtl="0" algn="ctr">
+              <a:spcBef>
+                <a:spcPts val="0"/>
+              </a:spcBef>
+              <a:spcAft>
+                <a:spcPts val="0"/>
+              </a:spcAft>
+              <a:buNone/>
+            </a:pPr>
+            <a:r>
+              <a:rPr lang="en"/>
+              <a:t>“Hello there”</a:t>
             </a:r>
             <a:endParaRPr/>
           </a:p>
         </p:txBody>
       </p:sp>
+      <p:sp>
+        <p:nvSpPr>
+          <p:cNvPr id="150" name="Google Shape;150;g3bca1707a95_0_89"/>
+          <p:cNvSpPr/>
+          <p:nvPr/>
+        </p:nvSpPr>
+        <p:spPr>
+          <a:xfrm>
+            <a:off x="610975" y="3468375"/>
+            <a:ext cx="2546700" cy="952500"/>
+          </a:xfrm>
+          <a:prstGeom prst="roundRect">
+            <a:avLst>
+              <a:gd fmla="val 16667" name="adj"/>
+            </a:avLst>
+          </a:prstGeom>
+          <a:solidFill>
+            <a:srgbClr val="FFF995"/>
+          </a:solidFill>
+          <a:ln cap="flat" cmpd="sng" w="19050">
+            <a:solidFill>
+              <a:srgbClr val="000000"/>
+            </a:solidFill>
+            <a:prstDash val="solid"/>
+            <a:round/>
+            <a:headEnd len="sm" w="sm" type="none"/>
+            <a:tailEnd len="sm" w="sm" type="none"/>
+          </a:ln>
+        </p:spPr>
+        <p:txBody>
+          <a:bodyPr anchorCtr="0" anchor="ctr" bIns="91425" lIns="91425" spcFirstLastPara="1" rIns="91425" wrap="square" tIns="91425">
+            <a:noAutofit/>
+          </a:bodyPr>
+          <a:lstStyle/>
+          <a:p>
+            <a:pPr indent="0" lvl="0" marL="0" rtl="0" algn="ctr">
+              <a:spcBef>
+                <a:spcPts val="0"/>
+              </a:spcBef>
+              <a:spcAft>
+                <a:spcPts val="0"/>
+              </a:spcAft>
+              <a:buNone/>
+            </a:pPr>
+            <a:r>
+              <a:rPr lang="en"/>
+              <a:t>Tokens: </a:t>
+            </a:r>
+            <a:endParaRPr/>
+          </a:p>
+          <a:p>
+            <a:pPr indent="0" lvl="0" marL="0" rtl="0" algn="ctr">
+              <a:spcBef>
+                <a:spcPts val="0"/>
+              </a:spcBef>
+              <a:spcAft>
+                <a:spcPts val="0"/>
+              </a:spcAft>
+              <a:buNone/>
+            </a:pPr>
+            <a:r>
+              <a:rPr lang="en"/>
+              <a:t>{“hello”: 73, “</a:t>
+            </a:r>
+            <a:r>
+              <a:rPr lang="en"/>
+              <a:t>t</a:t>
+            </a:r>
+            <a:r>
+              <a:rPr lang="en"/>
+              <a:t>here”: 44}</a:t>
+            </a:r>
+            <a:endParaRPr/>
+          </a:p>
+        </p:txBody>
+      </p:sp>
+      <p:sp>
+        <p:nvSpPr>
+          <p:cNvPr id="151" name="Google Shape;151;g3bca1707a95_0_89"/>
+          <p:cNvSpPr/>
+          <p:nvPr/>
+        </p:nvSpPr>
+        <p:spPr>
+          <a:xfrm>
+            <a:off x="610975" y="4721150"/>
+            <a:ext cx="2546700" cy="952500"/>
+          </a:xfrm>
+          <a:prstGeom prst="roundRect">
+            <a:avLst>
+              <a:gd fmla="val 16667" name="adj"/>
+            </a:avLst>
+          </a:prstGeom>
+          <a:solidFill>
+            <a:srgbClr val="ABFF95"/>
+          </a:solidFill>
+          <a:ln cap="flat" cmpd="sng" w="19050">
+            <a:solidFill>
+              <a:srgbClr val="000000"/>
+            </a:solidFill>
+            <a:prstDash val="solid"/>
+            <a:round/>
+            <a:headEnd len="sm" w="sm" type="none"/>
+            <a:tailEnd len="sm" w="sm" type="none"/>
+          </a:ln>
+        </p:spPr>
+        <p:txBody>
+          <a:bodyPr anchorCtr="0" anchor="ctr" bIns="91425" lIns="91425" spcFirstLastPara="1" rIns="91425" wrap="square" tIns="91425">
+            <a:noAutofit/>
+          </a:bodyPr>
+          <a:lstStyle/>
+          <a:p>
+            <a:pPr indent="0" lvl="0" marL="0" rtl="0" algn="ctr">
+              <a:spcBef>
+                <a:spcPts val="0"/>
+              </a:spcBef>
+              <a:spcAft>
+                <a:spcPts val="0"/>
+              </a:spcAft>
+              <a:buNone/>
+            </a:pPr>
+            <a:r>
+              <a:rPr lang="en"/>
+              <a:t>Embeddings:</a:t>
+            </a:r>
+            <a:endParaRPr/>
+          </a:p>
+          <a:p>
+            <a:pPr indent="0" lvl="0" marL="0" rtl="0" algn="ctr">
+              <a:spcBef>
+                <a:spcPts val="0"/>
+              </a:spcBef>
+              <a:spcAft>
+                <a:spcPts val="0"/>
+              </a:spcAft>
+              <a:buNone/>
+            </a:pPr>
+            <a:r>
+              <a:rPr lang="en"/>
+              <a:t>{73: &lt;0.4, 0.3, …, -0.02&gt;</a:t>
+            </a:r>
+            <a:endParaRPr/>
+          </a:p>
+          <a:p>
+            <a:pPr indent="0" lvl="0" marL="0" rtl="0" algn="ctr">
+              <a:spcBef>
+                <a:spcPts val="0"/>
+              </a:spcBef>
+              <a:spcAft>
+                <a:spcPts val="0"/>
+              </a:spcAft>
+              <a:buNone/>
+            </a:pPr>
+            <a:r>
+              <a:rPr lang="en">
+                <a:solidFill>
+                  <a:schemeClr val="dk1"/>
+                </a:solidFill>
+              </a:rPr>
+              <a:t>44</a:t>
+            </a:r>
+            <a:r>
+              <a:rPr lang="en">
+                <a:solidFill>
+                  <a:schemeClr val="dk1"/>
+                </a:solidFill>
+              </a:rPr>
+              <a:t>: &lt;0.27, 0.8, …, 0.06&gt;</a:t>
+            </a:r>
+            <a:r>
+              <a:rPr lang="en"/>
+              <a:t>}</a:t>
+            </a:r>
+            <a:endParaRPr/>
+          </a:p>
+        </p:txBody>
+      </p:sp>
+      <p:cxnSp>
+        <p:nvCxnSpPr>
+          <p:cNvPr id="152" name="Google Shape;152;g3bca1707a95_0_89"/>
+          <p:cNvCxnSpPr>
+            <a:stCxn id="149" idx="2"/>
+            <a:endCxn id="150" idx="0"/>
+          </p:cNvCxnSpPr>
+          <p:nvPr/>
+        </p:nvCxnSpPr>
+        <p:spPr>
+          <a:xfrm flipH="1" rot="-5400000">
+            <a:off x="1734475" y="3317950"/>
+            <a:ext cx="300300" cy="600"/>
+          </a:xfrm>
+          <a:prstGeom prst="curvedConnector3">
+            <a:avLst>
+              <a:gd fmla="val 49996" name="adj1"/>
+            </a:avLst>
+          </a:prstGeom>
+          <a:noFill/>
+          <a:ln cap="flat" cmpd="sng" w="19050">
+            <a:solidFill>
+              <a:srgbClr val="002B5B"/>
+            </a:solidFill>
+            <a:prstDash val="solid"/>
+            <a:round/>
+            <a:headEnd len="med" w="med" type="none"/>
+            <a:tailEnd len="med" w="med" type="triangle"/>
+          </a:ln>
+        </p:spPr>
+      </p:cxnSp>
+      <p:cxnSp>
+        <p:nvCxnSpPr>
+          <p:cNvPr id="153" name="Google Shape;153;g3bca1707a95_0_89"/>
+          <p:cNvCxnSpPr>
+            <a:stCxn id="150" idx="2"/>
+            <a:endCxn id="151" idx="0"/>
+          </p:cNvCxnSpPr>
+          <p:nvPr/>
+        </p:nvCxnSpPr>
+        <p:spPr>
+          <a:xfrm flipH="1" rot="-5400000">
+            <a:off x="1734475" y="4570725"/>
+            <a:ext cx="300300" cy="600"/>
+          </a:xfrm>
+          <a:prstGeom prst="curvedConnector3">
+            <a:avLst>
+              <a:gd fmla="val 49996" name="adj1"/>
+            </a:avLst>
+          </a:prstGeom>
+          <a:noFill/>
+          <a:ln cap="flat" cmpd="sng" w="19050">
+            <a:solidFill>
+              <a:srgbClr val="002B5B"/>
+            </a:solidFill>
+            <a:prstDash val="solid"/>
+            <a:round/>
+            <a:headEnd len="med" w="med" type="none"/>
+            <a:tailEnd len="med" w="med" type="triangle"/>
+          </a:ln>
+        </p:spPr>
+      </p:cxnSp>
+      <p:cxnSp>
+        <p:nvCxnSpPr>
+          <p:cNvPr id="154" name="Google Shape;154;g3bca1707a95_0_89"/>
+          <p:cNvCxnSpPr>
+            <a:stCxn id="151" idx="2"/>
+            <a:endCxn id="147" idx="2"/>
+          </p:cNvCxnSpPr>
+          <p:nvPr/>
+        </p:nvCxnSpPr>
+        <p:spPr>
+          <a:xfrm rot="-5400000">
+            <a:off x="3048025" y="4116650"/>
+            <a:ext cx="393300" cy="2720700"/>
+          </a:xfrm>
+          <a:prstGeom prst="curvedConnector3">
+            <a:avLst>
+              <a:gd fmla="val -60545" name="adj1"/>
+            </a:avLst>
+          </a:prstGeom>
+          <a:noFill/>
+          <a:ln cap="flat" cmpd="sng" w="19050">
+            <a:solidFill>
+              <a:srgbClr val="002B5B"/>
+            </a:solidFill>
+            <a:prstDash val="solid"/>
+            <a:round/>
+            <a:headEnd len="med" w="med" type="none"/>
+            <a:tailEnd len="med" w="med" type="triangle"/>
+          </a:ln>
+        </p:spPr>
+      </p:cxnSp>
+      <p:sp>
+        <p:nvSpPr>
+          <p:cNvPr id="155" name="Google Shape;155;g3bca1707a95_0_89"/>
+          <p:cNvSpPr/>
+          <p:nvPr/>
+        </p:nvSpPr>
+        <p:spPr>
+          <a:xfrm>
+            <a:off x="6052575" y="1893138"/>
+            <a:ext cx="2546700" cy="952500"/>
+          </a:xfrm>
+          <a:prstGeom prst="roundRect">
+            <a:avLst>
+              <a:gd fmla="val 16667" name="adj"/>
+            </a:avLst>
+          </a:prstGeom>
+          <a:solidFill>
+            <a:srgbClr val="95DCFF"/>
+          </a:solidFill>
+          <a:ln cap="flat" cmpd="sng" w="19050">
+            <a:solidFill>
+              <a:srgbClr val="000000"/>
+            </a:solidFill>
+            <a:prstDash val="solid"/>
+            <a:round/>
+            <a:headEnd len="sm" w="sm" type="none"/>
+            <a:tailEnd len="sm" w="sm" type="none"/>
+          </a:ln>
+        </p:spPr>
+        <p:txBody>
+          <a:bodyPr anchorCtr="0" anchor="ctr" bIns="91425" lIns="91425" spcFirstLastPara="1" rIns="91425" wrap="square" tIns="91425">
+            <a:noAutofit/>
+          </a:bodyPr>
+          <a:lstStyle/>
+          <a:p>
+            <a:pPr indent="0" lvl="0" marL="0" rtl="0" algn="ctr">
+              <a:spcBef>
+                <a:spcPts val="0"/>
+              </a:spcBef>
+              <a:spcAft>
+                <a:spcPts val="0"/>
+              </a:spcAft>
+              <a:buNone/>
+            </a:pPr>
+            <a:r>
+              <a:rPr lang="en"/>
+              <a:t>Predicted Output:</a:t>
+            </a:r>
+            <a:endParaRPr/>
+          </a:p>
+          <a:p>
+            <a:pPr indent="0" lvl="0" marL="0" rtl="0" algn="ctr">
+              <a:spcBef>
+                <a:spcPts val="0"/>
+              </a:spcBef>
+              <a:spcAft>
+                <a:spcPts val="0"/>
+              </a:spcAft>
+              <a:buNone/>
+            </a:pPr>
+            <a:r>
+              <a:rPr lang="en"/>
+              <a:t>&lt;0.1, 0.2, …, 0.01&gt;</a:t>
+            </a:r>
+            <a:endParaRPr/>
+          </a:p>
+        </p:txBody>
+      </p:sp>
+      <p:cxnSp>
+        <p:nvCxnSpPr>
+          <p:cNvPr id="156" name="Google Shape;156;g3bca1707a95_0_89"/>
+          <p:cNvCxnSpPr>
+            <a:stCxn id="147" idx="0"/>
+            <a:endCxn id="155" idx="0"/>
+          </p:cNvCxnSpPr>
+          <p:nvPr/>
+        </p:nvCxnSpPr>
+        <p:spPr>
+          <a:xfrm rot="-5400000">
+            <a:off x="5607575" y="890775"/>
+            <a:ext cx="715800" cy="2720700"/>
+          </a:xfrm>
+          <a:prstGeom prst="curvedConnector3">
+            <a:avLst>
+              <a:gd fmla="val 133279" name="adj1"/>
+            </a:avLst>
+          </a:prstGeom>
+          <a:noFill/>
+          <a:ln cap="flat" cmpd="sng" w="19050">
+            <a:solidFill>
+              <a:srgbClr val="002B5B"/>
+            </a:solidFill>
+            <a:prstDash val="solid"/>
+            <a:round/>
+            <a:headEnd len="med" w="med" type="none"/>
+            <a:tailEnd len="med" w="med" type="triangle"/>
+          </a:ln>
+        </p:spPr>
+      </p:cxnSp>
+      <p:sp>
+        <p:nvSpPr>
+          <p:cNvPr id="157" name="Google Shape;157;g3bca1707a95_0_89"/>
+          <p:cNvSpPr/>
+          <p:nvPr/>
+        </p:nvSpPr>
+        <p:spPr>
+          <a:xfrm>
+            <a:off x="6052575" y="4094763"/>
+            <a:ext cx="2546700" cy="952500"/>
+          </a:xfrm>
+          <a:prstGeom prst="roundRect">
+            <a:avLst>
+              <a:gd fmla="val 16667" name="adj"/>
+            </a:avLst>
+          </a:prstGeom>
+          <a:solidFill>
+            <a:srgbClr val="95DCFF"/>
+          </a:solidFill>
+          <a:ln cap="flat" cmpd="sng" w="19050">
+            <a:solidFill>
+              <a:srgbClr val="000000"/>
+            </a:solidFill>
+            <a:prstDash val="solid"/>
+            <a:round/>
+            <a:headEnd len="sm" w="sm" type="none"/>
+            <a:tailEnd len="sm" w="sm" type="none"/>
+          </a:ln>
+        </p:spPr>
+        <p:txBody>
+          <a:bodyPr anchorCtr="0" anchor="ctr" bIns="91425" lIns="91425" spcFirstLastPara="1" rIns="91425" wrap="square" tIns="91425">
+            <a:noAutofit/>
+          </a:bodyPr>
+          <a:lstStyle/>
+          <a:p>
+            <a:pPr indent="0" lvl="0" marL="0" rtl="0" algn="ctr">
+              <a:spcBef>
+                <a:spcPts val="0"/>
+              </a:spcBef>
+              <a:spcAft>
+                <a:spcPts val="0"/>
+              </a:spcAft>
+              <a:buNone/>
+            </a:pPr>
+            <a:r>
+              <a:rPr lang="en"/>
+              <a:t>Expected Output:</a:t>
+            </a:r>
+            <a:endParaRPr/>
+          </a:p>
+          <a:p>
+            <a:pPr indent="0" lvl="0" marL="0" rtl="0" algn="ctr">
+              <a:spcBef>
+                <a:spcPts val="0"/>
+              </a:spcBef>
+              <a:spcAft>
+                <a:spcPts val="0"/>
+              </a:spcAft>
+              <a:buNone/>
+            </a:pPr>
+            <a:r>
+              <a:rPr lang="en"/>
+              <a:t>&lt;0.0, 0.0, …, 1.0&gt;</a:t>
+            </a:r>
+            <a:endParaRPr/>
+          </a:p>
+        </p:txBody>
+      </p:sp>
+      <p:sp>
+        <p:nvSpPr>
+          <p:cNvPr id="158" name="Google Shape;158;g3bca1707a95_0_89"/>
+          <p:cNvSpPr/>
+          <p:nvPr/>
+        </p:nvSpPr>
+        <p:spPr>
+          <a:xfrm>
+            <a:off x="6470025" y="3150113"/>
+            <a:ext cx="1711800" cy="640200"/>
+          </a:xfrm>
+          <a:prstGeom prst="roundRect">
+            <a:avLst>
+              <a:gd fmla="val 16667" name="adj"/>
+            </a:avLst>
+          </a:prstGeom>
+          <a:solidFill>
+            <a:srgbClr val="9BA4FF"/>
+          </a:solidFill>
+          <a:ln cap="flat" cmpd="sng" w="19050">
+            <a:solidFill>
+              <a:srgbClr val="000000"/>
+            </a:solidFill>
+            <a:prstDash val="solid"/>
+            <a:round/>
+            <a:headEnd len="sm" w="sm" type="none"/>
+            <a:tailEnd len="sm" w="sm" type="none"/>
+          </a:ln>
+        </p:spPr>
+        <p:txBody>
+          <a:bodyPr anchorCtr="0" anchor="ctr" bIns="91425" lIns="91425" spcFirstLastPara="1" rIns="91425" wrap="square" tIns="91425">
+            <a:noAutofit/>
+          </a:bodyPr>
+          <a:lstStyle/>
+          <a:p>
+            <a:pPr indent="0" lvl="0" marL="0" rtl="0" algn="ctr">
+              <a:spcBef>
+                <a:spcPts val="0"/>
+              </a:spcBef>
+              <a:spcAft>
+                <a:spcPts val="0"/>
+              </a:spcAft>
+              <a:buNone/>
+            </a:pPr>
+            <a:r>
+              <a:rPr b="1" lang="en">
+                <a:solidFill>
+                  <a:srgbClr val="A31415"/>
+                </a:solidFill>
+                <a:latin typeface="Consolas"/>
+                <a:ea typeface="Consolas"/>
+                <a:cs typeface="Consolas"/>
+                <a:sym typeface="Consolas"/>
+              </a:rPr>
+              <a:t>Compare</a:t>
+            </a:r>
+            <a:endParaRPr b="1">
+              <a:solidFill>
+                <a:srgbClr val="A31415"/>
+              </a:solidFill>
+              <a:latin typeface="Consolas"/>
+              <a:ea typeface="Consolas"/>
+              <a:cs typeface="Consolas"/>
+              <a:sym typeface="Consolas"/>
+            </a:endParaRPr>
+          </a:p>
+        </p:txBody>
+      </p:sp>
+      <p:cxnSp>
+        <p:nvCxnSpPr>
+          <p:cNvPr id="159" name="Google Shape;159;g3bca1707a95_0_89"/>
+          <p:cNvCxnSpPr>
+            <a:stCxn id="157" idx="0"/>
+            <a:endCxn id="158" idx="2"/>
+          </p:cNvCxnSpPr>
+          <p:nvPr/>
+        </p:nvCxnSpPr>
+        <p:spPr>
+          <a:xfrm rot="-5400000">
+            <a:off x="7173975" y="3942213"/>
+            <a:ext cx="304500" cy="600"/>
+          </a:xfrm>
+          <a:prstGeom prst="curvedConnector3">
+            <a:avLst>
+              <a:gd fmla="val 49992" name="adj1"/>
+            </a:avLst>
+          </a:prstGeom>
+          <a:noFill/>
+          <a:ln cap="flat" cmpd="sng" w="19050">
+            <a:solidFill>
+              <a:srgbClr val="002B5B"/>
+            </a:solidFill>
+            <a:prstDash val="solid"/>
+            <a:round/>
+            <a:headEnd len="med" w="med" type="none"/>
+            <a:tailEnd len="med" w="med" type="triangle"/>
+          </a:ln>
+        </p:spPr>
+      </p:cxnSp>
+      <p:cxnSp>
+        <p:nvCxnSpPr>
+          <p:cNvPr id="160" name="Google Shape;160;g3bca1707a95_0_89"/>
+          <p:cNvCxnSpPr>
+            <a:stCxn id="155" idx="2"/>
+            <a:endCxn id="158" idx="0"/>
+          </p:cNvCxnSpPr>
+          <p:nvPr/>
+        </p:nvCxnSpPr>
+        <p:spPr>
+          <a:xfrm>
+            <a:off x="7325925" y="2845638"/>
+            <a:ext cx="0" cy="304500"/>
+          </a:xfrm>
+          <a:prstGeom prst="straightConnector1">
+            <a:avLst/>
+          </a:prstGeom>
+          <a:noFill/>
+          <a:ln cap="flat" cmpd="sng" w="19050">
+            <a:solidFill>
+              <a:srgbClr val="002B5B"/>
+            </a:solidFill>
+            <a:prstDash val="solid"/>
+            <a:round/>
+            <a:headEnd len="med" w="med" type="none"/>
+            <a:tailEnd len="med" w="med" type="triangle"/>
+          </a:ln>
+        </p:spPr>
+      </p:cxnSp>
+      <p:sp>
+        <p:nvSpPr>
+          <p:cNvPr id="161" name="Google Shape;161;g3bca1707a95_0_89"/>
+          <p:cNvSpPr/>
+          <p:nvPr/>
+        </p:nvSpPr>
+        <p:spPr>
+          <a:xfrm>
+            <a:off x="6052875" y="5522800"/>
+            <a:ext cx="2546700" cy="952500"/>
+          </a:xfrm>
+          <a:prstGeom prst="roundRect">
+            <a:avLst>
+              <a:gd fmla="val 16667" name="adj"/>
+            </a:avLst>
+          </a:prstGeom>
+          <a:solidFill>
+            <a:srgbClr val="ABFF95"/>
+          </a:solidFill>
+          <a:ln cap="flat" cmpd="sng" w="19050">
+            <a:solidFill>
+              <a:srgbClr val="000000"/>
+            </a:solidFill>
+            <a:prstDash val="solid"/>
+            <a:round/>
+            <a:headEnd len="sm" w="sm" type="none"/>
+            <a:tailEnd len="sm" w="sm" type="none"/>
+          </a:ln>
+        </p:spPr>
+        <p:txBody>
+          <a:bodyPr anchorCtr="0" anchor="ctr" bIns="91425" lIns="91425" spcFirstLastPara="1" rIns="91425" wrap="square" tIns="91425">
+            <a:noAutofit/>
+          </a:bodyPr>
+          <a:lstStyle/>
+          <a:p>
+            <a:pPr indent="0" lvl="0" marL="0" rtl="0" algn="ctr">
+              <a:spcBef>
+                <a:spcPts val="0"/>
+              </a:spcBef>
+              <a:spcAft>
+                <a:spcPts val="0"/>
+              </a:spcAft>
+              <a:buNone/>
+            </a:pPr>
+            <a:r>
+              <a:rPr lang="en"/>
+              <a:t>Ground Truth: </a:t>
+            </a:r>
+            <a:endParaRPr/>
+          </a:p>
+          <a:p>
+            <a:pPr indent="0" lvl="0" marL="0" rtl="0" algn="ctr">
+              <a:spcBef>
+                <a:spcPts val="0"/>
+              </a:spcBef>
+              <a:spcAft>
+                <a:spcPts val="0"/>
+              </a:spcAft>
+              <a:buNone/>
+            </a:pPr>
+            <a:r>
+              <a:rPr lang="en"/>
+              <a:t>“Hello there General”</a:t>
+            </a:r>
+            <a:endParaRPr/>
+          </a:p>
+        </p:txBody>
+      </p:sp>
+      <p:cxnSp>
+        <p:nvCxnSpPr>
+          <p:cNvPr id="162" name="Google Shape;162;g3bca1707a95_0_89"/>
+          <p:cNvCxnSpPr>
+            <a:stCxn id="161" idx="0"/>
+            <a:endCxn id="157" idx="2"/>
+          </p:cNvCxnSpPr>
+          <p:nvPr/>
+        </p:nvCxnSpPr>
+        <p:spPr>
+          <a:xfrm rot="10800000">
+            <a:off x="7325925" y="5047300"/>
+            <a:ext cx="300" cy="475500"/>
+          </a:xfrm>
+          <a:prstGeom prst="straightConnector1">
+            <a:avLst/>
+          </a:prstGeom>
+          <a:noFill/>
+          <a:ln cap="flat" cmpd="sng" w="19050">
+            <a:solidFill>
+              <a:srgbClr val="002B5B"/>
+            </a:solidFill>
+            <a:prstDash val="solid"/>
+            <a:round/>
+            <a:headEnd len="med" w="med" type="none"/>
+            <a:tailEnd len="med" w="med" type="triangle"/>
+          </a:ln>
+        </p:spPr>
+      </p:cxnSp>
+      <p:cxnSp>
+        <p:nvCxnSpPr>
+          <p:cNvPr id="163" name="Google Shape;163;g3bca1707a95_0_89"/>
+          <p:cNvCxnSpPr>
+            <a:stCxn id="158" idx="1"/>
+            <a:endCxn id="148" idx="3"/>
+          </p:cNvCxnSpPr>
+          <p:nvPr/>
+        </p:nvCxnSpPr>
+        <p:spPr>
+          <a:xfrm flipH="1">
+            <a:off x="5579325" y="3470213"/>
+            <a:ext cx="890700" cy="536400"/>
+          </a:xfrm>
+          <a:prstGeom prst="straightConnector1">
+            <a:avLst/>
+          </a:prstGeom>
+          <a:noFill/>
+          <a:ln cap="flat" cmpd="sng" w="19050">
+            <a:solidFill>
+              <a:srgbClr val="002B5B"/>
+            </a:solidFill>
+            <a:prstDash val="solid"/>
+            <a:round/>
+            <a:headEnd len="med" w="med" type="none"/>
+            <a:tailEnd len="med" w="med" type="triangle"/>
+          </a:ln>
+        </p:spPr>
+      </p:cxnSp>
     </p:spTree>
   </p:cSld>
   <p:clrMapOvr>
@@ -7787,7 +8265,7 @@
   <p:cSld>
     <p:spTree>
       <p:nvGrpSpPr>
-        <p:cNvPr id="98" name="Shape 98"/>
+        <p:cNvPr id="167" name="Shape 167"/>
         <p:cNvGrpSpPr/>
         <p:nvPr/>
       </p:nvGrpSpPr>
@@ -7801,7 +8279,7 @@
       </p:grpSpPr>
       <p:sp>
         <p:nvSpPr>
-          <p:cNvPr id="99" name="Google Shape;99;g3bc426a098a_0_5"/>
+          <p:cNvPr id="168" name="Google Shape;168;g3bca1707a95_0_113"/>
           <p:cNvSpPr txBox="1"/>
           <p:nvPr>
             <p:ph type="title"/>
@@ -7832,32 +8310,208 @@
               <a:buNone/>
             </a:pPr>
             <a:r>
-              <a:rPr lang="en">
-                <a:solidFill>
-                  <a:srgbClr val="A31515"/>
-                </a:solidFill>
-              </a:rPr>
-              <a:t>Deep Learning:</a:t>
-            </a:r>
-            <a:r>
               <a:rPr lang="en"/>
-              <a:t> </a:t>
-            </a:r>
-            <a:r>
-              <a:rPr lang="en">
-                <a:solidFill>
-                  <a:srgbClr val="5AABBC"/>
+              <a:t>Learning Embeddings</a:t>
+            </a:r>
+            <a:endParaRPr/>
+          </a:p>
+        </p:txBody>
+      </p:sp>
+      <p:sp>
+        <p:nvSpPr>
+          <p:cNvPr id="169" name="Google Shape;169;g3bca1707a95_0_113"/>
+          <p:cNvSpPr/>
+          <p:nvPr/>
+        </p:nvSpPr>
+        <p:spPr>
+          <a:xfrm>
+            <a:off x="1507400" y="1737838"/>
+            <a:ext cx="2546700" cy="952500"/>
+          </a:xfrm>
+          <a:prstGeom prst="roundRect">
+            <a:avLst>
+              <a:gd fmla="val 16667" name="adj"/>
+            </a:avLst>
+          </a:prstGeom>
+          <a:solidFill>
+            <a:srgbClr val="95DCFF"/>
+          </a:solidFill>
+          <a:ln cap="flat" cmpd="sng" w="19050">
+            <a:solidFill>
+              <a:srgbClr val="000000"/>
+            </a:solidFill>
+            <a:prstDash val="solid"/>
+            <a:round/>
+            <a:headEnd len="sm" w="sm" type="none"/>
+            <a:tailEnd len="sm" w="sm" type="none"/>
+          </a:ln>
+        </p:spPr>
+        <p:txBody>
+          <a:bodyPr anchorCtr="0" anchor="ctr" bIns="91425" lIns="91425" spcFirstLastPara="1" rIns="91425" wrap="square" tIns="91425">
+            <a:noAutofit/>
+          </a:bodyPr>
+          <a:lstStyle/>
+          <a:p>
+            <a:pPr indent="0" lvl="0" marL="0" rtl="0" algn="ctr">
+              <a:spcBef>
+                <a:spcPts val="0"/>
+              </a:spcBef>
+              <a:spcAft>
+                <a:spcPts val="0"/>
+              </a:spcAft>
+              <a:buNone/>
+            </a:pPr>
+            <a:r>
+              <a:rPr lang="en"/>
+              <a:t>Predicted Output:</a:t>
+            </a:r>
+            <a:endParaRPr/>
+          </a:p>
+          <a:p>
+            <a:pPr indent="0" lvl="0" marL="0" rtl="0" algn="ctr">
+              <a:spcBef>
+                <a:spcPts val="0"/>
+              </a:spcBef>
+              <a:spcAft>
+                <a:spcPts val="0"/>
+              </a:spcAft>
+              <a:buNone/>
+            </a:pPr>
+            <a:r>
+              <a:rPr lang="en"/>
+              <a:t>&lt;0.1, 0.2, …, 0.01&gt;</a:t>
+            </a:r>
+            <a:endParaRPr/>
+          </a:p>
+        </p:txBody>
+      </p:sp>
+      <p:sp>
+        <p:nvSpPr>
+          <p:cNvPr id="170" name="Google Shape;170;g3bca1707a95_0_113"/>
+          <p:cNvSpPr/>
+          <p:nvPr/>
+        </p:nvSpPr>
+        <p:spPr>
+          <a:xfrm>
+            <a:off x="1507400" y="3939463"/>
+            <a:ext cx="2546700" cy="952500"/>
+          </a:xfrm>
+          <a:prstGeom prst="roundRect">
+            <a:avLst>
+              <a:gd fmla="val 16667" name="adj"/>
+            </a:avLst>
+          </a:prstGeom>
+          <a:solidFill>
+            <a:srgbClr val="95DCFF"/>
+          </a:solidFill>
+          <a:ln cap="flat" cmpd="sng" w="19050">
+            <a:solidFill>
+              <a:srgbClr val="000000"/>
+            </a:solidFill>
+            <a:prstDash val="solid"/>
+            <a:round/>
+            <a:headEnd len="sm" w="sm" type="none"/>
+            <a:tailEnd len="sm" w="sm" type="none"/>
+          </a:ln>
+        </p:spPr>
+        <p:txBody>
+          <a:bodyPr anchorCtr="0" anchor="ctr" bIns="91425" lIns="91425" spcFirstLastPara="1" rIns="91425" wrap="square" tIns="91425">
+            <a:noAutofit/>
+          </a:bodyPr>
+          <a:lstStyle/>
+          <a:p>
+            <a:pPr indent="0" lvl="0" marL="0" rtl="0" algn="ctr">
+              <a:spcBef>
+                <a:spcPts val="0"/>
+              </a:spcBef>
+              <a:spcAft>
+                <a:spcPts val="0"/>
+              </a:spcAft>
+              <a:buNone/>
+            </a:pPr>
+            <a:r>
+              <a:rPr lang="en"/>
+              <a:t>Expected Output:</a:t>
+            </a:r>
+            <a:endParaRPr/>
+          </a:p>
+          <a:p>
+            <a:pPr indent="0" lvl="0" marL="0" rtl="0" algn="ctr">
+              <a:spcBef>
+                <a:spcPts val="0"/>
+              </a:spcBef>
+              <a:spcAft>
+                <a:spcPts val="0"/>
+              </a:spcAft>
+              <a:buNone/>
+            </a:pPr>
+            <a:r>
+              <a:rPr lang="en"/>
+              <a:t>&lt;0.0, 0.0, …, 1.0&gt;</a:t>
+            </a:r>
+            <a:endParaRPr/>
+          </a:p>
+        </p:txBody>
+      </p:sp>
+      <p:sp>
+        <p:nvSpPr>
+          <p:cNvPr id="171" name="Google Shape;171;g3bca1707a95_0_113"/>
+          <p:cNvSpPr/>
+          <p:nvPr/>
+        </p:nvSpPr>
+        <p:spPr>
+          <a:xfrm>
+            <a:off x="1924850" y="2994813"/>
+            <a:ext cx="1711800" cy="640200"/>
+          </a:xfrm>
+          <a:prstGeom prst="roundRect">
+            <a:avLst>
+              <a:gd fmla="val 16667" name="adj"/>
+            </a:avLst>
+          </a:prstGeom>
+          <a:solidFill>
+            <a:srgbClr val="9BA4FF"/>
+          </a:solidFill>
+          <a:ln cap="flat" cmpd="sng" w="19050">
+            <a:solidFill>
+              <a:srgbClr val="000000"/>
+            </a:solidFill>
+            <a:prstDash val="solid"/>
+            <a:round/>
+            <a:headEnd len="sm" w="sm" type="none"/>
+            <a:tailEnd len="sm" w="sm" type="none"/>
+          </a:ln>
+        </p:spPr>
+        <p:txBody>
+          <a:bodyPr anchorCtr="0" anchor="ctr" bIns="91425" lIns="91425" spcFirstLastPara="1" rIns="91425" wrap="square" tIns="91425">
+            <a:noAutofit/>
+          </a:bodyPr>
+          <a:lstStyle/>
+          <a:p>
+            <a:pPr indent="0" lvl="0" marL="0" rtl="0" algn="ctr">
+              <a:spcBef>
+                <a:spcPts val="0"/>
+              </a:spcBef>
+              <a:spcAft>
+                <a:spcPts val="0"/>
+              </a:spcAft>
+              <a:buNone/>
+            </a:pPr>
+            <a:r>
+              <a:rPr b="1" lang="en">
+                <a:solidFill>
+                  <a:srgbClr val="A31415"/>
                 </a:solidFill>
                 <a:latin typeface="Consolas"/>
                 <a:ea typeface="Consolas"/>
                 <a:cs typeface="Consolas"/>
                 <a:sym typeface="Consolas"/>
               </a:rPr>
-              <a:t>Loss Functions</a:t>
-            </a:r>
-            <a:endParaRPr>
+              <a:t>Compare</a:t>
+            </a:r>
+            <a:endParaRPr b="1">
               <a:solidFill>
-                <a:srgbClr val="5AABBC"/>
+                <a:srgbClr val="A31415"/>
               </a:solidFill>
               <a:latin typeface="Consolas"/>
               <a:ea typeface="Consolas"/>
@@ -7867,22 +8521,181 @@
           </a:p>
         </p:txBody>
       </p:sp>
+      <p:cxnSp>
+        <p:nvCxnSpPr>
+          <p:cNvPr id="172" name="Google Shape;172;g3bca1707a95_0_113"/>
+          <p:cNvCxnSpPr>
+            <a:stCxn id="170" idx="0"/>
+            <a:endCxn id="171" idx="2"/>
+          </p:cNvCxnSpPr>
+          <p:nvPr/>
+        </p:nvCxnSpPr>
+        <p:spPr>
+          <a:xfrm rot="-5400000">
+            <a:off x="2628800" y="3786913"/>
+            <a:ext cx="304500" cy="600"/>
+          </a:xfrm>
+          <a:prstGeom prst="curvedConnector3">
+            <a:avLst>
+              <a:gd fmla="val 49992" name="adj1"/>
+            </a:avLst>
+          </a:prstGeom>
+          <a:noFill/>
+          <a:ln cap="flat" cmpd="sng" w="19050">
+            <a:solidFill>
+              <a:srgbClr val="002B5B"/>
+            </a:solidFill>
+            <a:prstDash val="solid"/>
+            <a:round/>
+            <a:headEnd len="med" w="med" type="none"/>
+            <a:tailEnd len="med" w="med" type="triangle"/>
+          </a:ln>
+        </p:spPr>
+      </p:cxnSp>
+      <p:cxnSp>
+        <p:nvCxnSpPr>
+          <p:cNvPr id="173" name="Google Shape;173;g3bca1707a95_0_113"/>
+          <p:cNvCxnSpPr>
+            <a:stCxn id="169" idx="2"/>
+            <a:endCxn id="171" idx="0"/>
+          </p:cNvCxnSpPr>
+          <p:nvPr/>
+        </p:nvCxnSpPr>
+        <p:spPr>
+          <a:xfrm>
+            <a:off x="2780750" y="2690338"/>
+            <a:ext cx="0" cy="304500"/>
+          </a:xfrm>
+          <a:prstGeom prst="straightConnector1">
+            <a:avLst/>
+          </a:prstGeom>
+          <a:noFill/>
+          <a:ln cap="flat" cmpd="sng" w="19050">
+            <a:solidFill>
+              <a:srgbClr val="002B5B"/>
+            </a:solidFill>
+            <a:prstDash val="solid"/>
+            <a:round/>
+            <a:headEnd len="med" w="med" type="none"/>
+            <a:tailEnd len="med" w="med" type="triangle"/>
+          </a:ln>
+        </p:spPr>
+      </p:cxnSp>
       <p:sp>
         <p:nvSpPr>
-          <p:cNvPr id="100" name="Google Shape;100;g3bc426a098a_0_5"/>
+          <p:cNvPr id="174" name="Google Shape;174;g3bca1707a95_0_113"/>
+          <p:cNvSpPr/>
+          <p:nvPr/>
+        </p:nvSpPr>
+        <p:spPr>
+          <a:xfrm>
+            <a:off x="1507700" y="5367500"/>
+            <a:ext cx="2546700" cy="952500"/>
+          </a:xfrm>
+          <a:prstGeom prst="roundRect">
+            <a:avLst>
+              <a:gd fmla="val 16667" name="adj"/>
+            </a:avLst>
+          </a:prstGeom>
+          <a:solidFill>
+            <a:srgbClr val="ABFF95"/>
+          </a:solidFill>
+          <a:ln cap="flat" cmpd="sng" w="19050">
+            <a:solidFill>
+              <a:srgbClr val="000000"/>
+            </a:solidFill>
+            <a:prstDash val="solid"/>
+            <a:round/>
+            <a:headEnd len="sm" w="sm" type="none"/>
+            <a:tailEnd len="sm" w="sm" type="none"/>
+          </a:ln>
+        </p:spPr>
+        <p:txBody>
+          <a:bodyPr anchorCtr="0" anchor="ctr" bIns="91425" lIns="91425" spcFirstLastPara="1" rIns="91425" wrap="square" tIns="91425">
+            <a:noAutofit/>
+          </a:bodyPr>
+          <a:lstStyle/>
+          <a:p>
+            <a:pPr indent="0" lvl="0" marL="0" rtl="0" algn="ctr">
+              <a:spcBef>
+                <a:spcPts val="0"/>
+              </a:spcBef>
+              <a:spcAft>
+                <a:spcPts val="0"/>
+              </a:spcAft>
+              <a:buNone/>
+            </a:pPr>
+            <a:r>
+              <a:rPr lang="en"/>
+              <a:t>Ground Truth: </a:t>
+            </a:r>
+            <a:endParaRPr/>
+          </a:p>
+          <a:p>
+            <a:pPr indent="0" lvl="0" marL="0" rtl="0" algn="ctr">
+              <a:spcBef>
+                <a:spcPts val="0"/>
+              </a:spcBef>
+              <a:spcAft>
+                <a:spcPts val="0"/>
+              </a:spcAft>
+              <a:buNone/>
+            </a:pPr>
+            <a:r>
+              <a:rPr lang="en"/>
+              <a:t>“Hello there General”</a:t>
+            </a:r>
+            <a:endParaRPr/>
+          </a:p>
+        </p:txBody>
+      </p:sp>
+      <p:cxnSp>
+        <p:nvCxnSpPr>
+          <p:cNvPr id="175" name="Google Shape;175;g3bca1707a95_0_113"/>
+          <p:cNvCxnSpPr>
+            <a:stCxn id="174" idx="0"/>
+            <a:endCxn id="170" idx="2"/>
+          </p:cNvCxnSpPr>
+          <p:nvPr/>
+        </p:nvCxnSpPr>
+        <p:spPr>
+          <a:xfrm rot="10800000">
+            <a:off x="2780750" y="4892000"/>
+            <a:ext cx="300" cy="475500"/>
+          </a:xfrm>
+          <a:prstGeom prst="straightConnector1">
+            <a:avLst/>
+          </a:prstGeom>
+          <a:noFill/>
+          <a:ln cap="flat" cmpd="sng" w="19050">
+            <a:solidFill>
+              <a:srgbClr val="002B5B"/>
+            </a:solidFill>
+            <a:prstDash val="solid"/>
+            <a:round/>
+            <a:headEnd len="med" w="med" type="none"/>
+            <a:tailEnd len="med" w="med" type="triangle"/>
+          </a:ln>
+        </p:spPr>
+      </p:cxnSp>
+      <p:sp>
+        <p:nvSpPr>
+          <p:cNvPr id="176" name="Google Shape;176;g3bca1707a95_0_113"/>
           <p:cNvSpPr txBox="1"/>
-          <p:nvPr>
-            <p:ph idx="1" type="body"/>
-          </p:nvPr>
+          <p:nvPr/>
         </p:nvSpPr>
         <p:spPr>
           <a:xfrm>
-            <a:off x="457200" y="1600200"/>
-            <a:ext cx="8229600" cy="1987800"/>
+            <a:off x="4534725" y="1725900"/>
+            <a:ext cx="4441500" cy="3406200"/>
           </a:xfrm>
           <a:prstGeom prst="rect">
             <a:avLst/>
           </a:prstGeom>
+          <a:noFill/>
+          <a:ln>
+            <a:noFill/>
+          </a:ln>
         </p:spPr>
         <p:txBody>
           <a:bodyPr anchorCtr="0" anchor="t" bIns="91425" lIns="91425" spcFirstLastPara="1" rIns="91425" wrap="square" tIns="91425">
@@ -7892,7 +8705,7 @@
           <a:p>
             <a:pPr indent="0" lvl="0" marL="0" rtl="0" algn="l">
               <a:spcBef>
-                <a:spcPts val="600"/>
+                <a:spcPts val="0"/>
               </a:spcBef>
               <a:spcAft>
                 <a:spcPts val="0"/>
@@ -7900,186 +8713,16 @@
               <a:buNone/>
             </a:pPr>
             <a:r>
-              <a:rPr lang="en"/>
-              <a:t>A </a:t>
-            </a:r>
-            <a:r>
-              <a:rPr b="1" lang="en">
-                <a:solidFill>
-                  <a:srgbClr val="5AABBC"/>
-                </a:solidFill>
-                <a:latin typeface="Consolas"/>
-                <a:ea typeface="Consolas"/>
-                <a:cs typeface="Consolas"/>
-                <a:sym typeface="Consolas"/>
+              <a:rPr lang="en" sz="3000">
+                <a:solidFill>
+                  <a:schemeClr val="dk1"/>
+                </a:solidFill>
               </a:rPr>
-              <a:t>loss function</a:t>
-            </a:r>
-            <a:r>
-              <a:rPr lang="en"/>
-              <a:t> allows us to numerically measure </a:t>
-            </a:r>
-            <a:r>
-              <a:rPr b="1" lang="en">
-                <a:solidFill>
-                  <a:srgbClr val="DCB439"/>
-                </a:solidFill>
-              </a:rPr>
-              <a:t>how far off our model’s predicted values are from what we expected them to be</a:t>
-            </a:r>
-            <a:r>
-              <a:rPr lang="en"/>
-              <a:t>, or what we know the right answer is.</a:t>
-            </a:r>
-            <a:endParaRPr/>
-          </a:p>
-        </p:txBody>
-      </p:sp>
-      <p:pic>
-        <p:nvPicPr>
-          <p:cNvPr id="101" name="Google Shape;101;g3bc426a098a_0_5" title="Screenshot 2026-02-03 at 8.16.38 AM.png"/>
-          <p:cNvPicPr preferRelativeResize="0"/>
-          <p:nvPr/>
-        </p:nvPicPr>
-        <p:blipFill>
-          <a:blip r:embed="rId3">
-            <a:alphaModFix/>
-          </a:blip>
-          <a:stretch>
-            <a:fillRect/>
-          </a:stretch>
-        </p:blipFill>
-        <p:spPr>
-          <a:xfrm>
-            <a:off x="1743075" y="3588000"/>
-            <a:ext cx="5657850" cy="1790700"/>
-          </a:xfrm>
-          <a:prstGeom prst="rect">
-            <a:avLst/>
-          </a:prstGeom>
-          <a:noFill/>
-          <a:ln>
-            <a:noFill/>
-          </a:ln>
-        </p:spPr>
-      </p:pic>
-      <p:sp>
-        <p:nvSpPr>
-          <p:cNvPr id="102" name="Google Shape;102;g3bc426a098a_0_5"/>
-          <p:cNvSpPr txBox="1"/>
-          <p:nvPr/>
-        </p:nvSpPr>
-        <p:spPr>
-          <a:xfrm>
-            <a:off x="457200" y="5378700"/>
-            <a:ext cx="8229600" cy="928500"/>
-          </a:xfrm>
-          <a:prstGeom prst="rect">
-            <a:avLst/>
-          </a:prstGeom>
-          <a:noFill/>
-          <a:ln>
-            <a:noFill/>
-          </a:ln>
-        </p:spPr>
-        <p:txBody>
-          <a:bodyPr anchorCtr="0" anchor="t" bIns="96925" lIns="96925" spcFirstLastPara="1" rIns="96925" wrap="square" tIns="96925">
-            <a:noAutofit/>
-          </a:bodyPr>
-          <a:lstStyle/>
-          <a:p>
-            <a:pPr indent="0" lvl="0" marL="0" rtl="0" algn="ctr">
-              <a:spcBef>
-                <a:spcPts val="0"/>
-              </a:spcBef>
-              <a:spcAft>
-                <a:spcPts val="0"/>
-              </a:spcAft>
-              <a:buNone/>
-            </a:pPr>
-            <a:r>
-              <a:rPr b="1" lang="en" sz="1200">
-                <a:solidFill>
-                  <a:srgbClr val="002B5B"/>
-                </a:solidFill>
-              </a:rPr>
-              <a:t>Cross-Entropy</a:t>
-            </a:r>
-            <a:r>
-              <a:rPr b="1" lang="en" sz="1200">
-                <a:solidFill>
-                  <a:srgbClr val="002B5B"/>
-                </a:solidFill>
-              </a:rPr>
-              <a:t>: </a:t>
-            </a:r>
-            <a:r>
-              <a:rPr lang="en" sz="1200">
-                <a:solidFill>
-                  <a:srgbClr val="999999"/>
-                </a:solidFill>
-              </a:rPr>
-              <a:t>The loss function used to train LLMs is called “Cross-Entropy Loss” and it’s one of the most common loss functions. Heavily based on the principle of “entropy” as used in Information Theory, it’s a measure of how surprising our answer is relative to our ground-truth based on the entropy formula: -∑ p(x)log</a:t>
-            </a:r>
-            <a:r>
-              <a:rPr baseline="-25000" lang="en" sz="1200">
-                <a:solidFill>
-                  <a:srgbClr val="999999"/>
-                </a:solidFill>
-              </a:rPr>
-              <a:t>2</a:t>
-            </a:r>
-            <a:r>
-              <a:rPr lang="en" sz="1200">
-                <a:solidFill>
-                  <a:srgbClr val="999999"/>
-                </a:solidFill>
-              </a:rPr>
-              <a:t>p(x)</a:t>
-            </a:r>
-            <a:endParaRPr sz="1200">
+              <a:t>The outputs are just a vector the size of our vocab, and the number can be interpreted as the probability of that token being next</a:t>
+            </a:r>
+            <a:endParaRPr sz="3000">
               <a:solidFill>
-                <a:srgbClr val="999999"/>
-              </a:solidFill>
-            </a:endParaRPr>
-          </a:p>
-          <a:p>
-            <a:pPr indent="0" lvl="0" marL="0" rtl="0" algn="ctr">
-              <a:spcBef>
-                <a:spcPts val="0"/>
-              </a:spcBef>
-              <a:spcAft>
-                <a:spcPts val="0"/>
-              </a:spcAft>
-              <a:buNone/>
-            </a:pPr>
-            <a:r>
-              <a:rPr lang="en" sz="1200">
-                <a:solidFill>
-                  <a:srgbClr val="999999"/>
-                </a:solidFill>
-              </a:rPr>
-              <a:t>Mostly outside the scope of the class, but it’s really not </a:t>
-            </a:r>
-            <a:r>
-              <a:rPr i="1" lang="en" sz="1200">
-                <a:solidFill>
-                  <a:srgbClr val="999999"/>
-                </a:solidFill>
-              </a:rPr>
-              <a:t>that</a:t>
-            </a:r>
-            <a:r>
-              <a:rPr lang="en" sz="1200">
-                <a:solidFill>
-                  <a:srgbClr val="999999"/>
-                </a:solidFill>
-              </a:rPr>
-              <a:t> complicated.</a:t>
-            </a:r>
-            <a:endParaRPr sz="1200">
-              <a:solidFill>
-                <a:srgbClr val="999999"/>
+                <a:schemeClr val="dk1"/>
               </a:solidFill>
             </a:endParaRPr>
           </a:p>
@@ -8098,7 +8741,7 @@
   <p:cSld>
     <p:spTree>
       <p:nvGrpSpPr>
-        <p:cNvPr id="106" name="Shape 106"/>
+        <p:cNvPr id="180" name="Shape 180"/>
         <p:cNvGrpSpPr/>
         <p:nvPr/>
       </p:nvGrpSpPr>
@@ -8112,7 +8755,7 @@
       </p:grpSpPr>
       <p:sp>
         <p:nvSpPr>
-          <p:cNvPr id="107" name="Google Shape;107;g3bc426a098a_0_36"/>
+          <p:cNvPr id="181" name="Google Shape;181;g3bc426a098a_0_5"/>
           <p:cNvSpPr txBox="1"/>
           <p:nvPr>
             <p:ph type="title"/>
@@ -8143,16 +8786,44 @@
               <a:buNone/>
             </a:pPr>
             <a:r>
+              <a:rPr lang="en">
+                <a:solidFill>
+                  <a:srgbClr val="A31515"/>
+                </a:solidFill>
+              </a:rPr>
+              <a:t>Deep Learning:</a:t>
+            </a:r>
+            <a:r>
               <a:rPr lang="en"/>
-              <a:t>The Data Race</a:t>
-            </a:r>
-            <a:endParaRPr/>
+              <a:t> </a:t>
+            </a:r>
+            <a:r>
+              <a:rPr lang="en">
+                <a:solidFill>
+                  <a:srgbClr val="5AABBC"/>
+                </a:solidFill>
+                <a:latin typeface="Consolas"/>
+                <a:ea typeface="Consolas"/>
+                <a:cs typeface="Consolas"/>
+                <a:sym typeface="Consolas"/>
+              </a:rPr>
+              <a:t>Loss Functions</a:t>
+            </a:r>
+            <a:endParaRPr>
+              <a:solidFill>
+                <a:srgbClr val="5AABBC"/>
+              </a:solidFill>
+              <a:latin typeface="Consolas"/>
+              <a:ea typeface="Consolas"/>
+              <a:cs typeface="Consolas"/>
+              <a:sym typeface="Consolas"/>
+            </a:endParaRPr>
           </a:p>
         </p:txBody>
       </p:sp>
       <p:sp>
         <p:nvSpPr>
-          <p:cNvPr id="108" name="Google Shape;108;g3bc426a098a_0_36"/>
+          <p:cNvPr id="182" name="Google Shape;182;g3bc426a098a_0_5"/>
           <p:cNvSpPr txBox="1"/>
           <p:nvPr>
             <p:ph idx="1" type="body"/>
@@ -8161,7 +8832,7 @@
         <p:spPr>
           <a:xfrm>
             <a:off x="457200" y="1600200"/>
-            <a:ext cx="8229600" cy="4967700"/>
+            <a:ext cx="8229600" cy="1987800"/>
           </a:xfrm>
           <a:prstGeom prst="rect">
             <a:avLst/>
@@ -8183,9 +8854,188 @@
               <a:buNone/>
             </a:pPr>
             <a:r>
-              <a:t/>
+              <a:rPr lang="en"/>
+              <a:t>A </a:t>
+            </a:r>
+            <a:r>
+              <a:rPr b="1" lang="en">
+                <a:solidFill>
+                  <a:srgbClr val="5AABBC"/>
+                </a:solidFill>
+                <a:latin typeface="Consolas"/>
+                <a:ea typeface="Consolas"/>
+                <a:cs typeface="Consolas"/>
+                <a:sym typeface="Consolas"/>
+              </a:rPr>
+              <a:t>loss function</a:t>
+            </a:r>
+            <a:r>
+              <a:rPr lang="en"/>
+              <a:t> allows us to numerically measure </a:t>
+            </a:r>
+            <a:r>
+              <a:rPr b="1" lang="en">
+                <a:solidFill>
+                  <a:srgbClr val="DCB439"/>
+                </a:solidFill>
+              </a:rPr>
+              <a:t>how far off our model’s predicted values are from what we expected them to be</a:t>
+            </a:r>
+            <a:r>
+              <a:rPr lang="en"/>
+              <a:t>, or what we know the right answer is.</a:t>
             </a:r>
             <a:endParaRPr/>
+          </a:p>
+        </p:txBody>
+      </p:sp>
+      <p:pic>
+        <p:nvPicPr>
+          <p:cNvPr id="183" name="Google Shape;183;g3bc426a098a_0_5" title="Screenshot 2026-02-03 at 8.16.38 AM.png"/>
+          <p:cNvPicPr preferRelativeResize="0"/>
+          <p:nvPr/>
+        </p:nvPicPr>
+        <p:blipFill>
+          <a:blip r:embed="rId3">
+            <a:alphaModFix/>
+          </a:blip>
+          <a:stretch>
+            <a:fillRect/>
+          </a:stretch>
+        </p:blipFill>
+        <p:spPr>
+          <a:xfrm>
+            <a:off x="1743075" y="3588000"/>
+            <a:ext cx="5657850" cy="1790700"/>
+          </a:xfrm>
+          <a:prstGeom prst="rect">
+            <a:avLst/>
+          </a:prstGeom>
+          <a:noFill/>
+          <a:ln>
+            <a:noFill/>
+          </a:ln>
+        </p:spPr>
+      </p:pic>
+      <p:sp>
+        <p:nvSpPr>
+          <p:cNvPr id="184" name="Google Shape;184;g3bc426a098a_0_5"/>
+          <p:cNvSpPr txBox="1"/>
+          <p:nvPr/>
+        </p:nvSpPr>
+        <p:spPr>
+          <a:xfrm>
+            <a:off x="457200" y="5378700"/>
+            <a:ext cx="8229600" cy="928500"/>
+          </a:xfrm>
+          <a:prstGeom prst="rect">
+            <a:avLst/>
+          </a:prstGeom>
+          <a:noFill/>
+          <a:ln>
+            <a:noFill/>
+          </a:ln>
+        </p:spPr>
+        <p:txBody>
+          <a:bodyPr anchorCtr="0" anchor="t" bIns="96925" lIns="96925" spcFirstLastPara="1" rIns="96925" wrap="square" tIns="96925">
+            <a:noAutofit/>
+          </a:bodyPr>
+          <a:lstStyle/>
+          <a:p>
+            <a:pPr indent="0" lvl="0" marL="0" rtl="0" algn="ctr">
+              <a:spcBef>
+                <a:spcPts val="0"/>
+              </a:spcBef>
+              <a:spcAft>
+                <a:spcPts val="0"/>
+              </a:spcAft>
+              <a:buNone/>
+            </a:pPr>
+            <a:r>
+              <a:rPr b="1" lang="en" sz="1200">
+                <a:solidFill>
+                  <a:srgbClr val="002B5B"/>
+                </a:solidFill>
+              </a:rPr>
+              <a:t>Cross-Entropy</a:t>
+            </a:r>
+            <a:r>
+              <a:rPr b="1" lang="en" sz="1200">
+                <a:solidFill>
+                  <a:srgbClr val="002B5B"/>
+                </a:solidFill>
+              </a:rPr>
+              <a:t>: </a:t>
+            </a:r>
+            <a:r>
+              <a:rPr lang="en" sz="1200">
+                <a:solidFill>
+                  <a:srgbClr val="999999"/>
+                </a:solidFill>
+              </a:rPr>
+              <a:t>The loss function used to train LLMs is called “Cross-Entropy Loss” and it’s one of the most common loss functions. Heavily based on the principle of “entropy” as used in Information Theory, it’s a measure of how surprising our answer is relative to our ground-truth based on the entropy formula: -∑ p(x)log</a:t>
+            </a:r>
+            <a:r>
+              <a:rPr baseline="-25000" lang="en" sz="1200">
+                <a:solidFill>
+                  <a:srgbClr val="999999"/>
+                </a:solidFill>
+              </a:rPr>
+              <a:t>2</a:t>
+            </a:r>
+            <a:r>
+              <a:rPr lang="en" sz="1200">
+                <a:solidFill>
+                  <a:srgbClr val="999999"/>
+                </a:solidFill>
+              </a:rPr>
+              <a:t>p(x)</a:t>
+            </a:r>
+            <a:endParaRPr sz="1200">
+              <a:solidFill>
+                <a:srgbClr val="999999"/>
+              </a:solidFill>
+            </a:endParaRPr>
+          </a:p>
+          <a:p>
+            <a:pPr indent="0" lvl="0" marL="0" rtl="0" algn="ctr">
+              <a:spcBef>
+                <a:spcPts val="0"/>
+              </a:spcBef>
+              <a:spcAft>
+                <a:spcPts val="0"/>
+              </a:spcAft>
+              <a:buNone/>
+            </a:pPr>
+            <a:r>
+              <a:rPr lang="en" sz="1200">
+                <a:solidFill>
+                  <a:srgbClr val="999999"/>
+                </a:solidFill>
+              </a:rPr>
+              <a:t>Mostly outside the scope of the class, but it’s really not </a:t>
+            </a:r>
+            <a:r>
+              <a:rPr i="1" lang="en" sz="1200">
+                <a:solidFill>
+                  <a:srgbClr val="999999"/>
+                </a:solidFill>
+              </a:rPr>
+              <a:t>that</a:t>
+            </a:r>
+            <a:r>
+              <a:rPr lang="en" sz="1200">
+                <a:solidFill>
+                  <a:srgbClr val="999999"/>
+                </a:solidFill>
+              </a:rPr>
+              <a:t> complicated.</a:t>
+            </a:r>
+            <a:endParaRPr sz="1200">
+              <a:solidFill>
+                <a:srgbClr val="999999"/>
+              </a:solidFill>
+            </a:endParaRPr>
           </a:p>
         </p:txBody>
       </p:sp>
@@ -8202,7 +9052,7 @@
   <p:cSld>
     <p:spTree>
       <p:nvGrpSpPr>
-        <p:cNvPr id="112" name="Shape 112"/>
+        <p:cNvPr id="188" name="Shape 188"/>
         <p:cNvGrpSpPr/>
         <p:nvPr/>
       </p:nvGrpSpPr>
@@ -8216,7 +9066,7 @@
       </p:grpSpPr>
       <p:sp>
         <p:nvSpPr>
-          <p:cNvPr id="113" name="Google Shape;113;g3bc426a098a_0_15"/>
+          <p:cNvPr id="189" name="Google Shape;189;g3bca1707a95_0_266"/>
           <p:cNvSpPr txBox="1"/>
           <p:nvPr>
             <p:ph type="title"/>
@@ -8247,46 +9097,8 @@
               <a:buNone/>
             </a:pPr>
             <a:r>
-              <a:t/>
-            </a:r>
-            <a:endParaRPr/>
-          </a:p>
-        </p:txBody>
-      </p:sp>
-      <p:sp>
-        <p:nvSpPr>
-          <p:cNvPr id="114" name="Google Shape;114;g3bc426a098a_0_15"/>
-          <p:cNvSpPr txBox="1"/>
-          <p:nvPr>
-            <p:ph idx="1" type="body"/>
-          </p:nvPr>
-        </p:nvSpPr>
-        <p:spPr>
-          <a:xfrm>
-            <a:off x="457200" y="1600200"/>
-            <a:ext cx="8229600" cy="4967700"/>
-          </a:xfrm>
-          <a:prstGeom prst="rect">
-            <a:avLst/>
-          </a:prstGeom>
-        </p:spPr>
-        <p:txBody>
-          <a:bodyPr anchorCtr="0" anchor="t" bIns="91425" lIns="91425" spcFirstLastPara="1" rIns="91425" wrap="square" tIns="91425">
-            <a:noAutofit/>
-          </a:bodyPr>
-          <a:lstStyle/>
-          <a:p>
-            <a:pPr indent="0" lvl="0" marL="0" rtl="0" algn="l">
-              <a:spcBef>
-                <a:spcPts val="600"/>
-              </a:spcBef>
-              <a:spcAft>
-                <a:spcPts val="0"/>
-              </a:spcAft>
-              <a:buNone/>
-            </a:pPr>
-            <a:r>
-              <a:t/>
+              <a:rPr lang="en"/>
+              <a:t>Embedding Learning Visualization</a:t>
             </a:r>
             <a:endParaRPr/>
           </a:p>
@@ -8294,7 +9106,7 @@
       </p:sp>
       <p:pic>
         <p:nvPicPr>
-          <p:cNvPr id="115" name="Google Shape;115;g3bc426a098a_0_15"/>
+          <p:cNvPr id="190" name="Google Shape;190;g3bca1707a95_0_266"/>
           <p:cNvPicPr preferRelativeResize="0"/>
           <p:nvPr/>
         </p:nvPicPr>
@@ -8308,8 +9120,8 @@
         </p:blipFill>
         <p:spPr>
           <a:xfrm>
-            <a:off x="2200016" y="1662750"/>
-            <a:ext cx="4743976" cy="4842600"/>
+            <a:off x="2293797" y="1815225"/>
+            <a:ext cx="4556401" cy="4537650"/>
           </a:xfrm>
           <a:prstGeom prst="rect">
             <a:avLst/>
@@ -8333,7 +9145,7 @@
   <p:cSld>
     <p:spTree>
       <p:nvGrpSpPr>
-        <p:cNvPr id="119" name="Shape 119"/>
+        <p:cNvPr id="194" name="Shape 194"/>
         <p:cNvGrpSpPr/>
         <p:nvPr/>
       </p:nvGrpSpPr>
@@ -8347,7 +9159,7 @@
       </p:grpSpPr>
       <p:sp>
         <p:nvSpPr>
-          <p:cNvPr id="120" name="Google Shape;120;g3bc426a098a_0_26"/>
+          <p:cNvPr id="195" name="Google Shape;195;g3bca1707a95_0_161"/>
           <p:cNvSpPr txBox="1"/>
           <p:nvPr>
             <p:ph type="title"/>
@@ -8378,16 +9190,48 @@
               <a:buNone/>
             </a:pPr>
             <a:r>
+              <a:rPr lang="en">
+                <a:solidFill>
+                  <a:srgbClr val="5AABBC"/>
+                </a:solidFill>
+                <a:latin typeface="Consolas"/>
+                <a:ea typeface="Consolas"/>
+                <a:cs typeface="Consolas"/>
+                <a:sym typeface="Consolas"/>
+              </a:rPr>
+              <a:t>SLM</a:t>
+            </a:r>
+            <a:r>
               <a:rPr lang="en"/>
-              <a:t>LLM Jailbreaking</a:t>
-            </a:r>
-            <a:endParaRPr/>
+              <a:t> vs. </a:t>
+            </a:r>
+            <a:r>
+              <a:rPr lang="en">
+                <a:solidFill>
+                  <a:srgbClr val="5AABBC"/>
+                </a:solidFill>
+                <a:latin typeface="Consolas"/>
+                <a:ea typeface="Consolas"/>
+                <a:cs typeface="Consolas"/>
+                <a:sym typeface="Consolas"/>
+              </a:rPr>
+              <a:t>LLM</a:t>
+            </a:r>
+            <a:endParaRPr>
+              <a:solidFill>
+                <a:srgbClr val="5AABBC"/>
+              </a:solidFill>
+              <a:latin typeface="Consolas"/>
+              <a:ea typeface="Consolas"/>
+              <a:cs typeface="Consolas"/>
+              <a:sym typeface="Consolas"/>
+            </a:endParaRPr>
           </a:p>
         </p:txBody>
       </p:sp>
       <p:sp>
         <p:nvSpPr>
-          <p:cNvPr id="121" name="Google Shape;121;g3bc426a098a_0_26"/>
+          <p:cNvPr id="196" name="Google Shape;196;g3bca1707a95_0_161"/>
           <p:cNvSpPr txBox="1"/>
           <p:nvPr>
             <p:ph idx="1" type="body"/>
@@ -8418,7 +9262,52 @@
               <a:buNone/>
             </a:pPr>
             <a:r>
-              <a:t/>
+              <a:rPr lang="en"/>
+              <a:t>All we do to convert our </a:t>
+            </a:r>
+            <a:r>
+              <a:rPr b="1" lang="en">
+                <a:solidFill>
+                  <a:srgbClr val="5AABBC"/>
+                </a:solidFill>
+                <a:latin typeface="Consolas"/>
+                <a:ea typeface="Consolas"/>
+                <a:cs typeface="Consolas"/>
+                <a:sym typeface="Consolas"/>
+              </a:rPr>
+              <a:t>SLM</a:t>
+            </a:r>
+            <a:r>
+              <a:rPr lang="en"/>
+              <a:t> to an </a:t>
+            </a:r>
+            <a:r>
+              <a:rPr b="1" lang="en">
+                <a:solidFill>
+                  <a:srgbClr val="5AABBC"/>
+                </a:solidFill>
+                <a:latin typeface="Consolas"/>
+                <a:ea typeface="Consolas"/>
+                <a:cs typeface="Consolas"/>
+                <a:sym typeface="Consolas"/>
+              </a:rPr>
+              <a:t>LLM</a:t>
+            </a:r>
+            <a:r>
+              <a:rPr lang="en"/>
+              <a:t> is </a:t>
+            </a:r>
+            <a:r>
+              <a:rPr b="1" lang="en">
+                <a:solidFill>
+                  <a:srgbClr val="DCB439"/>
+                </a:solidFill>
+              </a:rPr>
+              <a:t>replace our Magic Box</a:t>
+            </a:r>
+            <a:r>
+              <a:rPr lang="en"/>
+              <a:t> with a fancier one, the overall process of training our model doesn’t change!</a:t>
             </a:r>
             <a:endParaRPr/>
           </a:p>
@@ -8437,7 +9326,7 @@
   <p:cSld>
     <p:spTree>
       <p:nvGrpSpPr>
-        <p:cNvPr id="125" name="Shape 125"/>
+        <p:cNvPr id="200" name="Shape 200"/>
         <p:cNvGrpSpPr/>
         <p:nvPr/>
       </p:nvGrpSpPr>
@@ -8451,7 +9340,7 @@
       </p:grpSpPr>
       <p:sp>
         <p:nvSpPr>
-          <p:cNvPr id="126" name="Google Shape;126;g3bc426a098a_0_21"/>
+          <p:cNvPr id="201" name="Google Shape;201;g3bca1707a95_0_166"/>
           <p:cNvSpPr txBox="1"/>
           <p:nvPr>
             <p:ph type="title"/>
@@ -8465,6 +9354,10 @@
           <a:prstGeom prst="rect">
             <a:avLst/>
           </a:prstGeom>
+          <a:noFill/>
+          <a:ln>
+            <a:noFill/>
+          </a:ln>
         </p:spPr>
         <p:txBody>
           <a:bodyPr anchorCtr="0" anchor="b" bIns="91425" lIns="91425" spcFirstLastPara="1" rIns="91425" wrap="square" tIns="91425">
@@ -8473,17 +9366,89 @@
           <a:lstStyle/>
           <a:p>
             <a:pPr indent="0" lvl="0" marL="0" rtl="0" algn="l">
-              <a:spcBef>
-                <a:spcPts val="0"/>
-              </a:spcBef>
-              <a:spcAft>
-                <a:spcPts val="0"/>
-              </a:spcAft>
+              <a:lnSpc>
+                <a:spcPct val="100000"/>
+              </a:lnSpc>
+              <a:spcBef>
+                <a:spcPts val="0"/>
+              </a:spcBef>
+              <a:spcAft>
+                <a:spcPts val="0"/>
+              </a:spcAft>
+              <a:buSzPts val="3600"/>
               <a:buNone/>
             </a:pPr>
             <a:r>
               <a:rPr lang="en"/>
-              <a:t>LLM Quirks</a:t>
+              <a:t>Predicting the Next Token: </a:t>
+            </a:r>
+            <a:r>
+              <a:rPr lang="en">
+                <a:solidFill>
+                  <a:srgbClr val="5AABBC"/>
+                </a:solidFill>
+                <a:latin typeface="Consolas"/>
+                <a:ea typeface="Consolas"/>
+                <a:cs typeface="Consolas"/>
+                <a:sym typeface="Consolas"/>
+              </a:rPr>
+              <a:t>LLM</a:t>
+            </a:r>
+            <a:endParaRPr>
+              <a:solidFill>
+                <a:srgbClr val="5AABBC"/>
+              </a:solidFill>
+              <a:latin typeface="Consolas"/>
+              <a:ea typeface="Consolas"/>
+              <a:cs typeface="Consolas"/>
+              <a:sym typeface="Consolas"/>
+            </a:endParaRPr>
+          </a:p>
+        </p:txBody>
+      </p:sp>
+      <p:sp>
+        <p:nvSpPr>
+          <p:cNvPr id="202" name="Google Shape;202;g3bca1707a95_0_166"/>
+          <p:cNvSpPr txBox="1"/>
+          <p:nvPr>
+            <p:ph idx="1" type="body"/>
+          </p:nvPr>
+        </p:nvSpPr>
+        <p:spPr>
+          <a:xfrm>
+            <a:off x="457200" y="1600200"/>
+            <a:ext cx="8229600" cy="662100"/>
+          </a:xfrm>
+          <a:prstGeom prst="rect">
+            <a:avLst/>
+          </a:prstGeom>
+          <a:noFill/>
+          <a:ln>
+            <a:noFill/>
+          </a:ln>
+        </p:spPr>
+        <p:txBody>
+          <a:bodyPr anchorCtr="0" anchor="t" bIns="91425" lIns="91425" spcFirstLastPara="1" rIns="91425" wrap="square" tIns="91425">
+            <a:noAutofit/>
+          </a:bodyPr>
+          <a:lstStyle/>
+          <a:p>
+            <a:pPr indent="0" lvl="0" marL="0" rtl="0" algn="ctr">
+              <a:lnSpc>
+                <a:spcPct val="100000"/>
+              </a:lnSpc>
+              <a:spcBef>
+                <a:spcPts val="600"/>
+              </a:spcBef>
+              <a:spcAft>
+                <a:spcPts val="0"/>
+              </a:spcAft>
+              <a:buSzPts val="3000"/>
+              <a:buNone/>
+            </a:pPr>
+            <a:r>
+              <a:rPr lang="en"/>
+              <a:t>Prompt: “The river has a nice bank and”</a:t>
             </a:r>
             <a:endParaRPr/>
           </a:p>
@@ -8491,30 +9456,40 @@
       </p:sp>
       <p:sp>
         <p:nvSpPr>
-          <p:cNvPr id="127" name="Google Shape;127;g3bc426a098a_0_21"/>
-          <p:cNvSpPr txBox="1"/>
-          <p:nvPr>
-            <p:ph idx="1" type="body"/>
-          </p:nvPr>
+          <p:cNvPr id="203" name="Google Shape;203;g3bca1707a95_0_166"/>
+          <p:cNvSpPr/>
+          <p:nvPr/>
         </p:nvSpPr>
         <p:spPr>
           <a:xfrm>
-            <a:off x="457200" y="1600200"/>
-            <a:ext cx="8229600" cy="4967700"/>
-          </a:xfrm>
-          <a:prstGeom prst="rect">
-            <a:avLst/>
-          </a:prstGeom>
+            <a:off x="1217675" y="2402650"/>
+            <a:ext cx="970500" cy="541200"/>
+          </a:xfrm>
+          <a:prstGeom prst="roundRect">
+            <a:avLst>
+              <a:gd fmla="val 16667" name="adj"/>
+            </a:avLst>
+          </a:prstGeom>
+          <a:noFill/>
+          <a:ln cap="flat" cmpd="sng" w="38100">
+            <a:solidFill>
+              <a:srgbClr val="002B5B"/>
+            </a:solidFill>
+            <a:prstDash val="solid"/>
+            <a:round/>
+            <a:headEnd len="sm" w="sm" type="none"/>
+            <a:tailEnd len="sm" w="sm" type="none"/>
+          </a:ln>
         </p:spPr>
         <p:txBody>
-          <a:bodyPr anchorCtr="0" anchor="t" bIns="91425" lIns="91425" spcFirstLastPara="1" rIns="91425" wrap="square" tIns="91425">
+          <a:bodyPr anchorCtr="0" anchor="ctr" bIns="91425" lIns="91425" spcFirstLastPara="1" rIns="91425" wrap="square" tIns="91425">
             <a:noAutofit/>
           </a:bodyPr>
           <a:lstStyle/>
           <a:p>
-            <a:pPr indent="0" lvl="0" marL="0" rtl="0" algn="l">
-              <a:spcBef>
-                <a:spcPts val="600"/>
+            <a:pPr indent="0" lvl="0" marL="0" rtl="0" algn="ctr">
+              <a:spcBef>
+                <a:spcPts val="0"/>
               </a:spcBef>
               <a:spcAft>
                 <a:spcPts val="0"/>
@@ -8522,12 +9497,495 @@
               <a:buNone/>
             </a:pPr>
             <a:r>
-              <a:t/>
-            </a:r>
-            <a:endParaRPr/>
+              <a:rPr b="1" lang="en">
+                <a:solidFill>
+                  <a:srgbClr val="A31415"/>
+                </a:solidFill>
+                <a:latin typeface="Consolas"/>
+                <a:ea typeface="Consolas"/>
+                <a:cs typeface="Consolas"/>
+                <a:sym typeface="Consolas"/>
+              </a:rPr>
+              <a:t>The</a:t>
+            </a:r>
+            <a:endParaRPr b="1">
+              <a:solidFill>
+                <a:srgbClr val="A31415"/>
+              </a:solidFill>
+              <a:latin typeface="Consolas"/>
+              <a:ea typeface="Consolas"/>
+              <a:cs typeface="Consolas"/>
+              <a:sym typeface="Consolas"/>
+            </a:endParaRPr>
           </a:p>
         </p:txBody>
       </p:sp>
+      <p:sp>
+        <p:nvSpPr>
+          <p:cNvPr id="204" name="Google Shape;204;g3bca1707a95_0_166"/>
+          <p:cNvSpPr/>
+          <p:nvPr/>
+        </p:nvSpPr>
+        <p:spPr>
+          <a:xfrm>
+            <a:off x="2374363" y="2402550"/>
+            <a:ext cx="970500" cy="541200"/>
+          </a:xfrm>
+          <a:prstGeom prst="roundRect">
+            <a:avLst>
+              <a:gd fmla="val 16667" name="adj"/>
+            </a:avLst>
+          </a:prstGeom>
+          <a:noFill/>
+          <a:ln cap="flat" cmpd="sng" w="38100">
+            <a:solidFill>
+              <a:srgbClr val="002B5B"/>
+            </a:solidFill>
+            <a:prstDash val="solid"/>
+            <a:round/>
+            <a:headEnd len="sm" w="sm" type="none"/>
+            <a:tailEnd len="sm" w="sm" type="none"/>
+          </a:ln>
+        </p:spPr>
+        <p:txBody>
+          <a:bodyPr anchorCtr="0" anchor="ctr" bIns="91425" lIns="91425" spcFirstLastPara="1" rIns="91425" wrap="square" tIns="91425">
+            <a:noAutofit/>
+          </a:bodyPr>
+          <a:lstStyle/>
+          <a:p>
+            <a:pPr indent="0" lvl="0" marL="0" rtl="0" algn="ctr">
+              <a:spcBef>
+                <a:spcPts val="0"/>
+              </a:spcBef>
+              <a:spcAft>
+                <a:spcPts val="0"/>
+              </a:spcAft>
+              <a:buNone/>
+            </a:pPr>
+            <a:r>
+              <a:rPr b="1" lang="en">
+                <a:solidFill>
+                  <a:srgbClr val="A31415"/>
+                </a:solidFill>
+                <a:latin typeface="Consolas"/>
+                <a:ea typeface="Consolas"/>
+                <a:cs typeface="Consolas"/>
+                <a:sym typeface="Consolas"/>
+              </a:rPr>
+              <a:t>river</a:t>
+            </a:r>
+            <a:endParaRPr b="1">
+              <a:solidFill>
+                <a:srgbClr val="A31415"/>
+              </a:solidFill>
+              <a:latin typeface="Consolas"/>
+              <a:ea typeface="Consolas"/>
+              <a:cs typeface="Consolas"/>
+              <a:sym typeface="Consolas"/>
+            </a:endParaRPr>
+          </a:p>
+        </p:txBody>
+      </p:sp>
+      <p:sp>
+        <p:nvSpPr>
+          <p:cNvPr id="205" name="Google Shape;205;g3bca1707a95_0_166"/>
+          <p:cNvSpPr/>
+          <p:nvPr/>
+        </p:nvSpPr>
+        <p:spPr>
+          <a:xfrm>
+            <a:off x="3531075" y="2402650"/>
+            <a:ext cx="970500" cy="541200"/>
+          </a:xfrm>
+          <a:prstGeom prst="roundRect">
+            <a:avLst>
+              <a:gd fmla="val 16667" name="adj"/>
+            </a:avLst>
+          </a:prstGeom>
+          <a:noFill/>
+          <a:ln cap="flat" cmpd="sng" w="38100">
+            <a:solidFill>
+              <a:srgbClr val="002B5B"/>
+            </a:solidFill>
+            <a:prstDash val="solid"/>
+            <a:round/>
+            <a:headEnd len="sm" w="sm" type="none"/>
+            <a:tailEnd len="sm" w="sm" type="none"/>
+          </a:ln>
+        </p:spPr>
+        <p:txBody>
+          <a:bodyPr anchorCtr="0" anchor="ctr" bIns="91425" lIns="91425" spcFirstLastPara="1" rIns="91425" wrap="square" tIns="91425">
+            <a:noAutofit/>
+          </a:bodyPr>
+          <a:lstStyle/>
+          <a:p>
+            <a:pPr indent="0" lvl="0" marL="0" rtl="0" algn="ctr">
+              <a:spcBef>
+                <a:spcPts val="0"/>
+              </a:spcBef>
+              <a:spcAft>
+                <a:spcPts val="0"/>
+              </a:spcAft>
+              <a:buNone/>
+            </a:pPr>
+            <a:r>
+              <a:rPr b="1" lang="en">
+                <a:solidFill>
+                  <a:srgbClr val="A31415"/>
+                </a:solidFill>
+                <a:latin typeface="Consolas"/>
+                <a:ea typeface="Consolas"/>
+                <a:cs typeface="Consolas"/>
+                <a:sym typeface="Consolas"/>
+              </a:rPr>
+              <a:t>has</a:t>
+            </a:r>
+            <a:endParaRPr b="1">
+              <a:solidFill>
+                <a:srgbClr val="A31415"/>
+              </a:solidFill>
+              <a:latin typeface="Consolas"/>
+              <a:ea typeface="Consolas"/>
+              <a:cs typeface="Consolas"/>
+              <a:sym typeface="Consolas"/>
+            </a:endParaRPr>
+          </a:p>
+        </p:txBody>
+      </p:sp>
+      <p:sp>
+        <p:nvSpPr>
+          <p:cNvPr id="206" name="Google Shape;206;g3bca1707a95_0_166"/>
+          <p:cNvSpPr/>
+          <p:nvPr/>
+        </p:nvSpPr>
+        <p:spPr>
+          <a:xfrm>
+            <a:off x="4687763" y="2402538"/>
+            <a:ext cx="970500" cy="541200"/>
+          </a:xfrm>
+          <a:prstGeom prst="roundRect">
+            <a:avLst>
+              <a:gd fmla="val 16667" name="adj"/>
+            </a:avLst>
+          </a:prstGeom>
+          <a:noFill/>
+          <a:ln cap="flat" cmpd="sng" w="38100">
+            <a:solidFill>
+              <a:srgbClr val="002B5B"/>
+            </a:solidFill>
+            <a:prstDash val="solid"/>
+            <a:round/>
+            <a:headEnd len="sm" w="sm" type="none"/>
+            <a:tailEnd len="sm" w="sm" type="none"/>
+          </a:ln>
+        </p:spPr>
+        <p:txBody>
+          <a:bodyPr anchorCtr="0" anchor="ctr" bIns="91425" lIns="91425" spcFirstLastPara="1" rIns="91425" wrap="square" tIns="91425">
+            <a:noAutofit/>
+          </a:bodyPr>
+          <a:lstStyle/>
+          <a:p>
+            <a:pPr indent="0" lvl="0" marL="0" rtl="0" algn="ctr">
+              <a:spcBef>
+                <a:spcPts val="0"/>
+              </a:spcBef>
+              <a:spcAft>
+                <a:spcPts val="0"/>
+              </a:spcAft>
+              <a:buNone/>
+            </a:pPr>
+            <a:r>
+              <a:rPr b="1" lang="en">
+                <a:solidFill>
+                  <a:srgbClr val="A31415"/>
+                </a:solidFill>
+                <a:latin typeface="Consolas"/>
+                <a:ea typeface="Consolas"/>
+                <a:cs typeface="Consolas"/>
+                <a:sym typeface="Consolas"/>
+              </a:rPr>
+              <a:t>a</a:t>
+            </a:r>
+            <a:endParaRPr b="1">
+              <a:solidFill>
+                <a:srgbClr val="A31415"/>
+              </a:solidFill>
+              <a:latin typeface="Consolas"/>
+              <a:ea typeface="Consolas"/>
+              <a:cs typeface="Consolas"/>
+              <a:sym typeface="Consolas"/>
+            </a:endParaRPr>
+          </a:p>
+        </p:txBody>
+      </p:sp>
+      <p:sp>
+        <p:nvSpPr>
+          <p:cNvPr id="207" name="Google Shape;207;g3bca1707a95_0_166"/>
+          <p:cNvSpPr/>
+          <p:nvPr/>
+        </p:nvSpPr>
+        <p:spPr>
+          <a:xfrm>
+            <a:off x="5821788" y="2402600"/>
+            <a:ext cx="970500" cy="541200"/>
+          </a:xfrm>
+          <a:prstGeom prst="roundRect">
+            <a:avLst>
+              <a:gd fmla="val 16667" name="adj"/>
+            </a:avLst>
+          </a:prstGeom>
+          <a:noFill/>
+          <a:ln cap="flat" cmpd="sng" w="38100">
+            <a:solidFill>
+              <a:srgbClr val="002B5B"/>
+            </a:solidFill>
+            <a:prstDash val="solid"/>
+            <a:round/>
+            <a:headEnd len="sm" w="sm" type="none"/>
+            <a:tailEnd len="sm" w="sm" type="none"/>
+          </a:ln>
+        </p:spPr>
+        <p:txBody>
+          <a:bodyPr anchorCtr="0" anchor="ctr" bIns="91425" lIns="91425" spcFirstLastPara="1" rIns="91425" wrap="square" tIns="91425">
+            <a:noAutofit/>
+          </a:bodyPr>
+          <a:lstStyle/>
+          <a:p>
+            <a:pPr indent="0" lvl="0" marL="0" rtl="0" algn="ctr">
+              <a:spcBef>
+                <a:spcPts val="0"/>
+              </a:spcBef>
+              <a:spcAft>
+                <a:spcPts val="0"/>
+              </a:spcAft>
+              <a:buNone/>
+            </a:pPr>
+            <a:r>
+              <a:rPr b="1" lang="en">
+                <a:solidFill>
+                  <a:srgbClr val="A31415"/>
+                </a:solidFill>
+                <a:latin typeface="Consolas"/>
+                <a:ea typeface="Consolas"/>
+                <a:cs typeface="Consolas"/>
+                <a:sym typeface="Consolas"/>
+              </a:rPr>
+              <a:t>nice</a:t>
+            </a:r>
+            <a:endParaRPr b="1">
+              <a:solidFill>
+                <a:srgbClr val="A31415"/>
+              </a:solidFill>
+              <a:latin typeface="Consolas"/>
+              <a:ea typeface="Consolas"/>
+              <a:cs typeface="Consolas"/>
+              <a:sym typeface="Consolas"/>
+            </a:endParaRPr>
+          </a:p>
+        </p:txBody>
+      </p:sp>
+      <p:cxnSp>
+        <p:nvCxnSpPr>
+          <p:cNvPr id="208" name="Google Shape;208;g3bca1707a95_0_166"/>
+          <p:cNvCxnSpPr>
+            <a:stCxn id="203" idx="3"/>
+            <a:endCxn id="204" idx="1"/>
+          </p:cNvCxnSpPr>
+          <p:nvPr/>
+        </p:nvCxnSpPr>
+        <p:spPr>
+          <a:xfrm>
+            <a:off x="2188175" y="2673250"/>
+            <a:ext cx="186300" cy="0"/>
+          </a:xfrm>
+          <a:prstGeom prst="straightConnector1">
+            <a:avLst/>
+          </a:prstGeom>
+          <a:noFill/>
+          <a:ln cap="flat" cmpd="sng" w="19050">
+            <a:solidFill>
+              <a:srgbClr val="002B5B"/>
+            </a:solidFill>
+            <a:prstDash val="solid"/>
+            <a:round/>
+            <a:headEnd len="med" w="med" type="none"/>
+            <a:tailEnd len="med" w="med" type="triangle"/>
+          </a:ln>
+        </p:spPr>
+      </p:cxnSp>
+      <p:cxnSp>
+        <p:nvCxnSpPr>
+          <p:cNvPr id="209" name="Google Shape;209;g3bca1707a95_0_166"/>
+          <p:cNvCxnSpPr>
+            <a:stCxn id="204" idx="3"/>
+            <a:endCxn id="205" idx="1"/>
+          </p:cNvCxnSpPr>
+          <p:nvPr/>
+        </p:nvCxnSpPr>
+        <p:spPr>
+          <a:xfrm>
+            <a:off x="3344863" y="2673150"/>
+            <a:ext cx="186300" cy="0"/>
+          </a:xfrm>
+          <a:prstGeom prst="straightConnector1">
+            <a:avLst/>
+          </a:prstGeom>
+          <a:noFill/>
+          <a:ln cap="flat" cmpd="sng" w="19050">
+            <a:solidFill>
+              <a:srgbClr val="002B5B"/>
+            </a:solidFill>
+            <a:prstDash val="solid"/>
+            <a:round/>
+            <a:headEnd len="med" w="med" type="none"/>
+            <a:tailEnd len="med" w="med" type="triangle"/>
+          </a:ln>
+        </p:spPr>
+      </p:cxnSp>
+      <p:cxnSp>
+        <p:nvCxnSpPr>
+          <p:cNvPr id="210" name="Google Shape;210;g3bca1707a95_0_166"/>
+          <p:cNvCxnSpPr/>
+          <p:nvPr/>
+        </p:nvCxnSpPr>
+        <p:spPr>
+          <a:xfrm>
+            <a:off x="4490175" y="2673250"/>
+            <a:ext cx="186300" cy="0"/>
+          </a:xfrm>
+          <a:prstGeom prst="straightConnector1">
+            <a:avLst/>
+          </a:prstGeom>
+          <a:noFill/>
+          <a:ln cap="flat" cmpd="sng" w="19050">
+            <a:solidFill>
+              <a:srgbClr val="002B5B"/>
+            </a:solidFill>
+            <a:prstDash val="solid"/>
+            <a:round/>
+            <a:headEnd len="med" w="med" type="none"/>
+            <a:tailEnd len="med" w="med" type="triangle"/>
+          </a:ln>
+        </p:spPr>
+      </p:cxnSp>
+      <p:cxnSp>
+        <p:nvCxnSpPr>
+          <p:cNvPr id="211" name="Google Shape;211;g3bca1707a95_0_166"/>
+          <p:cNvCxnSpPr/>
+          <p:nvPr/>
+        </p:nvCxnSpPr>
+        <p:spPr>
+          <a:xfrm>
+            <a:off x="5658275" y="2673250"/>
+            <a:ext cx="186300" cy="0"/>
+          </a:xfrm>
+          <a:prstGeom prst="straightConnector1">
+            <a:avLst/>
+          </a:prstGeom>
+          <a:noFill/>
+          <a:ln cap="flat" cmpd="sng" w="19050">
+            <a:solidFill>
+              <a:srgbClr val="002B5B"/>
+            </a:solidFill>
+            <a:prstDash val="solid"/>
+            <a:round/>
+            <a:headEnd len="med" w="med" type="none"/>
+            <a:tailEnd len="med" w="med" type="triangle"/>
+          </a:ln>
+        </p:spPr>
+      </p:cxnSp>
+      <p:sp>
+        <p:nvSpPr>
+          <p:cNvPr id="212" name="Google Shape;212;g3bca1707a95_0_166"/>
+          <p:cNvSpPr/>
+          <p:nvPr/>
+        </p:nvSpPr>
+        <p:spPr>
+          <a:xfrm>
+            <a:off x="6955813" y="2402650"/>
+            <a:ext cx="970500" cy="541200"/>
+          </a:xfrm>
+          <a:prstGeom prst="roundRect">
+            <a:avLst>
+              <a:gd fmla="val 16667" name="adj"/>
+            </a:avLst>
+          </a:prstGeom>
+          <a:noFill/>
+          <a:ln cap="flat" cmpd="sng" w="38100">
+            <a:solidFill>
+              <a:srgbClr val="002B5B"/>
+            </a:solidFill>
+            <a:prstDash val="solid"/>
+            <a:round/>
+            <a:headEnd len="sm" w="sm" type="none"/>
+            <a:tailEnd len="sm" w="sm" type="none"/>
+          </a:ln>
+        </p:spPr>
+        <p:txBody>
+          <a:bodyPr anchorCtr="0" anchor="ctr" bIns="91425" lIns="91425" spcFirstLastPara="1" rIns="91425" wrap="square" tIns="91425">
+            <a:noAutofit/>
+          </a:bodyPr>
+          <a:lstStyle/>
+          <a:p>
+            <a:pPr indent="0" lvl="0" marL="0" rtl="0" algn="ctr">
+              <a:spcBef>
+                <a:spcPts val="0"/>
+              </a:spcBef>
+              <a:spcAft>
+                <a:spcPts val="0"/>
+              </a:spcAft>
+              <a:buNone/>
+            </a:pPr>
+            <a:r>
+              <a:rPr b="1" lang="en">
+                <a:solidFill>
+                  <a:srgbClr val="A31415"/>
+                </a:solidFill>
+                <a:latin typeface="Consolas"/>
+                <a:ea typeface="Consolas"/>
+                <a:cs typeface="Consolas"/>
+                <a:sym typeface="Consolas"/>
+              </a:rPr>
+              <a:t>bank</a:t>
+            </a:r>
+            <a:endParaRPr b="1">
+              <a:solidFill>
+                <a:srgbClr val="A31415"/>
+              </a:solidFill>
+              <a:latin typeface="Consolas"/>
+              <a:ea typeface="Consolas"/>
+              <a:cs typeface="Consolas"/>
+              <a:sym typeface="Consolas"/>
+            </a:endParaRPr>
+          </a:p>
+        </p:txBody>
+      </p:sp>
+      <p:cxnSp>
+        <p:nvCxnSpPr>
+          <p:cNvPr id="213" name="Google Shape;213;g3bca1707a95_0_166"/>
+          <p:cNvCxnSpPr/>
+          <p:nvPr/>
+        </p:nvCxnSpPr>
+        <p:spPr>
+          <a:xfrm>
+            <a:off x="6792300" y="2673250"/>
+            <a:ext cx="186300" cy="0"/>
+          </a:xfrm>
+          <a:prstGeom prst="straightConnector1">
+            <a:avLst/>
+          </a:prstGeom>
+          <a:noFill/>
+          <a:ln cap="flat" cmpd="sng" w="19050">
+            <a:solidFill>
+              <a:srgbClr val="002B5B"/>
+            </a:solidFill>
+            <a:prstDash val="solid"/>
+            <a:round/>
+            <a:headEnd len="med" w="med" type="none"/>
+            <a:tailEnd len="med" w="med" type="triangle"/>
+          </a:ln>
+        </p:spPr>
+      </p:cxnSp>
     </p:spTree>
   </p:cSld>
   <p:clrMapOvr>
@@ -8541,7 +9999,7 @@
   <p:cSld>
     <p:spTree>
       <p:nvGrpSpPr>
-        <p:cNvPr id="41" name="Shape 41"/>
+        <p:cNvPr id="38" name="Shape 38"/>
         <p:cNvGrpSpPr/>
         <p:nvPr/>
       </p:nvGrpSpPr>
@@ -8555,7 +10013,7 @@
       </p:grpSpPr>
       <p:sp>
         <p:nvSpPr>
-          <p:cNvPr id="42" name="Google Shape;42;g3b8409de4d6_0_60"/>
+          <p:cNvPr id="39" name="Google Shape;39;g3bca1707a95_0_7"/>
           <p:cNvSpPr txBox="1"/>
           <p:nvPr>
             <p:ph type="title"/>
@@ -8569,10 +10027,6 @@
           <a:prstGeom prst="rect">
             <a:avLst/>
           </a:prstGeom>
-          <a:noFill/>
-          <a:ln>
-            <a:noFill/>
-          </a:ln>
         </p:spPr>
         <p:txBody>
           <a:bodyPr anchorCtr="0" anchor="b" bIns="91425" lIns="91425" spcFirstLastPara="1" rIns="91425" wrap="square" tIns="91425">
@@ -8581,100 +10035,73 @@
           <a:lstStyle/>
           <a:p>
             <a:pPr indent="0" lvl="0" marL="0" rtl="0" algn="l">
-              <a:lnSpc>
-                <a:spcPct val="100000"/>
-              </a:lnSpc>
-              <a:spcBef>
-                <a:spcPts val="0"/>
-              </a:spcBef>
-              <a:spcAft>
-                <a:spcPts val="0"/>
-              </a:spcAft>
-              <a:buSzPts val="3600"/>
+              <a:spcBef>
+                <a:spcPts val="0"/>
+              </a:spcBef>
+              <a:spcAft>
+                <a:spcPts val="0"/>
+              </a:spcAft>
               <a:buNone/>
             </a:pPr>
             <a:r>
+              <a:rPr lang="en"/>
+              <a:t>Logistics: </a:t>
+            </a:r>
+            <a:r>
               <a:rPr lang="en">
                 <a:solidFill>
-                  <a:srgbClr val="465510"/>
+                  <a:srgbClr val="A31415"/>
                 </a:solidFill>
               </a:rPr>
-              <a:t>Programming Practice 01 Solution</a:t>
+              <a:t>Exam 01</a:t>
             </a:r>
             <a:endParaRPr>
               <a:solidFill>
-                <a:srgbClr val="465510"/>
+                <a:srgbClr val="A31415"/>
               </a:solidFill>
             </a:endParaRPr>
           </a:p>
         </p:txBody>
       </p:sp>
-      <p:pic>
-        <p:nvPicPr>
-          <p:cNvPr id="43" name="Google Shape;43;g3b8409de4d6_0_60" title="Screenshot 2026-01-29 at 11.40.18 AM.png"/>
-          <p:cNvPicPr preferRelativeResize="0"/>
-          <p:nvPr/>
-        </p:nvPicPr>
-        <p:blipFill rotWithShape="1">
-          <a:blip r:embed="rId3">
-            <a:alphaModFix/>
-          </a:blip>
-          <a:srcRect b="0" l="0" r="0" t="0"/>
-          <a:stretch/>
-        </p:blipFill>
-        <p:spPr>
-          <a:xfrm>
-            <a:off x="152400" y="3875513"/>
-            <a:ext cx="8839200" cy="2517219"/>
+      <p:sp>
+        <p:nvSpPr>
+          <p:cNvPr id="40" name="Google Shape;40;g3bca1707a95_0_7"/>
+          <p:cNvSpPr txBox="1"/>
+          <p:nvPr>
+            <p:ph idx="1" type="body"/>
+          </p:nvPr>
+        </p:nvSpPr>
+        <p:spPr>
+          <a:xfrm>
+            <a:off x="457200" y="1600200"/>
+            <a:ext cx="8229600" cy="4967700"/>
           </a:xfrm>
           <a:prstGeom prst="rect">
             <a:avLst/>
           </a:prstGeom>
-          <a:noFill/>
-          <a:ln cap="flat" cmpd="sng" w="38100">
-            <a:solidFill>
-              <a:srgbClr val="465510"/>
-            </a:solidFill>
-            <a:prstDash val="solid"/>
-            <a:round/>
-            <a:headEnd len="sm" w="sm" type="none"/>
-            <a:tailEnd len="sm" w="sm" type="none"/>
-          </a:ln>
-        </p:spPr>
-      </p:pic>
-      <p:pic>
-        <p:nvPicPr>
-          <p:cNvPr id="44" name="Google Shape;44;g3b8409de4d6_0_60" title="Screenshot 2026-01-29 at 11.42.21 AM.png"/>
-          <p:cNvPicPr preferRelativeResize="0"/>
-          <p:nvPr/>
-        </p:nvPicPr>
-        <p:blipFill rotWithShape="1">
-          <a:blip r:embed="rId4">
-            <a:alphaModFix/>
-          </a:blip>
-          <a:srcRect b="0" l="0" r="0" t="0"/>
-          <a:stretch/>
-        </p:blipFill>
-        <p:spPr>
-          <a:xfrm>
-            <a:off x="152400" y="1570038"/>
-            <a:ext cx="8839200" cy="2002631"/>
-          </a:xfrm>
-          <a:prstGeom prst="rect">
-            <a:avLst/>
-          </a:prstGeom>
-          <a:noFill/>
-          <a:ln cap="flat" cmpd="sng" w="38100">
-            <a:solidFill>
-              <a:srgbClr val="465510"/>
-            </a:solidFill>
-            <a:prstDash val="solid"/>
-            <a:round/>
-            <a:headEnd len="sm" w="sm" type="none"/>
-            <a:tailEnd len="sm" w="sm" type="none"/>
-          </a:ln>
-        </p:spPr>
-      </p:pic>
+        </p:spPr>
+        <p:txBody>
+          <a:bodyPr anchorCtr="0" anchor="t" bIns="91425" lIns="91425" spcFirstLastPara="1" rIns="91425" wrap="square" tIns="91425">
+            <a:noAutofit/>
+          </a:bodyPr>
+          <a:lstStyle/>
+          <a:p>
+            <a:pPr indent="0" lvl="0" marL="0" rtl="0" algn="l">
+              <a:spcBef>
+                <a:spcPts val="600"/>
+              </a:spcBef>
+              <a:spcAft>
+                <a:spcPts val="0"/>
+              </a:spcAft>
+              <a:buNone/>
+            </a:pPr>
+            <a:r>
+              <a:t/>
+            </a:r>
+            <a:endParaRPr/>
+          </a:p>
+        </p:txBody>
+      </p:sp>
     </p:spTree>
   </p:cSld>
   <p:clrMapOvr>
@@ -8688,7 +10115,7 @@
   <p:cSld>
     <p:spTree>
       <p:nvGrpSpPr>
-        <p:cNvPr id="48" name="Shape 48"/>
+        <p:cNvPr id="44" name="Shape 44"/>
         <p:cNvGrpSpPr/>
         <p:nvPr/>
       </p:nvGrpSpPr>
@@ -8702,16 +10129,16 @@
       </p:grpSpPr>
       <p:sp>
         <p:nvSpPr>
-          <p:cNvPr id="49" name="Google Shape;49;g3bbeee67e43_0_26"/>
+          <p:cNvPr id="45" name="Google Shape;45;g3bca1707a95_0_222"/>
           <p:cNvSpPr txBox="1"/>
           <p:nvPr>
-            <p:ph type="ctrTitle"/>
+            <p:ph type="title"/>
           </p:nvPr>
         </p:nvSpPr>
         <p:spPr>
           <a:xfrm>
-            <a:off x="685800" y="2655750"/>
-            <a:ext cx="7772400" cy="1546500"/>
+            <a:off x="457200" y="274638"/>
+            <a:ext cx="8229600" cy="1143000"/>
           </a:xfrm>
           <a:prstGeom prst="rect">
             <a:avLst/>
@@ -8719,6 +10146,108 @@
           <a:noFill/>
           <a:ln>
             <a:noFill/>
+          </a:ln>
+        </p:spPr>
+        <p:txBody>
+          <a:bodyPr anchorCtr="0" anchor="b" bIns="91425" lIns="91425" spcFirstLastPara="1" rIns="91425" wrap="square" tIns="91425">
+            <a:noAutofit/>
+          </a:bodyPr>
+          <a:lstStyle/>
+          <a:p>
+            <a:pPr indent="0" lvl="0" marL="0" rtl="0" algn="l">
+              <a:lnSpc>
+                <a:spcPct val="100000"/>
+              </a:lnSpc>
+              <a:spcBef>
+                <a:spcPts val="0"/>
+              </a:spcBef>
+              <a:spcAft>
+                <a:spcPts val="0"/>
+              </a:spcAft>
+              <a:buSzPts val="3600"/>
+              <a:buNone/>
+            </a:pPr>
+            <a:r>
+              <a:rPr lang="en"/>
+              <a:t>Predicting the Next Token: Markov</a:t>
+            </a:r>
+            <a:endParaRPr/>
+          </a:p>
+        </p:txBody>
+      </p:sp>
+      <p:sp>
+        <p:nvSpPr>
+          <p:cNvPr id="46" name="Google Shape;46;g3bca1707a95_0_222"/>
+          <p:cNvSpPr txBox="1"/>
+          <p:nvPr>
+            <p:ph idx="1" type="body"/>
+          </p:nvPr>
+        </p:nvSpPr>
+        <p:spPr>
+          <a:xfrm>
+            <a:off x="457200" y="1600200"/>
+            <a:ext cx="8229600" cy="662100"/>
+          </a:xfrm>
+          <a:prstGeom prst="rect">
+            <a:avLst/>
+          </a:prstGeom>
+          <a:noFill/>
+          <a:ln>
+            <a:noFill/>
+          </a:ln>
+        </p:spPr>
+        <p:txBody>
+          <a:bodyPr anchorCtr="0" anchor="t" bIns="91425" lIns="91425" spcFirstLastPara="1" rIns="91425" wrap="square" tIns="91425">
+            <a:noAutofit/>
+          </a:bodyPr>
+          <a:lstStyle/>
+          <a:p>
+            <a:pPr indent="0" lvl="0" marL="0" rtl="0" algn="ctr">
+              <a:lnSpc>
+                <a:spcPct val="100000"/>
+              </a:lnSpc>
+              <a:spcBef>
+                <a:spcPts val="600"/>
+              </a:spcBef>
+              <a:spcAft>
+                <a:spcPts val="0"/>
+              </a:spcAft>
+              <a:buSzPts val="3000"/>
+              <a:buNone/>
+            </a:pPr>
+            <a:r>
+              <a:rPr lang="en"/>
+              <a:t>Prompt: “I like cute and fuzzy”</a:t>
+            </a:r>
+            <a:endParaRPr/>
+          </a:p>
+        </p:txBody>
+      </p:sp>
+      <p:sp>
+        <p:nvSpPr>
+          <p:cNvPr id="47" name="Google Shape;47;g3bca1707a95_0_222"/>
+          <p:cNvSpPr/>
+          <p:nvPr/>
+        </p:nvSpPr>
+        <p:spPr>
+          <a:xfrm>
+            <a:off x="1443825" y="2799525"/>
+            <a:ext cx="970500" cy="541200"/>
+          </a:xfrm>
+          <a:prstGeom prst="roundRect">
+            <a:avLst>
+              <a:gd fmla="val 16667" name="adj"/>
+            </a:avLst>
+          </a:prstGeom>
+          <a:noFill/>
+          <a:ln cap="flat" cmpd="sng" w="38100">
+            <a:solidFill>
+              <a:srgbClr val="002B5B"/>
+            </a:solidFill>
+            <a:prstDash val="solid"/>
+            <a:round/>
+            <a:headEnd len="sm" w="sm" type="none"/>
+            <a:tailEnd len="sm" w="sm" type="none"/>
           </a:ln>
         </p:spPr>
         <p:txBody>
@@ -8728,61 +10257,801 @@
           <a:lstStyle/>
           <a:p>
             <a:pPr indent="0" lvl="0" marL="0" rtl="0" algn="ctr">
-              <a:lnSpc>
-                <a:spcPct val="100000"/>
-              </a:lnSpc>
-              <a:spcBef>
-                <a:spcPts val="0"/>
-              </a:spcBef>
-              <a:spcAft>
-                <a:spcPts val="0"/>
-              </a:spcAft>
-              <a:buSzPts val="4800"/>
+              <a:spcBef>
+                <a:spcPts val="0"/>
+              </a:spcBef>
+              <a:spcAft>
+                <a:spcPts val="0"/>
+              </a:spcAft>
               <a:buNone/>
             </a:pPr>
             <a:r>
-              <a:rPr lang="en">
-                <a:solidFill>
-                  <a:srgbClr val="002B5B"/>
-                </a:solidFill>
+              <a:rPr b="1" lang="en">
+                <a:solidFill>
+                  <a:srgbClr val="A31415"/>
+                </a:solidFill>
+                <a:latin typeface="Consolas"/>
+                <a:ea typeface="Consolas"/>
+                <a:cs typeface="Consolas"/>
+                <a:sym typeface="Consolas"/>
               </a:rPr>
-              <a:t>CSE </a:t>
-            </a:r>
-            <a:r>
-              <a:rPr lang="en"/>
-              <a:t>1</a:t>
-            </a:r>
-            <a:r>
-              <a:rPr lang="en">
-                <a:solidFill>
-                  <a:srgbClr val="002B5B"/>
-                </a:solidFill>
-              </a:rPr>
-              <a:t>0124</a:t>
-            </a:r>
-            <a:br>
-              <a:rPr lang="en">
-                <a:solidFill>
-                  <a:srgbClr val="002B5B"/>
-                </a:solidFill>
-              </a:rPr>
-            </a:br>
-            <a:r>
-              <a:rPr lang="en">
-                <a:solidFill>
-                  <a:srgbClr val="DCB439"/>
-                </a:solidFill>
-              </a:rPr>
-              <a:t>Embeddings 02</a:t>
-            </a:r>
-            <a:endParaRPr>
+              <a:t>&lt;|sos|&gt;</a:t>
+            </a:r>
+            <a:endParaRPr b="1">
               <a:solidFill>
-                <a:srgbClr val="DCB439"/>
+                <a:srgbClr val="A31415"/>
               </a:solidFill>
+              <a:latin typeface="Consolas"/>
+              <a:ea typeface="Consolas"/>
+              <a:cs typeface="Consolas"/>
+              <a:sym typeface="Consolas"/>
             </a:endParaRPr>
           </a:p>
         </p:txBody>
       </p:sp>
+      <p:sp>
+        <p:nvSpPr>
+          <p:cNvPr id="48" name="Google Shape;48;g3bca1707a95_0_222"/>
+          <p:cNvSpPr/>
+          <p:nvPr/>
+        </p:nvSpPr>
+        <p:spPr>
+          <a:xfrm>
+            <a:off x="3205775" y="2799525"/>
+            <a:ext cx="970500" cy="541200"/>
+          </a:xfrm>
+          <a:prstGeom prst="roundRect">
+            <a:avLst>
+              <a:gd fmla="val 16667" name="adj"/>
+            </a:avLst>
+          </a:prstGeom>
+          <a:noFill/>
+          <a:ln cap="flat" cmpd="sng" w="38100">
+            <a:solidFill>
+              <a:srgbClr val="002B5B"/>
+            </a:solidFill>
+            <a:prstDash val="solid"/>
+            <a:round/>
+            <a:headEnd len="sm" w="sm" type="none"/>
+            <a:tailEnd len="sm" w="sm" type="none"/>
+          </a:ln>
+        </p:spPr>
+        <p:txBody>
+          <a:bodyPr anchorCtr="0" anchor="ctr" bIns="91425" lIns="91425" spcFirstLastPara="1" rIns="91425" wrap="square" tIns="91425">
+            <a:noAutofit/>
+          </a:bodyPr>
+          <a:lstStyle/>
+          <a:p>
+            <a:pPr indent="0" lvl="0" marL="0" rtl="0" algn="ctr">
+              <a:spcBef>
+                <a:spcPts val="0"/>
+              </a:spcBef>
+              <a:spcAft>
+                <a:spcPts val="0"/>
+              </a:spcAft>
+              <a:buNone/>
+            </a:pPr>
+            <a:r>
+              <a:rPr b="1" lang="en">
+                <a:solidFill>
+                  <a:srgbClr val="A31415"/>
+                </a:solidFill>
+                <a:latin typeface="Consolas"/>
+                <a:ea typeface="Consolas"/>
+                <a:cs typeface="Consolas"/>
+                <a:sym typeface="Consolas"/>
+              </a:rPr>
+              <a:t>I</a:t>
+            </a:r>
+            <a:endParaRPr b="1">
+              <a:solidFill>
+                <a:srgbClr val="A31415"/>
+              </a:solidFill>
+              <a:latin typeface="Consolas"/>
+              <a:ea typeface="Consolas"/>
+              <a:cs typeface="Consolas"/>
+              <a:sym typeface="Consolas"/>
+            </a:endParaRPr>
+          </a:p>
+        </p:txBody>
+      </p:sp>
+      <p:sp>
+        <p:nvSpPr>
+          <p:cNvPr id="49" name="Google Shape;49;g3bca1707a95_0_222"/>
+          <p:cNvSpPr/>
+          <p:nvPr/>
+        </p:nvSpPr>
+        <p:spPr>
+          <a:xfrm>
+            <a:off x="4967713" y="2799525"/>
+            <a:ext cx="970500" cy="541200"/>
+          </a:xfrm>
+          <a:prstGeom prst="roundRect">
+            <a:avLst>
+              <a:gd fmla="val 16667" name="adj"/>
+            </a:avLst>
+          </a:prstGeom>
+          <a:noFill/>
+          <a:ln cap="flat" cmpd="sng" w="38100">
+            <a:solidFill>
+              <a:srgbClr val="002B5B"/>
+            </a:solidFill>
+            <a:prstDash val="solid"/>
+            <a:round/>
+            <a:headEnd len="sm" w="sm" type="none"/>
+            <a:tailEnd len="sm" w="sm" type="none"/>
+          </a:ln>
+        </p:spPr>
+        <p:txBody>
+          <a:bodyPr anchorCtr="0" anchor="ctr" bIns="91425" lIns="91425" spcFirstLastPara="1" rIns="91425" wrap="square" tIns="91425">
+            <a:noAutofit/>
+          </a:bodyPr>
+          <a:lstStyle/>
+          <a:p>
+            <a:pPr indent="0" lvl="0" marL="0" rtl="0" algn="ctr">
+              <a:spcBef>
+                <a:spcPts val="0"/>
+              </a:spcBef>
+              <a:spcAft>
+                <a:spcPts val="0"/>
+              </a:spcAft>
+              <a:buNone/>
+            </a:pPr>
+            <a:r>
+              <a:rPr b="1" lang="en">
+                <a:solidFill>
+                  <a:srgbClr val="A31415"/>
+                </a:solidFill>
+                <a:latin typeface="Consolas"/>
+                <a:ea typeface="Consolas"/>
+                <a:cs typeface="Consolas"/>
+                <a:sym typeface="Consolas"/>
+              </a:rPr>
+              <a:t>like</a:t>
+            </a:r>
+            <a:endParaRPr b="1">
+              <a:solidFill>
+                <a:srgbClr val="A31415"/>
+              </a:solidFill>
+              <a:latin typeface="Consolas"/>
+              <a:ea typeface="Consolas"/>
+              <a:cs typeface="Consolas"/>
+              <a:sym typeface="Consolas"/>
+            </a:endParaRPr>
+          </a:p>
+        </p:txBody>
+      </p:sp>
+      <p:sp>
+        <p:nvSpPr>
+          <p:cNvPr id="50" name="Google Shape;50;g3bca1707a95_0_222"/>
+          <p:cNvSpPr/>
+          <p:nvPr/>
+        </p:nvSpPr>
+        <p:spPr>
+          <a:xfrm>
+            <a:off x="6729650" y="2799525"/>
+            <a:ext cx="970500" cy="541200"/>
+          </a:xfrm>
+          <a:prstGeom prst="roundRect">
+            <a:avLst>
+              <a:gd fmla="val 16667" name="adj"/>
+            </a:avLst>
+          </a:prstGeom>
+          <a:noFill/>
+          <a:ln cap="flat" cmpd="sng" w="38100">
+            <a:solidFill>
+              <a:srgbClr val="002B5B"/>
+            </a:solidFill>
+            <a:prstDash val="solid"/>
+            <a:round/>
+            <a:headEnd len="sm" w="sm" type="none"/>
+            <a:tailEnd len="sm" w="sm" type="none"/>
+          </a:ln>
+        </p:spPr>
+        <p:txBody>
+          <a:bodyPr anchorCtr="0" anchor="ctr" bIns="91425" lIns="91425" spcFirstLastPara="1" rIns="91425" wrap="square" tIns="91425">
+            <a:noAutofit/>
+          </a:bodyPr>
+          <a:lstStyle/>
+          <a:p>
+            <a:pPr indent="0" lvl="0" marL="0" rtl="0" algn="ctr">
+              <a:spcBef>
+                <a:spcPts val="0"/>
+              </a:spcBef>
+              <a:spcAft>
+                <a:spcPts val="0"/>
+              </a:spcAft>
+              <a:buNone/>
+            </a:pPr>
+            <a:r>
+              <a:rPr b="1" lang="en">
+                <a:solidFill>
+                  <a:srgbClr val="A31415"/>
+                </a:solidFill>
+                <a:latin typeface="Consolas"/>
+                <a:ea typeface="Consolas"/>
+                <a:cs typeface="Consolas"/>
+                <a:sym typeface="Consolas"/>
+              </a:rPr>
+              <a:t>cute</a:t>
+            </a:r>
+            <a:endParaRPr b="1">
+              <a:solidFill>
+                <a:srgbClr val="A31415"/>
+              </a:solidFill>
+              <a:latin typeface="Consolas"/>
+              <a:ea typeface="Consolas"/>
+              <a:cs typeface="Consolas"/>
+              <a:sym typeface="Consolas"/>
+            </a:endParaRPr>
+          </a:p>
+        </p:txBody>
+      </p:sp>
+      <p:sp>
+        <p:nvSpPr>
+          <p:cNvPr id="51" name="Google Shape;51;g3bca1707a95_0_222"/>
+          <p:cNvSpPr/>
+          <p:nvPr/>
+        </p:nvSpPr>
+        <p:spPr>
+          <a:xfrm>
+            <a:off x="2414338" y="4961125"/>
+            <a:ext cx="970500" cy="541200"/>
+          </a:xfrm>
+          <a:prstGeom prst="roundRect">
+            <a:avLst>
+              <a:gd fmla="val 16667" name="adj"/>
+            </a:avLst>
+          </a:prstGeom>
+          <a:noFill/>
+          <a:ln cap="flat" cmpd="sng" w="38100">
+            <a:solidFill>
+              <a:srgbClr val="002B5B"/>
+            </a:solidFill>
+            <a:prstDash val="solid"/>
+            <a:round/>
+            <a:headEnd len="sm" w="sm" type="none"/>
+            <a:tailEnd len="sm" w="sm" type="none"/>
+          </a:ln>
+        </p:spPr>
+        <p:txBody>
+          <a:bodyPr anchorCtr="0" anchor="ctr" bIns="91425" lIns="91425" spcFirstLastPara="1" rIns="91425" wrap="square" tIns="91425">
+            <a:noAutofit/>
+          </a:bodyPr>
+          <a:lstStyle/>
+          <a:p>
+            <a:pPr indent="0" lvl="0" marL="0" rtl="0" algn="ctr">
+              <a:spcBef>
+                <a:spcPts val="0"/>
+              </a:spcBef>
+              <a:spcAft>
+                <a:spcPts val="0"/>
+              </a:spcAft>
+              <a:buNone/>
+            </a:pPr>
+            <a:r>
+              <a:rPr b="1" lang="en">
+                <a:solidFill>
+                  <a:srgbClr val="A31415"/>
+                </a:solidFill>
+                <a:latin typeface="Consolas"/>
+                <a:ea typeface="Consolas"/>
+                <a:cs typeface="Consolas"/>
+                <a:sym typeface="Consolas"/>
+              </a:rPr>
+              <a:t>and</a:t>
+            </a:r>
+            <a:endParaRPr b="1">
+              <a:solidFill>
+                <a:srgbClr val="A31415"/>
+              </a:solidFill>
+              <a:latin typeface="Consolas"/>
+              <a:ea typeface="Consolas"/>
+              <a:cs typeface="Consolas"/>
+              <a:sym typeface="Consolas"/>
+            </a:endParaRPr>
+          </a:p>
+        </p:txBody>
+      </p:sp>
+      <p:sp>
+        <p:nvSpPr>
+          <p:cNvPr id="52" name="Google Shape;52;g3bca1707a95_0_222"/>
+          <p:cNvSpPr/>
+          <p:nvPr/>
+        </p:nvSpPr>
+        <p:spPr>
+          <a:xfrm>
+            <a:off x="3821263" y="4961125"/>
+            <a:ext cx="970500" cy="541200"/>
+          </a:xfrm>
+          <a:prstGeom prst="roundRect">
+            <a:avLst>
+              <a:gd fmla="val 16667" name="adj"/>
+            </a:avLst>
+          </a:prstGeom>
+          <a:noFill/>
+          <a:ln cap="flat" cmpd="sng" w="38100">
+            <a:solidFill>
+              <a:srgbClr val="002B5B"/>
+            </a:solidFill>
+            <a:prstDash val="solid"/>
+            <a:round/>
+            <a:headEnd len="sm" w="sm" type="none"/>
+            <a:tailEnd len="sm" w="sm" type="none"/>
+          </a:ln>
+        </p:spPr>
+        <p:txBody>
+          <a:bodyPr anchorCtr="0" anchor="ctr" bIns="91425" lIns="91425" spcFirstLastPara="1" rIns="91425" wrap="square" tIns="91425">
+            <a:noAutofit/>
+          </a:bodyPr>
+          <a:lstStyle/>
+          <a:p>
+            <a:pPr indent="0" lvl="0" marL="0" rtl="0" algn="ctr">
+              <a:spcBef>
+                <a:spcPts val="0"/>
+              </a:spcBef>
+              <a:spcAft>
+                <a:spcPts val="0"/>
+              </a:spcAft>
+              <a:buNone/>
+            </a:pPr>
+            <a:r>
+              <a:rPr b="1" lang="en">
+                <a:solidFill>
+                  <a:srgbClr val="A31415"/>
+                </a:solidFill>
+                <a:latin typeface="Consolas"/>
+                <a:ea typeface="Consolas"/>
+                <a:cs typeface="Consolas"/>
+                <a:sym typeface="Consolas"/>
+              </a:rPr>
+              <a:t>fuzzy</a:t>
+            </a:r>
+            <a:endParaRPr b="1">
+              <a:solidFill>
+                <a:srgbClr val="A31415"/>
+              </a:solidFill>
+              <a:latin typeface="Consolas"/>
+              <a:ea typeface="Consolas"/>
+              <a:cs typeface="Consolas"/>
+              <a:sym typeface="Consolas"/>
+            </a:endParaRPr>
+          </a:p>
+        </p:txBody>
+      </p:sp>
+      <p:sp>
+        <p:nvSpPr>
+          <p:cNvPr id="53" name="Google Shape;53;g3bca1707a95_0_222"/>
+          <p:cNvSpPr/>
+          <p:nvPr/>
+        </p:nvSpPr>
+        <p:spPr>
+          <a:xfrm>
+            <a:off x="5228188" y="4961125"/>
+            <a:ext cx="970500" cy="541200"/>
+          </a:xfrm>
+          <a:prstGeom prst="roundRect">
+            <a:avLst>
+              <a:gd fmla="val 16667" name="adj"/>
+            </a:avLst>
+          </a:prstGeom>
+          <a:noFill/>
+          <a:ln cap="flat" cmpd="sng" w="38100">
+            <a:solidFill>
+              <a:srgbClr val="002B5B"/>
+            </a:solidFill>
+            <a:prstDash val="solid"/>
+            <a:round/>
+            <a:headEnd len="sm" w="sm" type="none"/>
+            <a:tailEnd len="sm" w="sm" type="none"/>
+          </a:ln>
+        </p:spPr>
+        <p:txBody>
+          <a:bodyPr anchorCtr="0" anchor="ctr" bIns="91425" lIns="91425" spcFirstLastPara="1" rIns="91425" wrap="square" tIns="91425">
+            <a:noAutofit/>
+          </a:bodyPr>
+          <a:lstStyle/>
+          <a:p>
+            <a:pPr indent="0" lvl="0" marL="0" rtl="0" algn="ctr">
+              <a:spcBef>
+                <a:spcPts val="0"/>
+              </a:spcBef>
+              <a:spcAft>
+                <a:spcPts val="0"/>
+              </a:spcAft>
+              <a:buNone/>
+            </a:pPr>
+            <a:r>
+              <a:rPr b="1" lang="en">
+                <a:solidFill>
+                  <a:srgbClr val="A31415"/>
+                </a:solidFill>
+                <a:latin typeface="Consolas"/>
+                <a:ea typeface="Consolas"/>
+                <a:cs typeface="Consolas"/>
+                <a:sym typeface="Consolas"/>
+              </a:rPr>
+              <a:t>cats</a:t>
+            </a:r>
+            <a:endParaRPr b="1">
+              <a:solidFill>
+                <a:srgbClr val="A31415"/>
+              </a:solidFill>
+              <a:latin typeface="Consolas"/>
+              <a:ea typeface="Consolas"/>
+              <a:cs typeface="Consolas"/>
+              <a:sym typeface="Consolas"/>
+            </a:endParaRPr>
+          </a:p>
+        </p:txBody>
+      </p:sp>
+      <p:sp>
+        <p:nvSpPr>
+          <p:cNvPr id="54" name="Google Shape;54;g3bca1707a95_0_222"/>
+          <p:cNvSpPr/>
+          <p:nvPr/>
+        </p:nvSpPr>
+        <p:spPr>
+          <a:xfrm>
+            <a:off x="5228188" y="4217800"/>
+            <a:ext cx="970500" cy="541200"/>
+          </a:xfrm>
+          <a:prstGeom prst="roundRect">
+            <a:avLst>
+              <a:gd fmla="val 16667" name="adj"/>
+            </a:avLst>
+          </a:prstGeom>
+          <a:noFill/>
+          <a:ln cap="flat" cmpd="sng" w="38100">
+            <a:solidFill>
+              <a:srgbClr val="002B5B"/>
+            </a:solidFill>
+            <a:prstDash val="solid"/>
+            <a:round/>
+            <a:headEnd len="sm" w="sm" type="none"/>
+            <a:tailEnd len="sm" w="sm" type="none"/>
+          </a:ln>
+        </p:spPr>
+        <p:txBody>
+          <a:bodyPr anchorCtr="0" anchor="ctr" bIns="91425" lIns="91425" spcFirstLastPara="1" rIns="91425" wrap="square" tIns="91425">
+            <a:noAutofit/>
+          </a:bodyPr>
+          <a:lstStyle/>
+          <a:p>
+            <a:pPr indent="0" lvl="0" marL="0" rtl="0" algn="ctr">
+              <a:spcBef>
+                <a:spcPts val="0"/>
+              </a:spcBef>
+              <a:spcAft>
+                <a:spcPts val="0"/>
+              </a:spcAft>
+              <a:buNone/>
+            </a:pPr>
+            <a:r>
+              <a:rPr b="1" lang="en">
+                <a:solidFill>
+                  <a:srgbClr val="A31415"/>
+                </a:solidFill>
+                <a:latin typeface="Consolas"/>
+                <a:ea typeface="Consolas"/>
+                <a:cs typeface="Consolas"/>
+                <a:sym typeface="Consolas"/>
+              </a:rPr>
+              <a:t>dogs</a:t>
+            </a:r>
+            <a:endParaRPr b="1">
+              <a:solidFill>
+                <a:srgbClr val="A31415"/>
+              </a:solidFill>
+              <a:latin typeface="Consolas"/>
+              <a:ea typeface="Consolas"/>
+              <a:cs typeface="Consolas"/>
+              <a:sym typeface="Consolas"/>
+            </a:endParaRPr>
+          </a:p>
+        </p:txBody>
+      </p:sp>
+      <p:sp>
+        <p:nvSpPr>
+          <p:cNvPr id="55" name="Google Shape;55;g3bca1707a95_0_222"/>
+          <p:cNvSpPr/>
+          <p:nvPr/>
+        </p:nvSpPr>
+        <p:spPr>
+          <a:xfrm>
+            <a:off x="5134888" y="5704450"/>
+            <a:ext cx="1157100" cy="541200"/>
+          </a:xfrm>
+          <a:prstGeom prst="roundRect">
+            <a:avLst>
+              <a:gd fmla="val 16667" name="adj"/>
+            </a:avLst>
+          </a:prstGeom>
+          <a:noFill/>
+          <a:ln cap="flat" cmpd="sng" w="38100">
+            <a:solidFill>
+              <a:srgbClr val="002B5B"/>
+            </a:solidFill>
+            <a:prstDash val="solid"/>
+            <a:round/>
+            <a:headEnd len="sm" w="sm" type="none"/>
+            <a:tailEnd len="sm" w="sm" type="none"/>
+          </a:ln>
+        </p:spPr>
+        <p:txBody>
+          <a:bodyPr anchorCtr="0" anchor="ctr" bIns="91425" lIns="91425" spcFirstLastPara="1" rIns="91425" wrap="square" tIns="91425">
+            <a:noAutofit/>
+          </a:bodyPr>
+          <a:lstStyle/>
+          <a:p>
+            <a:pPr indent="0" lvl="0" marL="0" rtl="0" algn="ctr">
+              <a:spcBef>
+                <a:spcPts val="0"/>
+              </a:spcBef>
+              <a:spcAft>
+                <a:spcPts val="0"/>
+              </a:spcAft>
+              <a:buNone/>
+            </a:pPr>
+            <a:r>
+              <a:rPr b="1" lang="en">
+                <a:solidFill>
+                  <a:srgbClr val="A31415"/>
+                </a:solidFill>
+                <a:latin typeface="Consolas"/>
+                <a:ea typeface="Consolas"/>
+                <a:cs typeface="Consolas"/>
+                <a:sym typeface="Consolas"/>
+              </a:rPr>
+              <a:t>blankets</a:t>
+            </a:r>
+            <a:endParaRPr b="1">
+              <a:solidFill>
+                <a:srgbClr val="A31415"/>
+              </a:solidFill>
+              <a:latin typeface="Consolas"/>
+              <a:ea typeface="Consolas"/>
+              <a:cs typeface="Consolas"/>
+              <a:sym typeface="Consolas"/>
+            </a:endParaRPr>
+          </a:p>
+        </p:txBody>
+      </p:sp>
+      <p:cxnSp>
+        <p:nvCxnSpPr>
+          <p:cNvPr id="56" name="Google Shape;56;g3bca1707a95_0_222"/>
+          <p:cNvCxnSpPr>
+            <a:stCxn id="47" idx="3"/>
+            <a:endCxn id="48" idx="1"/>
+          </p:cNvCxnSpPr>
+          <p:nvPr/>
+        </p:nvCxnSpPr>
+        <p:spPr>
+          <a:xfrm>
+            <a:off x="2414325" y="3070125"/>
+            <a:ext cx="791400" cy="0"/>
+          </a:xfrm>
+          <a:prstGeom prst="straightConnector1">
+            <a:avLst/>
+          </a:prstGeom>
+          <a:noFill/>
+          <a:ln cap="flat" cmpd="sng" w="19050">
+            <a:solidFill>
+              <a:srgbClr val="002B5B"/>
+            </a:solidFill>
+            <a:prstDash val="solid"/>
+            <a:round/>
+            <a:headEnd len="med" w="med" type="none"/>
+            <a:tailEnd len="med" w="med" type="triangle"/>
+          </a:ln>
+        </p:spPr>
+      </p:cxnSp>
+      <p:cxnSp>
+        <p:nvCxnSpPr>
+          <p:cNvPr id="57" name="Google Shape;57;g3bca1707a95_0_222"/>
+          <p:cNvCxnSpPr>
+            <a:stCxn id="48" idx="3"/>
+            <a:endCxn id="49" idx="1"/>
+          </p:cNvCxnSpPr>
+          <p:nvPr/>
+        </p:nvCxnSpPr>
+        <p:spPr>
+          <a:xfrm>
+            <a:off x="4176275" y="3070125"/>
+            <a:ext cx="791400" cy="0"/>
+          </a:xfrm>
+          <a:prstGeom prst="straightConnector1">
+            <a:avLst/>
+          </a:prstGeom>
+          <a:noFill/>
+          <a:ln cap="flat" cmpd="sng" w="19050">
+            <a:solidFill>
+              <a:srgbClr val="002B5B"/>
+            </a:solidFill>
+            <a:prstDash val="solid"/>
+            <a:round/>
+            <a:headEnd len="med" w="med" type="none"/>
+            <a:tailEnd len="med" w="med" type="triangle"/>
+          </a:ln>
+        </p:spPr>
+      </p:cxnSp>
+      <p:cxnSp>
+        <p:nvCxnSpPr>
+          <p:cNvPr id="58" name="Google Shape;58;g3bca1707a95_0_222"/>
+          <p:cNvCxnSpPr>
+            <a:stCxn id="49" idx="3"/>
+            <a:endCxn id="50" idx="1"/>
+          </p:cNvCxnSpPr>
+          <p:nvPr/>
+        </p:nvCxnSpPr>
+        <p:spPr>
+          <a:xfrm>
+            <a:off x="5938213" y="3070125"/>
+            <a:ext cx="791400" cy="0"/>
+          </a:xfrm>
+          <a:prstGeom prst="straightConnector1">
+            <a:avLst/>
+          </a:prstGeom>
+          <a:noFill/>
+          <a:ln cap="flat" cmpd="sng" w="19050">
+            <a:solidFill>
+              <a:srgbClr val="002B5B"/>
+            </a:solidFill>
+            <a:prstDash val="solid"/>
+            <a:round/>
+            <a:headEnd len="med" w="med" type="none"/>
+            <a:tailEnd len="med" w="med" type="triangle"/>
+          </a:ln>
+        </p:spPr>
+      </p:cxnSp>
+      <p:cxnSp>
+        <p:nvCxnSpPr>
+          <p:cNvPr id="59" name="Google Shape;59;g3bca1707a95_0_222"/>
+          <p:cNvCxnSpPr>
+            <a:stCxn id="51" idx="3"/>
+            <a:endCxn id="52" idx="1"/>
+          </p:cNvCxnSpPr>
+          <p:nvPr/>
+        </p:nvCxnSpPr>
+        <p:spPr>
+          <a:xfrm>
+            <a:off x="3384838" y="5231725"/>
+            <a:ext cx="436500" cy="0"/>
+          </a:xfrm>
+          <a:prstGeom prst="straightConnector1">
+            <a:avLst/>
+          </a:prstGeom>
+          <a:noFill/>
+          <a:ln cap="flat" cmpd="sng" w="19050">
+            <a:solidFill>
+              <a:srgbClr val="002B5B"/>
+            </a:solidFill>
+            <a:prstDash val="solid"/>
+            <a:round/>
+            <a:headEnd len="med" w="med" type="none"/>
+            <a:tailEnd len="med" w="med" type="triangle"/>
+          </a:ln>
+        </p:spPr>
+      </p:cxnSp>
+      <p:cxnSp>
+        <p:nvCxnSpPr>
+          <p:cNvPr id="60" name="Google Shape;60;g3bca1707a95_0_222"/>
+          <p:cNvCxnSpPr>
+            <a:stCxn id="52" idx="3"/>
+            <a:endCxn id="53" idx="1"/>
+          </p:cNvCxnSpPr>
+          <p:nvPr/>
+        </p:nvCxnSpPr>
+        <p:spPr>
+          <a:xfrm>
+            <a:off x="4791763" y="5231725"/>
+            <a:ext cx="436500" cy="0"/>
+          </a:xfrm>
+          <a:prstGeom prst="straightConnector1">
+            <a:avLst/>
+          </a:prstGeom>
+          <a:noFill/>
+          <a:ln cap="flat" cmpd="sng" w="19050">
+            <a:solidFill>
+              <a:srgbClr val="002B5B"/>
+            </a:solidFill>
+            <a:prstDash val="solid"/>
+            <a:round/>
+            <a:headEnd len="med" w="med" type="none"/>
+            <a:tailEnd len="med" w="med" type="triangle"/>
+          </a:ln>
+        </p:spPr>
+      </p:cxnSp>
+      <p:cxnSp>
+        <p:nvCxnSpPr>
+          <p:cNvPr id="61" name="Google Shape;61;g3bca1707a95_0_222"/>
+          <p:cNvCxnSpPr>
+            <a:stCxn id="52" idx="0"/>
+            <a:endCxn id="54" idx="1"/>
+          </p:cNvCxnSpPr>
+          <p:nvPr/>
+        </p:nvCxnSpPr>
+        <p:spPr>
+          <a:xfrm rot="-5400000">
+            <a:off x="4530913" y="4263925"/>
+            <a:ext cx="472800" cy="921600"/>
+          </a:xfrm>
+          <a:prstGeom prst="curvedConnector2">
+            <a:avLst/>
+          </a:prstGeom>
+          <a:noFill/>
+          <a:ln cap="flat" cmpd="sng" w="19050">
+            <a:solidFill>
+              <a:srgbClr val="002B5B"/>
+            </a:solidFill>
+            <a:prstDash val="solid"/>
+            <a:round/>
+            <a:headEnd len="med" w="med" type="none"/>
+            <a:tailEnd len="med" w="med" type="triangle"/>
+          </a:ln>
+        </p:spPr>
+      </p:cxnSp>
+      <p:cxnSp>
+        <p:nvCxnSpPr>
+          <p:cNvPr id="62" name="Google Shape;62;g3bca1707a95_0_222"/>
+          <p:cNvCxnSpPr>
+            <a:stCxn id="52" idx="2"/>
+            <a:endCxn id="55" idx="1"/>
+          </p:cNvCxnSpPr>
+          <p:nvPr/>
+        </p:nvCxnSpPr>
+        <p:spPr>
+          <a:xfrm flipH="1" rot="-5400000">
+            <a:off x="4484263" y="5324575"/>
+            <a:ext cx="472800" cy="828300"/>
+          </a:xfrm>
+          <a:prstGeom prst="curvedConnector2">
+            <a:avLst/>
+          </a:prstGeom>
+          <a:noFill/>
+          <a:ln cap="flat" cmpd="sng" w="19050">
+            <a:solidFill>
+              <a:srgbClr val="002B5B"/>
+            </a:solidFill>
+            <a:prstDash val="solid"/>
+            <a:round/>
+            <a:headEnd len="med" w="med" type="none"/>
+            <a:tailEnd len="med" w="med" type="triangle"/>
+          </a:ln>
+        </p:spPr>
+      </p:cxnSp>
+      <p:cxnSp>
+        <p:nvCxnSpPr>
+          <p:cNvPr id="63" name="Google Shape;63;g3bca1707a95_0_222"/>
+          <p:cNvCxnSpPr>
+            <a:stCxn id="50" idx="2"/>
+            <a:endCxn id="51" idx="1"/>
+          </p:cNvCxnSpPr>
+          <p:nvPr/>
+        </p:nvCxnSpPr>
+        <p:spPr>
+          <a:xfrm rot="5400000">
+            <a:off x="3869150" y="1885875"/>
+            <a:ext cx="1890900" cy="4800600"/>
+          </a:xfrm>
+          <a:prstGeom prst="curvedConnector4">
+            <a:avLst>
+              <a:gd fmla="val 42847" name="adj1"/>
+              <a:gd fmla="val 104960" name="adj2"/>
+            </a:avLst>
+          </a:prstGeom>
+          <a:noFill/>
+          <a:ln cap="flat" cmpd="sng" w="19050">
+            <a:solidFill>
+              <a:srgbClr val="002B5B"/>
+            </a:solidFill>
+            <a:prstDash val="solid"/>
+            <a:round/>
+            <a:headEnd len="med" w="med" type="none"/>
+            <a:tailEnd len="med" w="med" type="triangle"/>
+          </a:ln>
+        </p:spPr>
+      </p:cxnSp>
     </p:spTree>
   </p:cSld>
   <p:clrMapOvr>
@@ -8796,7 +11065,957 @@
   <p:cSld>
     <p:spTree>
       <p:nvGrpSpPr>
-        <p:cNvPr id="53" name="Shape 53"/>
+        <p:cNvPr id="67" name="Shape 67"/>
+        <p:cNvGrpSpPr/>
+        <p:nvPr/>
+      </p:nvGrpSpPr>
+      <p:grpSpPr>
+        <a:xfrm>
+          <a:off x="0" y="0"/>
+          <a:ext cx="0" cy="0"/>
+          <a:chOff x="0" y="0"/>
+          <a:chExt cx="0" cy="0"/>
+        </a:xfrm>
+      </p:grpSpPr>
+      <p:sp>
+        <p:nvSpPr>
+          <p:cNvPr id="68" name="Google Shape;68;g3bca1707a95_0_244"/>
+          <p:cNvSpPr txBox="1"/>
+          <p:nvPr>
+            <p:ph type="title"/>
+          </p:nvPr>
+        </p:nvSpPr>
+        <p:spPr>
+          <a:xfrm>
+            <a:off x="457200" y="274638"/>
+            <a:ext cx="8229600" cy="1143000"/>
+          </a:xfrm>
+          <a:prstGeom prst="rect">
+            <a:avLst/>
+          </a:prstGeom>
+          <a:noFill/>
+          <a:ln>
+            <a:noFill/>
+          </a:ln>
+        </p:spPr>
+        <p:txBody>
+          <a:bodyPr anchorCtr="0" anchor="b" bIns="91425" lIns="91425" spcFirstLastPara="1" rIns="91425" wrap="square" tIns="91425">
+            <a:noAutofit/>
+          </a:bodyPr>
+          <a:lstStyle/>
+          <a:p>
+            <a:pPr indent="0" lvl="0" marL="0" rtl="0" algn="l">
+              <a:lnSpc>
+                <a:spcPct val="100000"/>
+              </a:lnSpc>
+              <a:spcBef>
+                <a:spcPts val="0"/>
+              </a:spcBef>
+              <a:spcAft>
+                <a:spcPts val="0"/>
+              </a:spcAft>
+              <a:buSzPts val="3600"/>
+              <a:buNone/>
+            </a:pPr>
+            <a:r>
+              <a:rPr lang="en"/>
+              <a:t>Predicting the Next Token: Markov</a:t>
+            </a:r>
+            <a:endParaRPr/>
+          </a:p>
+        </p:txBody>
+      </p:sp>
+      <p:sp>
+        <p:nvSpPr>
+          <p:cNvPr id="69" name="Google Shape;69;g3bca1707a95_0_244"/>
+          <p:cNvSpPr txBox="1"/>
+          <p:nvPr>
+            <p:ph idx="1" type="body"/>
+          </p:nvPr>
+        </p:nvSpPr>
+        <p:spPr>
+          <a:xfrm>
+            <a:off x="457200" y="1600200"/>
+            <a:ext cx="8229600" cy="662100"/>
+          </a:xfrm>
+          <a:prstGeom prst="rect">
+            <a:avLst/>
+          </a:prstGeom>
+          <a:noFill/>
+          <a:ln>
+            <a:noFill/>
+          </a:ln>
+        </p:spPr>
+        <p:txBody>
+          <a:bodyPr anchorCtr="0" anchor="t" bIns="91425" lIns="91425" spcFirstLastPara="1" rIns="91425" wrap="square" tIns="91425">
+            <a:noAutofit/>
+          </a:bodyPr>
+          <a:lstStyle/>
+          <a:p>
+            <a:pPr indent="0" lvl="0" marL="0" rtl="0" algn="ctr">
+              <a:lnSpc>
+                <a:spcPct val="100000"/>
+              </a:lnSpc>
+              <a:spcBef>
+                <a:spcPts val="600"/>
+              </a:spcBef>
+              <a:spcAft>
+                <a:spcPts val="0"/>
+              </a:spcAft>
+              <a:buSzPts val="3000"/>
+              <a:buNone/>
+            </a:pPr>
+            <a:r>
+              <a:rPr lang="en"/>
+              <a:t>Prompt: “I like cute and fuzzy”</a:t>
+            </a:r>
+            <a:endParaRPr/>
+          </a:p>
+        </p:txBody>
+      </p:sp>
+      <p:sp>
+        <p:nvSpPr>
+          <p:cNvPr id="70" name="Google Shape;70;g3bca1707a95_0_244"/>
+          <p:cNvSpPr/>
+          <p:nvPr/>
+        </p:nvSpPr>
+        <p:spPr>
+          <a:xfrm>
+            <a:off x="1443825" y="2799525"/>
+            <a:ext cx="970500" cy="541200"/>
+          </a:xfrm>
+          <a:prstGeom prst="roundRect">
+            <a:avLst>
+              <a:gd fmla="val 16667" name="adj"/>
+            </a:avLst>
+          </a:prstGeom>
+          <a:noFill/>
+          <a:ln cap="flat" cmpd="sng" w="38100">
+            <a:solidFill>
+              <a:srgbClr val="002B5B"/>
+            </a:solidFill>
+            <a:prstDash val="solid"/>
+            <a:round/>
+            <a:headEnd len="sm" w="sm" type="none"/>
+            <a:tailEnd len="sm" w="sm" type="none"/>
+          </a:ln>
+        </p:spPr>
+        <p:txBody>
+          <a:bodyPr anchorCtr="0" anchor="ctr" bIns="91425" lIns="91425" spcFirstLastPara="1" rIns="91425" wrap="square" tIns="91425">
+            <a:noAutofit/>
+          </a:bodyPr>
+          <a:lstStyle/>
+          <a:p>
+            <a:pPr indent="0" lvl="0" marL="0" rtl="0" algn="ctr">
+              <a:spcBef>
+                <a:spcPts val="0"/>
+              </a:spcBef>
+              <a:spcAft>
+                <a:spcPts val="0"/>
+              </a:spcAft>
+              <a:buNone/>
+            </a:pPr>
+            <a:r>
+              <a:rPr b="1" lang="en">
+                <a:solidFill>
+                  <a:srgbClr val="A31415"/>
+                </a:solidFill>
+                <a:latin typeface="Consolas"/>
+                <a:ea typeface="Consolas"/>
+                <a:cs typeface="Consolas"/>
+                <a:sym typeface="Consolas"/>
+              </a:rPr>
+              <a:t>&lt;|sos|&gt;</a:t>
+            </a:r>
+            <a:endParaRPr b="1">
+              <a:solidFill>
+                <a:srgbClr val="A31415"/>
+              </a:solidFill>
+              <a:latin typeface="Consolas"/>
+              <a:ea typeface="Consolas"/>
+              <a:cs typeface="Consolas"/>
+              <a:sym typeface="Consolas"/>
+            </a:endParaRPr>
+          </a:p>
+        </p:txBody>
+      </p:sp>
+      <p:sp>
+        <p:nvSpPr>
+          <p:cNvPr id="71" name="Google Shape;71;g3bca1707a95_0_244"/>
+          <p:cNvSpPr/>
+          <p:nvPr/>
+        </p:nvSpPr>
+        <p:spPr>
+          <a:xfrm>
+            <a:off x="3205775" y="2799525"/>
+            <a:ext cx="970500" cy="541200"/>
+          </a:xfrm>
+          <a:prstGeom prst="roundRect">
+            <a:avLst>
+              <a:gd fmla="val 16667" name="adj"/>
+            </a:avLst>
+          </a:prstGeom>
+          <a:noFill/>
+          <a:ln cap="flat" cmpd="sng" w="38100">
+            <a:solidFill>
+              <a:srgbClr val="002B5B"/>
+            </a:solidFill>
+            <a:prstDash val="solid"/>
+            <a:round/>
+            <a:headEnd len="sm" w="sm" type="none"/>
+            <a:tailEnd len="sm" w="sm" type="none"/>
+          </a:ln>
+        </p:spPr>
+        <p:txBody>
+          <a:bodyPr anchorCtr="0" anchor="ctr" bIns="91425" lIns="91425" spcFirstLastPara="1" rIns="91425" wrap="square" tIns="91425">
+            <a:noAutofit/>
+          </a:bodyPr>
+          <a:lstStyle/>
+          <a:p>
+            <a:pPr indent="0" lvl="0" marL="0" rtl="0" algn="ctr">
+              <a:spcBef>
+                <a:spcPts val="0"/>
+              </a:spcBef>
+              <a:spcAft>
+                <a:spcPts val="0"/>
+              </a:spcAft>
+              <a:buNone/>
+            </a:pPr>
+            <a:r>
+              <a:rPr b="1" lang="en">
+                <a:solidFill>
+                  <a:srgbClr val="A31415"/>
+                </a:solidFill>
+                <a:latin typeface="Consolas"/>
+                <a:ea typeface="Consolas"/>
+                <a:cs typeface="Consolas"/>
+                <a:sym typeface="Consolas"/>
+              </a:rPr>
+              <a:t>I</a:t>
+            </a:r>
+            <a:endParaRPr b="1">
+              <a:solidFill>
+                <a:srgbClr val="A31415"/>
+              </a:solidFill>
+              <a:latin typeface="Consolas"/>
+              <a:ea typeface="Consolas"/>
+              <a:cs typeface="Consolas"/>
+              <a:sym typeface="Consolas"/>
+            </a:endParaRPr>
+          </a:p>
+        </p:txBody>
+      </p:sp>
+      <p:sp>
+        <p:nvSpPr>
+          <p:cNvPr id="72" name="Google Shape;72;g3bca1707a95_0_244"/>
+          <p:cNvSpPr/>
+          <p:nvPr/>
+        </p:nvSpPr>
+        <p:spPr>
+          <a:xfrm>
+            <a:off x="4967713" y="2799525"/>
+            <a:ext cx="970500" cy="541200"/>
+          </a:xfrm>
+          <a:prstGeom prst="roundRect">
+            <a:avLst>
+              <a:gd fmla="val 16667" name="adj"/>
+            </a:avLst>
+          </a:prstGeom>
+          <a:noFill/>
+          <a:ln cap="flat" cmpd="sng" w="38100">
+            <a:solidFill>
+              <a:srgbClr val="002B5B"/>
+            </a:solidFill>
+            <a:prstDash val="solid"/>
+            <a:round/>
+            <a:headEnd len="sm" w="sm" type="none"/>
+            <a:tailEnd len="sm" w="sm" type="none"/>
+          </a:ln>
+        </p:spPr>
+        <p:txBody>
+          <a:bodyPr anchorCtr="0" anchor="ctr" bIns="91425" lIns="91425" spcFirstLastPara="1" rIns="91425" wrap="square" tIns="91425">
+            <a:noAutofit/>
+          </a:bodyPr>
+          <a:lstStyle/>
+          <a:p>
+            <a:pPr indent="0" lvl="0" marL="0" rtl="0" algn="ctr">
+              <a:spcBef>
+                <a:spcPts val="0"/>
+              </a:spcBef>
+              <a:spcAft>
+                <a:spcPts val="0"/>
+              </a:spcAft>
+              <a:buNone/>
+            </a:pPr>
+            <a:r>
+              <a:rPr b="1" lang="en">
+                <a:solidFill>
+                  <a:srgbClr val="A31415"/>
+                </a:solidFill>
+                <a:latin typeface="Consolas"/>
+                <a:ea typeface="Consolas"/>
+                <a:cs typeface="Consolas"/>
+                <a:sym typeface="Consolas"/>
+              </a:rPr>
+              <a:t>like</a:t>
+            </a:r>
+            <a:endParaRPr b="1">
+              <a:solidFill>
+                <a:srgbClr val="A31415"/>
+              </a:solidFill>
+              <a:latin typeface="Consolas"/>
+              <a:ea typeface="Consolas"/>
+              <a:cs typeface="Consolas"/>
+              <a:sym typeface="Consolas"/>
+            </a:endParaRPr>
+          </a:p>
+        </p:txBody>
+      </p:sp>
+      <p:sp>
+        <p:nvSpPr>
+          <p:cNvPr id="73" name="Google Shape;73;g3bca1707a95_0_244"/>
+          <p:cNvSpPr/>
+          <p:nvPr/>
+        </p:nvSpPr>
+        <p:spPr>
+          <a:xfrm>
+            <a:off x="6729650" y="2799525"/>
+            <a:ext cx="970500" cy="541200"/>
+          </a:xfrm>
+          <a:prstGeom prst="roundRect">
+            <a:avLst>
+              <a:gd fmla="val 16667" name="adj"/>
+            </a:avLst>
+          </a:prstGeom>
+          <a:noFill/>
+          <a:ln cap="flat" cmpd="sng" w="38100">
+            <a:solidFill>
+              <a:srgbClr val="002B5B"/>
+            </a:solidFill>
+            <a:prstDash val="solid"/>
+            <a:round/>
+            <a:headEnd len="sm" w="sm" type="none"/>
+            <a:tailEnd len="sm" w="sm" type="none"/>
+          </a:ln>
+        </p:spPr>
+        <p:txBody>
+          <a:bodyPr anchorCtr="0" anchor="ctr" bIns="91425" lIns="91425" spcFirstLastPara="1" rIns="91425" wrap="square" tIns="91425">
+            <a:noAutofit/>
+          </a:bodyPr>
+          <a:lstStyle/>
+          <a:p>
+            <a:pPr indent="0" lvl="0" marL="0" rtl="0" algn="ctr">
+              <a:spcBef>
+                <a:spcPts val="0"/>
+              </a:spcBef>
+              <a:spcAft>
+                <a:spcPts val="0"/>
+              </a:spcAft>
+              <a:buNone/>
+            </a:pPr>
+            <a:r>
+              <a:rPr b="1" lang="en">
+                <a:solidFill>
+                  <a:srgbClr val="A31415"/>
+                </a:solidFill>
+                <a:latin typeface="Consolas"/>
+                <a:ea typeface="Consolas"/>
+                <a:cs typeface="Consolas"/>
+                <a:sym typeface="Consolas"/>
+              </a:rPr>
+              <a:t>cute</a:t>
+            </a:r>
+            <a:endParaRPr b="1">
+              <a:solidFill>
+                <a:srgbClr val="A31415"/>
+              </a:solidFill>
+              <a:latin typeface="Consolas"/>
+              <a:ea typeface="Consolas"/>
+              <a:cs typeface="Consolas"/>
+              <a:sym typeface="Consolas"/>
+            </a:endParaRPr>
+          </a:p>
+        </p:txBody>
+      </p:sp>
+      <p:sp>
+        <p:nvSpPr>
+          <p:cNvPr id="74" name="Google Shape;74;g3bca1707a95_0_244"/>
+          <p:cNvSpPr/>
+          <p:nvPr/>
+        </p:nvSpPr>
+        <p:spPr>
+          <a:xfrm>
+            <a:off x="2414338" y="4961125"/>
+            <a:ext cx="970500" cy="541200"/>
+          </a:xfrm>
+          <a:prstGeom prst="roundRect">
+            <a:avLst>
+              <a:gd fmla="val 16667" name="adj"/>
+            </a:avLst>
+          </a:prstGeom>
+          <a:noFill/>
+          <a:ln cap="flat" cmpd="sng" w="38100">
+            <a:solidFill>
+              <a:srgbClr val="002B5B"/>
+            </a:solidFill>
+            <a:prstDash val="solid"/>
+            <a:round/>
+            <a:headEnd len="sm" w="sm" type="none"/>
+            <a:tailEnd len="sm" w="sm" type="none"/>
+          </a:ln>
+        </p:spPr>
+        <p:txBody>
+          <a:bodyPr anchorCtr="0" anchor="ctr" bIns="91425" lIns="91425" spcFirstLastPara="1" rIns="91425" wrap="square" tIns="91425">
+            <a:noAutofit/>
+          </a:bodyPr>
+          <a:lstStyle/>
+          <a:p>
+            <a:pPr indent="0" lvl="0" marL="0" rtl="0" algn="ctr">
+              <a:spcBef>
+                <a:spcPts val="0"/>
+              </a:spcBef>
+              <a:spcAft>
+                <a:spcPts val="0"/>
+              </a:spcAft>
+              <a:buNone/>
+            </a:pPr>
+            <a:r>
+              <a:rPr b="1" lang="en">
+                <a:solidFill>
+                  <a:srgbClr val="A31415"/>
+                </a:solidFill>
+                <a:latin typeface="Consolas"/>
+                <a:ea typeface="Consolas"/>
+                <a:cs typeface="Consolas"/>
+                <a:sym typeface="Consolas"/>
+              </a:rPr>
+              <a:t>and</a:t>
+            </a:r>
+            <a:endParaRPr b="1">
+              <a:solidFill>
+                <a:srgbClr val="A31415"/>
+              </a:solidFill>
+              <a:latin typeface="Consolas"/>
+              <a:ea typeface="Consolas"/>
+              <a:cs typeface="Consolas"/>
+              <a:sym typeface="Consolas"/>
+            </a:endParaRPr>
+          </a:p>
+        </p:txBody>
+      </p:sp>
+      <p:sp>
+        <p:nvSpPr>
+          <p:cNvPr id="75" name="Google Shape;75;g3bca1707a95_0_244"/>
+          <p:cNvSpPr/>
+          <p:nvPr/>
+        </p:nvSpPr>
+        <p:spPr>
+          <a:xfrm>
+            <a:off x="3821263" y="4961125"/>
+            <a:ext cx="970500" cy="541200"/>
+          </a:xfrm>
+          <a:prstGeom prst="roundRect">
+            <a:avLst>
+              <a:gd fmla="val 16667" name="adj"/>
+            </a:avLst>
+          </a:prstGeom>
+          <a:noFill/>
+          <a:ln cap="flat" cmpd="sng" w="38100">
+            <a:solidFill>
+              <a:srgbClr val="002B5B"/>
+            </a:solidFill>
+            <a:prstDash val="solid"/>
+            <a:round/>
+            <a:headEnd len="sm" w="sm" type="none"/>
+            <a:tailEnd len="sm" w="sm" type="none"/>
+          </a:ln>
+        </p:spPr>
+        <p:txBody>
+          <a:bodyPr anchorCtr="0" anchor="ctr" bIns="91425" lIns="91425" spcFirstLastPara="1" rIns="91425" wrap="square" tIns="91425">
+            <a:noAutofit/>
+          </a:bodyPr>
+          <a:lstStyle/>
+          <a:p>
+            <a:pPr indent="0" lvl="0" marL="0" rtl="0" algn="ctr">
+              <a:spcBef>
+                <a:spcPts val="0"/>
+              </a:spcBef>
+              <a:spcAft>
+                <a:spcPts val="0"/>
+              </a:spcAft>
+              <a:buNone/>
+            </a:pPr>
+            <a:r>
+              <a:rPr b="1" lang="en">
+                <a:solidFill>
+                  <a:srgbClr val="A31415"/>
+                </a:solidFill>
+                <a:latin typeface="Consolas"/>
+                <a:ea typeface="Consolas"/>
+                <a:cs typeface="Consolas"/>
+                <a:sym typeface="Consolas"/>
+              </a:rPr>
+              <a:t>fuzzy</a:t>
+            </a:r>
+            <a:endParaRPr b="1">
+              <a:solidFill>
+                <a:srgbClr val="A31415"/>
+              </a:solidFill>
+              <a:latin typeface="Consolas"/>
+              <a:ea typeface="Consolas"/>
+              <a:cs typeface="Consolas"/>
+              <a:sym typeface="Consolas"/>
+            </a:endParaRPr>
+          </a:p>
+        </p:txBody>
+      </p:sp>
+      <p:sp>
+        <p:nvSpPr>
+          <p:cNvPr id="76" name="Google Shape;76;g3bca1707a95_0_244"/>
+          <p:cNvSpPr/>
+          <p:nvPr/>
+        </p:nvSpPr>
+        <p:spPr>
+          <a:xfrm>
+            <a:off x="5228188" y="4961125"/>
+            <a:ext cx="970500" cy="541200"/>
+          </a:xfrm>
+          <a:prstGeom prst="roundRect">
+            <a:avLst>
+              <a:gd fmla="val 16667" name="adj"/>
+            </a:avLst>
+          </a:prstGeom>
+          <a:noFill/>
+          <a:ln cap="flat" cmpd="sng" w="38100">
+            <a:solidFill>
+              <a:srgbClr val="002B5B"/>
+            </a:solidFill>
+            <a:prstDash val="solid"/>
+            <a:round/>
+            <a:headEnd len="sm" w="sm" type="none"/>
+            <a:tailEnd len="sm" w="sm" type="none"/>
+          </a:ln>
+        </p:spPr>
+        <p:txBody>
+          <a:bodyPr anchorCtr="0" anchor="ctr" bIns="91425" lIns="91425" spcFirstLastPara="1" rIns="91425" wrap="square" tIns="91425">
+            <a:noAutofit/>
+          </a:bodyPr>
+          <a:lstStyle/>
+          <a:p>
+            <a:pPr indent="0" lvl="0" marL="0" rtl="0" algn="ctr">
+              <a:spcBef>
+                <a:spcPts val="0"/>
+              </a:spcBef>
+              <a:spcAft>
+                <a:spcPts val="0"/>
+              </a:spcAft>
+              <a:buNone/>
+            </a:pPr>
+            <a:r>
+              <a:rPr b="1" lang="en">
+                <a:solidFill>
+                  <a:srgbClr val="A31415"/>
+                </a:solidFill>
+                <a:latin typeface="Consolas"/>
+                <a:ea typeface="Consolas"/>
+                <a:cs typeface="Consolas"/>
+                <a:sym typeface="Consolas"/>
+              </a:rPr>
+              <a:t>cats</a:t>
+            </a:r>
+            <a:endParaRPr b="1">
+              <a:solidFill>
+                <a:srgbClr val="A31415"/>
+              </a:solidFill>
+              <a:latin typeface="Consolas"/>
+              <a:ea typeface="Consolas"/>
+              <a:cs typeface="Consolas"/>
+              <a:sym typeface="Consolas"/>
+            </a:endParaRPr>
+          </a:p>
+        </p:txBody>
+      </p:sp>
+      <p:sp>
+        <p:nvSpPr>
+          <p:cNvPr id="77" name="Google Shape;77;g3bca1707a95_0_244"/>
+          <p:cNvSpPr/>
+          <p:nvPr/>
+        </p:nvSpPr>
+        <p:spPr>
+          <a:xfrm>
+            <a:off x="5228188" y="4217800"/>
+            <a:ext cx="970500" cy="541200"/>
+          </a:xfrm>
+          <a:prstGeom prst="roundRect">
+            <a:avLst>
+              <a:gd fmla="val 16667" name="adj"/>
+            </a:avLst>
+          </a:prstGeom>
+          <a:noFill/>
+          <a:ln cap="flat" cmpd="sng" w="38100">
+            <a:solidFill>
+              <a:srgbClr val="002B5B"/>
+            </a:solidFill>
+            <a:prstDash val="solid"/>
+            <a:round/>
+            <a:headEnd len="sm" w="sm" type="none"/>
+            <a:tailEnd len="sm" w="sm" type="none"/>
+          </a:ln>
+        </p:spPr>
+        <p:txBody>
+          <a:bodyPr anchorCtr="0" anchor="ctr" bIns="91425" lIns="91425" spcFirstLastPara="1" rIns="91425" wrap="square" tIns="91425">
+            <a:noAutofit/>
+          </a:bodyPr>
+          <a:lstStyle/>
+          <a:p>
+            <a:pPr indent="0" lvl="0" marL="0" rtl="0" algn="ctr">
+              <a:spcBef>
+                <a:spcPts val="0"/>
+              </a:spcBef>
+              <a:spcAft>
+                <a:spcPts val="0"/>
+              </a:spcAft>
+              <a:buNone/>
+            </a:pPr>
+            <a:r>
+              <a:rPr b="1" lang="en">
+                <a:solidFill>
+                  <a:srgbClr val="A31415"/>
+                </a:solidFill>
+                <a:latin typeface="Consolas"/>
+                <a:ea typeface="Consolas"/>
+                <a:cs typeface="Consolas"/>
+                <a:sym typeface="Consolas"/>
+              </a:rPr>
+              <a:t>dogs</a:t>
+            </a:r>
+            <a:endParaRPr b="1">
+              <a:solidFill>
+                <a:srgbClr val="A31415"/>
+              </a:solidFill>
+              <a:latin typeface="Consolas"/>
+              <a:ea typeface="Consolas"/>
+              <a:cs typeface="Consolas"/>
+              <a:sym typeface="Consolas"/>
+            </a:endParaRPr>
+          </a:p>
+        </p:txBody>
+      </p:sp>
+      <p:sp>
+        <p:nvSpPr>
+          <p:cNvPr id="78" name="Google Shape;78;g3bca1707a95_0_244"/>
+          <p:cNvSpPr/>
+          <p:nvPr/>
+        </p:nvSpPr>
+        <p:spPr>
+          <a:xfrm>
+            <a:off x="5134888" y="5704450"/>
+            <a:ext cx="1157100" cy="541200"/>
+          </a:xfrm>
+          <a:prstGeom prst="roundRect">
+            <a:avLst>
+              <a:gd fmla="val 16667" name="adj"/>
+            </a:avLst>
+          </a:prstGeom>
+          <a:noFill/>
+          <a:ln cap="flat" cmpd="sng" w="38100">
+            <a:solidFill>
+              <a:srgbClr val="002B5B"/>
+            </a:solidFill>
+            <a:prstDash val="solid"/>
+            <a:round/>
+            <a:headEnd len="sm" w="sm" type="none"/>
+            <a:tailEnd len="sm" w="sm" type="none"/>
+          </a:ln>
+        </p:spPr>
+        <p:txBody>
+          <a:bodyPr anchorCtr="0" anchor="ctr" bIns="91425" lIns="91425" spcFirstLastPara="1" rIns="91425" wrap="square" tIns="91425">
+            <a:noAutofit/>
+          </a:bodyPr>
+          <a:lstStyle/>
+          <a:p>
+            <a:pPr indent="0" lvl="0" marL="0" rtl="0" algn="ctr">
+              <a:spcBef>
+                <a:spcPts val="0"/>
+              </a:spcBef>
+              <a:spcAft>
+                <a:spcPts val="0"/>
+              </a:spcAft>
+              <a:buNone/>
+            </a:pPr>
+            <a:r>
+              <a:rPr b="1" lang="en">
+                <a:solidFill>
+                  <a:srgbClr val="A31415"/>
+                </a:solidFill>
+                <a:latin typeface="Consolas"/>
+                <a:ea typeface="Consolas"/>
+                <a:cs typeface="Consolas"/>
+                <a:sym typeface="Consolas"/>
+              </a:rPr>
+              <a:t>blankets</a:t>
+            </a:r>
+            <a:endParaRPr b="1">
+              <a:solidFill>
+                <a:srgbClr val="A31415"/>
+              </a:solidFill>
+              <a:latin typeface="Consolas"/>
+              <a:ea typeface="Consolas"/>
+              <a:cs typeface="Consolas"/>
+              <a:sym typeface="Consolas"/>
+            </a:endParaRPr>
+          </a:p>
+        </p:txBody>
+      </p:sp>
+      <p:cxnSp>
+        <p:nvCxnSpPr>
+          <p:cNvPr id="79" name="Google Shape;79;g3bca1707a95_0_244"/>
+          <p:cNvCxnSpPr>
+            <a:stCxn id="70" idx="3"/>
+            <a:endCxn id="71" idx="1"/>
+          </p:cNvCxnSpPr>
+          <p:nvPr/>
+        </p:nvCxnSpPr>
+        <p:spPr>
+          <a:xfrm>
+            <a:off x="2414325" y="3070125"/>
+            <a:ext cx="791400" cy="0"/>
+          </a:xfrm>
+          <a:prstGeom prst="straightConnector1">
+            <a:avLst/>
+          </a:prstGeom>
+          <a:noFill/>
+          <a:ln cap="flat" cmpd="sng" w="19050">
+            <a:solidFill>
+              <a:srgbClr val="002B5B"/>
+            </a:solidFill>
+            <a:prstDash val="solid"/>
+            <a:round/>
+            <a:headEnd len="med" w="med" type="none"/>
+            <a:tailEnd len="med" w="med" type="triangle"/>
+          </a:ln>
+        </p:spPr>
+      </p:cxnSp>
+      <p:cxnSp>
+        <p:nvCxnSpPr>
+          <p:cNvPr id="80" name="Google Shape;80;g3bca1707a95_0_244"/>
+          <p:cNvCxnSpPr>
+            <a:stCxn id="71" idx="3"/>
+            <a:endCxn id="72" idx="1"/>
+          </p:cNvCxnSpPr>
+          <p:nvPr/>
+        </p:nvCxnSpPr>
+        <p:spPr>
+          <a:xfrm>
+            <a:off x="4176275" y="3070125"/>
+            <a:ext cx="791400" cy="0"/>
+          </a:xfrm>
+          <a:prstGeom prst="straightConnector1">
+            <a:avLst/>
+          </a:prstGeom>
+          <a:noFill/>
+          <a:ln cap="flat" cmpd="sng" w="19050">
+            <a:solidFill>
+              <a:srgbClr val="002B5B"/>
+            </a:solidFill>
+            <a:prstDash val="solid"/>
+            <a:round/>
+            <a:headEnd len="med" w="med" type="none"/>
+            <a:tailEnd len="med" w="med" type="triangle"/>
+          </a:ln>
+        </p:spPr>
+      </p:cxnSp>
+      <p:cxnSp>
+        <p:nvCxnSpPr>
+          <p:cNvPr id="81" name="Google Shape;81;g3bca1707a95_0_244"/>
+          <p:cNvCxnSpPr>
+            <a:stCxn id="72" idx="3"/>
+            <a:endCxn id="73" idx="1"/>
+          </p:cNvCxnSpPr>
+          <p:nvPr/>
+        </p:nvCxnSpPr>
+        <p:spPr>
+          <a:xfrm>
+            <a:off x="5938213" y="3070125"/>
+            <a:ext cx="791400" cy="0"/>
+          </a:xfrm>
+          <a:prstGeom prst="straightConnector1">
+            <a:avLst/>
+          </a:prstGeom>
+          <a:noFill/>
+          <a:ln cap="flat" cmpd="sng" w="19050">
+            <a:solidFill>
+              <a:srgbClr val="002B5B"/>
+            </a:solidFill>
+            <a:prstDash val="solid"/>
+            <a:round/>
+            <a:headEnd len="med" w="med" type="none"/>
+            <a:tailEnd len="med" w="med" type="triangle"/>
+          </a:ln>
+        </p:spPr>
+      </p:cxnSp>
+      <p:cxnSp>
+        <p:nvCxnSpPr>
+          <p:cNvPr id="82" name="Google Shape;82;g3bca1707a95_0_244"/>
+          <p:cNvCxnSpPr>
+            <a:stCxn id="74" idx="3"/>
+            <a:endCxn id="75" idx="1"/>
+          </p:cNvCxnSpPr>
+          <p:nvPr/>
+        </p:nvCxnSpPr>
+        <p:spPr>
+          <a:xfrm>
+            <a:off x="3384838" y="5231725"/>
+            <a:ext cx="436500" cy="0"/>
+          </a:xfrm>
+          <a:prstGeom prst="straightConnector1">
+            <a:avLst/>
+          </a:prstGeom>
+          <a:noFill/>
+          <a:ln cap="flat" cmpd="sng" w="19050">
+            <a:solidFill>
+              <a:srgbClr val="002B5B"/>
+            </a:solidFill>
+            <a:prstDash val="solid"/>
+            <a:round/>
+            <a:headEnd len="med" w="med" type="none"/>
+            <a:tailEnd len="med" w="med" type="triangle"/>
+          </a:ln>
+        </p:spPr>
+      </p:cxnSp>
+      <p:cxnSp>
+        <p:nvCxnSpPr>
+          <p:cNvPr id="83" name="Google Shape;83;g3bca1707a95_0_244"/>
+          <p:cNvCxnSpPr>
+            <a:stCxn id="75" idx="3"/>
+            <a:endCxn id="76" idx="1"/>
+          </p:cNvCxnSpPr>
+          <p:nvPr/>
+        </p:nvCxnSpPr>
+        <p:spPr>
+          <a:xfrm>
+            <a:off x="4791763" y="5231725"/>
+            <a:ext cx="436500" cy="0"/>
+          </a:xfrm>
+          <a:prstGeom prst="straightConnector1">
+            <a:avLst/>
+          </a:prstGeom>
+          <a:noFill/>
+          <a:ln cap="flat" cmpd="sng" w="19050">
+            <a:solidFill>
+              <a:srgbClr val="002B5B"/>
+            </a:solidFill>
+            <a:prstDash val="solid"/>
+            <a:round/>
+            <a:headEnd len="med" w="med" type="none"/>
+            <a:tailEnd len="med" w="med" type="triangle"/>
+          </a:ln>
+        </p:spPr>
+      </p:cxnSp>
+      <p:cxnSp>
+        <p:nvCxnSpPr>
+          <p:cNvPr id="84" name="Google Shape;84;g3bca1707a95_0_244"/>
+          <p:cNvCxnSpPr>
+            <a:stCxn id="75" idx="0"/>
+            <a:endCxn id="77" idx="1"/>
+          </p:cNvCxnSpPr>
+          <p:nvPr/>
+        </p:nvCxnSpPr>
+        <p:spPr>
+          <a:xfrm rot="-5400000">
+            <a:off x="4530913" y="4263925"/>
+            <a:ext cx="472800" cy="921600"/>
+          </a:xfrm>
+          <a:prstGeom prst="curvedConnector2">
+            <a:avLst/>
+          </a:prstGeom>
+          <a:noFill/>
+          <a:ln cap="flat" cmpd="sng" w="19050">
+            <a:solidFill>
+              <a:srgbClr val="002B5B"/>
+            </a:solidFill>
+            <a:prstDash val="solid"/>
+            <a:round/>
+            <a:headEnd len="med" w="med" type="none"/>
+            <a:tailEnd len="med" w="med" type="triangle"/>
+          </a:ln>
+        </p:spPr>
+      </p:cxnSp>
+      <p:cxnSp>
+        <p:nvCxnSpPr>
+          <p:cNvPr id="85" name="Google Shape;85;g3bca1707a95_0_244"/>
+          <p:cNvCxnSpPr>
+            <a:stCxn id="75" idx="2"/>
+            <a:endCxn id="78" idx="1"/>
+          </p:cNvCxnSpPr>
+          <p:nvPr/>
+        </p:nvCxnSpPr>
+        <p:spPr>
+          <a:xfrm flipH="1" rot="-5400000">
+            <a:off x="4484263" y="5324575"/>
+            <a:ext cx="472800" cy="828300"/>
+          </a:xfrm>
+          <a:prstGeom prst="curvedConnector2">
+            <a:avLst/>
+          </a:prstGeom>
+          <a:noFill/>
+          <a:ln cap="flat" cmpd="sng" w="19050">
+            <a:solidFill>
+              <a:srgbClr val="002B5B"/>
+            </a:solidFill>
+            <a:prstDash val="solid"/>
+            <a:round/>
+            <a:headEnd len="med" w="med" type="none"/>
+            <a:tailEnd len="med" w="med" type="triangle"/>
+          </a:ln>
+        </p:spPr>
+      </p:cxnSp>
+      <p:cxnSp>
+        <p:nvCxnSpPr>
+          <p:cNvPr id="86" name="Google Shape;86;g3bca1707a95_0_244"/>
+          <p:cNvCxnSpPr>
+            <a:stCxn id="73" idx="2"/>
+            <a:endCxn id="74" idx="1"/>
+          </p:cNvCxnSpPr>
+          <p:nvPr/>
+        </p:nvCxnSpPr>
+        <p:spPr>
+          <a:xfrm rot="5400000">
+            <a:off x="3869150" y="1885875"/>
+            <a:ext cx="1890900" cy="4800600"/>
+          </a:xfrm>
+          <a:prstGeom prst="curvedConnector4">
+            <a:avLst>
+              <a:gd fmla="val 42847" name="adj1"/>
+              <a:gd fmla="val 104960" name="adj2"/>
+            </a:avLst>
+          </a:prstGeom>
+          <a:noFill/>
+          <a:ln cap="flat" cmpd="sng" w="19050">
+            <a:solidFill>
+              <a:srgbClr val="002B5B"/>
+            </a:solidFill>
+            <a:prstDash val="solid"/>
+            <a:round/>
+            <a:headEnd len="med" w="med" type="none"/>
+            <a:tailEnd len="med" w="med" type="triangle"/>
+          </a:ln>
+        </p:spPr>
+      </p:cxnSp>
+    </p:spTree>
+  </p:cSld>
+  <p:clrMapOvr>
+    <a:masterClrMapping/>
+  </p:clrMapOvr>
+</p:sld>
+</file>
+
+<file path=ppt/slides/slide5.xml><?xml version="1.0" encoding="utf-8"?>
+<p:sld xmlns:a="http://schemas.openxmlformats.org/drawingml/2006/main" xmlns:r="http://schemas.openxmlformats.org/officeDocument/2006/relationships" xmlns:mc="http://schemas.openxmlformats.org/markup-compatibility/2006" xmlns:mv="urn:schemas-microsoft-com:mac:vml" xmlns:p="http://schemas.openxmlformats.org/presentationml/2006/main" xmlns:c="http://schemas.openxmlformats.org/drawingml/2006/chart" xmlns:dgm="http://schemas.openxmlformats.org/drawingml/2006/diagram" xmlns:o="urn:schemas-microsoft-com:office:office" xmlns:v="urn:schemas-microsoft-com:vml" xmlns:pvml="urn:schemas-microsoft-com:office:powerpoint" xmlns:com="http://schemas.openxmlformats.org/drawingml/2006/compatibility" xmlns:p14="http://schemas.microsoft.com/office/powerpoint/2010/main" xmlns:p15="http://schemas.microsoft.com/office/powerpoint/2012/main" xmlns:ahyp="http://schemas.microsoft.com/office/drawing/2018/hyperlinkcolor">
+  <p:cSld>
+    <p:spTree>
+      <p:nvGrpSpPr>
+        <p:cNvPr id="90" name="Shape 90"/>
         <p:cNvGrpSpPr/>
         <p:nvPr/>
       </p:nvGrpSpPr>
@@ -8810,7 +12029,7 @@
       </p:grpSpPr>
       <p:pic>
         <p:nvPicPr>
-          <p:cNvPr id="54" name="Google Shape;54;g3bc35b5116e_0_22" title="transformer_arch@2x.png"/>
+          <p:cNvPr id="91" name="Google Shape;91;g3bc35b5116e_0_22" title="transformer_arch@2x.png"/>
           <p:cNvPicPr preferRelativeResize="0"/>
           <p:nvPr/>
         </p:nvPicPr>
@@ -8837,7 +12056,7 @@
       </p:pic>
       <p:sp>
         <p:nvSpPr>
-          <p:cNvPr id="55" name="Google Shape;55;g3bc35b5116e_0_22"/>
+          <p:cNvPr id="92" name="Google Shape;92;g3bc35b5116e_0_22"/>
           <p:cNvSpPr txBox="1"/>
           <p:nvPr>
             <p:ph type="title"/>
@@ -8899,10 +12118,10 @@
       </p:sp>
       <p:cxnSp>
         <p:nvCxnSpPr>
-          <p:cNvPr id="56" name="Google Shape;56;g3bc35b5116e_0_22"/>
+          <p:cNvPr id="93" name="Google Shape;93;g3bc35b5116e_0_22"/>
           <p:cNvCxnSpPr>
-            <a:stCxn id="55" idx="1"/>
-            <a:endCxn id="57" idx="3"/>
+            <a:stCxn id="92" idx="1"/>
+            <a:endCxn id="94" idx="3"/>
           </p:cNvCxnSpPr>
           <p:nvPr/>
         </p:nvCxnSpPr>
@@ -8930,7 +12149,7 @@
       </p:cxnSp>
       <p:sp>
         <p:nvSpPr>
-          <p:cNvPr id="57" name="Google Shape;57;g3bc35b5116e_0_22"/>
+          <p:cNvPr id="94" name="Google Shape;94;g3bc35b5116e_0_22"/>
           <p:cNvSpPr/>
           <p:nvPr/>
         </p:nvSpPr>
@@ -8993,7 +12212,7 @@
       </p:sp>
       <p:sp>
         <p:nvSpPr>
-          <p:cNvPr id="58" name="Google Shape;58;g3bc35b5116e_0_22"/>
+          <p:cNvPr id="95" name="Google Shape;95;g3bc35b5116e_0_22"/>
           <p:cNvSpPr txBox="1"/>
           <p:nvPr/>
         </p:nvSpPr>
@@ -9204,12 +12423,12 @@
 </p:sld>
 </file>
 
-<file path=ppt/slides/slide5.xml><?xml version="1.0" encoding="utf-8"?>
+<file path=ppt/slides/slide6.xml><?xml version="1.0" encoding="utf-8"?>
 <p:sld xmlns:a="http://schemas.openxmlformats.org/drawingml/2006/main" xmlns:r="http://schemas.openxmlformats.org/officeDocument/2006/relationships" xmlns:mc="http://schemas.openxmlformats.org/markup-compatibility/2006" xmlns:mv="urn:schemas-microsoft-com:mac:vml" xmlns:p="http://schemas.openxmlformats.org/presentationml/2006/main" xmlns:c="http://schemas.openxmlformats.org/drawingml/2006/chart" xmlns:dgm="http://schemas.openxmlformats.org/drawingml/2006/diagram" xmlns:o="urn:schemas-microsoft-com:office:office" xmlns:v="urn:schemas-microsoft-com:vml" xmlns:pvml="urn:schemas-microsoft-com:office:powerpoint" xmlns:com="http://schemas.openxmlformats.org/drawingml/2006/compatibility" xmlns:p14="http://schemas.microsoft.com/office/powerpoint/2010/main" xmlns:p15="http://schemas.microsoft.com/office/powerpoint/2012/main" xmlns:ahyp="http://schemas.microsoft.com/office/drawing/2018/hyperlinkcolor">
   <p:cSld>
     <p:spTree>
       <p:nvGrpSpPr>
-        <p:cNvPr id="62" name="Shape 62"/>
+        <p:cNvPr id="99" name="Shape 99"/>
         <p:cNvGrpSpPr/>
         <p:nvPr/>
       </p:nvGrpSpPr>
@@ -9223,7 +12442,7 @@
       </p:grpSpPr>
       <p:sp>
         <p:nvSpPr>
-          <p:cNvPr id="63" name="Google Shape;63;g3bc35b5116e_0_90"/>
+          <p:cNvPr id="100" name="Google Shape;100;g3bca1707a95_0_209"/>
           <p:cNvSpPr txBox="1"/>
           <p:nvPr>
             <p:ph type="title"/>
@@ -9237,10 +12456,6 @@
           <a:prstGeom prst="rect">
             <a:avLst/>
           </a:prstGeom>
-          <a:noFill/>
-          <a:ln>
-            <a:noFill/>
-          </a:ln>
         </p:spPr>
         <p:txBody>
           <a:bodyPr anchorCtr="0" anchor="b" bIns="91425" lIns="91425" spcFirstLastPara="1" rIns="91425" wrap="square" tIns="91425">
@@ -9249,113 +12464,17 @@
           <a:lstStyle/>
           <a:p>
             <a:pPr indent="0" lvl="0" marL="0" rtl="0" algn="l">
-              <a:lnSpc>
-                <a:spcPct val="100000"/>
-              </a:lnSpc>
-              <a:spcBef>
-                <a:spcPts val="0"/>
-              </a:spcBef>
-              <a:spcAft>
-                <a:spcPts val="0"/>
-              </a:spcAft>
-              <a:buSzPts val="3600"/>
+              <a:spcBef>
+                <a:spcPts val="0"/>
+              </a:spcBef>
+              <a:spcAft>
+                <a:spcPts val="0"/>
+              </a:spcAft>
               <a:buNone/>
             </a:pPr>
             <a:r>
               <a:rPr lang="en"/>
-              <a:t>Space - Embeddings</a:t>
-            </a:r>
-            <a:endParaRPr/>
-          </a:p>
-        </p:txBody>
-      </p:sp>
-      <p:pic>
-        <p:nvPicPr>
-          <p:cNvPr id="64" name="Google Shape;64;g3bc35b5116e_0_90"/>
-          <p:cNvPicPr preferRelativeResize="0"/>
-          <p:nvPr/>
-        </p:nvPicPr>
-        <p:blipFill rotWithShape="1">
-          <a:blip r:embed="rId3">
-            <a:alphaModFix/>
-          </a:blip>
-          <a:srcRect b="0" l="0" r="0" t="0"/>
-          <a:stretch/>
-        </p:blipFill>
-        <p:spPr>
-          <a:xfrm>
-            <a:off x="152400" y="2295238"/>
-            <a:ext cx="8839204" cy="3034160"/>
-          </a:xfrm>
-          <a:prstGeom prst="rect">
-            <a:avLst/>
-          </a:prstGeom>
-          <a:noFill/>
-          <a:ln>
-            <a:noFill/>
-          </a:ln>
-        </p:spPr>
-      </p:pic>
-    </p:spTree>
-  </p:cSld>
-  <p:clrMapOvr>
-    <a:masterClrMapping/>
-  </p:clrMapOvr>
-</p:sld>
-</file>
-
-<file path=ppt/slides/slide6.xml><?xml version="1.0" encoding="utf-8"?>
-<p:sld xmlns:a="http://schemas.openxmlformats.org/drawingml/2006/main" xmlns:r="http://schemas.openxmlformats.org/officeDocument/2006/relationships" xmlns:mc="http://schemas.openxmlformats.org/markup-compatibility/2006" xmlns:mv="urn:schemas-microsoft-com:mac:vml" xmlns:p="http://schemas.openxmlformats.org/presentationml/2006/main" xmlns:c="http://schemas.openxmlformats.org/drawingml/2006/chart" xmlns:dgm="http://schemas.openxmlformats.org/drawingml/2006/diagram" xmlns:o="urn:schemas-microsoft-com:office:office" xmlns:v="urn:schemas-microsoft-com:vml" xmlns:pvml="urn:schemas-microsoft-com:office:powerpoint" xmlns:com="http://schemas.openxmlformats.org/drawingml/2006/compatibility" xmlns:p14="http://schemas.microsoft.com/office/powerpoint/2010/main" xmlns:p15="http://schemas.microsoft.com/office/powerpoint/2012/main" xmlns:ahyp="http://schemas.microsoft.com/office/drawing/2018/hyperlinkcolor">
-  <p:cSld>
-    <p:spTree>
-      <p:nvGrpSpPr>
-        <p:cNvPr id="68" name="Shape 68"/>
-        <p:cNvGrpSpPr/>
-        <p:nvPr/>
-      </p:nvGrpSpPr>
-      <p:grpSpPr>
-        <a:xfrm>
-          <a:off x="0" y="0"/>
-          <a:ext cx="0" cy="0"/>
-          <a:chOff x="0" y="0"/>
-          <a:chExt cx="0" cy="0"/>
-        </a:xfrm>
-      </p:grpSpPr>
-      <p:sp>
-        <p:nvSpPr>
-          <p:cNvPr id="69" name="Google Shape;69;g3bc426a098a_0_31"/>
-          <p:cNvSpPr txBox="1"/>
-          <p:nvPr>
-            <p:ph type="title"/>
-          </p:nvPr>
-        </p:nvSpPr>
-        <p:spPr>
-          <a:xfrm>
-            <a:off x="457200" y="274638"/>
-            <a:ext cx="8229600" cy="1143000"/>
-          </a:xfrm>
-          <a:prstGeom prst="rect">
-            <a:avLst/>
-          </a:prstGeom>
-        </p:spPr>
-        <p:txBody>
-          <a:bodyPr anchorCtr="0" anchor="b" bIns="91425" lIns="91425" spcFirstLastPara="1" rIns="91425" wrap="square" tIns="91425">
-            <a:noAutofit/>
-          </a:bodyPr>
-          <a:lstStyle/>
-          <a:p>
-            <a:pPr indent="0" lvl="0" marL="0" rtl="0" algn="l">
-              <a:spcBef>
-                <a:spcPts val="0"/>
-              </a:spcBef>
-              <a:spcAft>
-                <a:spcPts val="0"/>
-              </a:spcAft>
-              <a:buNone/>
-            </a:pPr>
-            <a:r>
-              <a:rPr lang="en"/>
-              <a:t>The Entire Internet</a:t>
+              <a:t>Embeddings</a:t>
             </a:r>
             <a:endParaRPr/>
           </a:p>
@@ -9363,7 +12482,7 @@
       </p:sp>
       <p:sp>
         <p:nvSpPr>
-          <p:cNvPr id="70" name="Google Shape;70;g3bc426a098a_0_31"/>
+          <p:cNvPr id="101" name="Google Shape;101;g3bca1707a95_0_209"/>
           <p:cNvSpPr txBox="1"/>
           <p:nvPr>
             <p:ph idx="1" type="body"/>
@@ -9372,7 +12491,7 @@
         <p:spPr>
           <a:xfrm>
             <a:off x="457200" y="1600200"/>
-            <a:ext cx="8229600" cy="4967700"/>
+            <a:ext cx="8229600" cy="1143000"/>
           </a:xfrm>
           <a:prstGeom prst="rect">
             <a:avLst/>
@@ -9395,31 +12514,367 @@
             </a:pPr>
             <a:r>
               <a:rPr lang="en"/>
-              <a:t>The raw training set was </a:t>
+              <a:t>An </a:t>
             </a:r>
             <a:r>
               <a:rPr b="1" lang="en">
                 <a:solidFill>
-                  <a:srgbClr val="A31515"/>
+                  <a:srgbClr val="002B5B"/>
                 </a:solidFill>
               </a:rPr>
-              <a:t>45TB</a:t>
+              <a:t>embedding</a:t>
             </a:r>
             <a:r>
               <a:rPr lang="en"/>
-              <a:t> of </a:t>
+              <a:t> is just a </a:t>
             </a:r>
             <a:r>
               <a:rPr b="1" lang="en">
                 <a:solidFill>
-                  <a:srgbClr val="DCB439"/>
-                </a:solidFill>
+                  <a:srgbClr val="5AABBC"/>
+                </a:solidFill>
+                <a:latin typeface="Consolas"/>
+                <a:ea typeface="Consolas"/>
+                <a:cs typeface="Consolas"/>
+                <a:sym typeface="Consolas"/>
               </a:rPr>
-              <a:t>compressed plaintext</a:t>
+              <a:t>vector</a:t>
+            </a:r>
+            <a:r>
+              <a:rPr lang="en"/>
+              <a:t> of small numbers that represent our words:</a:t>
+            </a:r>
+            <a:endParaRPr/>
+          </a:p>
+        </p:txBody>
+      </p:sp>
+      <p:sp>
+        <p:nvSpPr>
+          <p:cNvPr id="102" name="Google Shape;102;g3bca1707a95_0_209"/>
+          <p:cNvSpPr/>
+          <p:nvPr/>
+        </p:nvSpPr>
+        <p:spPr>
+          <a:xfrm>
+            <a:off x="3643350" y="2743188"/>
+            <a:ext cx="1857300" cy="600600"/>
+          </a:xfrm>
+          <a:prstGeom prst="roundRect">
+            <a:avLst>
+              <a:gd fmla="val 16667" name="adj"/>
+            </a:avLst>
+          </a:prstGeom>
+          <a:solidFill>
+            <a:srgbClr val="95DCFF"/>
+          </a:solidFill>
+          <a:ln cap="flat" cmpd="sng" w="19050">
+            <a:solidFill>
+              <a:srgbClr val="000000"/>
+            </a:solidFill>
+            <a:prstDash val="solid"/>
+            <a:round/>
+            <a:headEnd len="sm" w="sm" type="none"/>
+            <a:tailEnd len="sm" w="sm" type="none"/>
+          </a:ln>
+        </p:spPr>
+        <p:txBody>
+          <a:bodyPr anchorCtr="0" anchor="ctr" bIns="91425" lIns="91425" spcFirstLastPara="1" rIns="91425" wrap="square" tIns="91425">
+            <a:noAutofit/>
+          </a:bodyPr>
+          <a:lstStyle/>
+          <a:p>
+            <a:pPr indent="0" lvl="0" marL="0" rtl="0" algn="ctr">
+              <a:spcBef>
+                <a:spcPts val="0"/>
+              </a:spcBef>
+              <a:spcAft>
+                <a:spcPts val="0"/>
+              </a:spcAft>
+              <a:buNone/>
+            </a:pPr>
+            <a:r>
+              <a:rPr lang="en"/>
+              <a:t>Prompt: “dirty”</a:t>
+            </a:r>
+            <a:endParaRPr/>
+          </a:p>
+        </p:txBody>
+      </p:sp>
+      <p:sp>
+        <p:nvSpPr>
+          <p:cNvPr id="103" name="Google Shape;103;g3bca1707a95_0_209"/>
+          <p:cNvSpPr/>
+          <p:nvPr/>
+        </p:nvSpPr>
+        <p:spPr>
+          <a:xfrm>
+            <a:off x="3643350" y="3623300"/>
+            <a:ext cx="1857300" cy="600600"/>
+          </a:xfrm>
+          <a:prstGeom prst="roundRect">
+            <a:avLst>
+              <a:gd fmla="val 16667" name="adj"/>
+            </a:avLst>
+          </a:prstGeom>
+          <a:solidFill>
+            <a:srgbClr val="FFF995"/>
+          </a:solidFill>
+          <a:ln cap="flat" cmpd="sng" w="19050">
+            <a:solidFill>
+              <a:srgbClr val="000000"/>
+            </a:solidFill>
+            <a:prstDash val="solid"/>
+            <a:round/>
+            <a:headEnd len="sm" w="sm" type="none"/>
+            <a:tailEnd len="sm" w="sm" type="none"/>
+          </a:ln>
+        </p:spPr>
+        <p:txBody>
+          <a:bodyPr anchorCtr="0" anchor="ctr" bIns="91425" lIns="91425" spcFirstLastPara="1" rIns="91425" wrap="square" tIns="91425">
+            <a:noAutofit/>
+          </a:bodyPr>
+          <a:lstStyle/>
+          <a:p>
+            <a:pPr indent="0" lvl="0" marL="0" rtl="0" algn="ctr">
+              <a:spcBef>
+                <a:spcPts val="0"/>
+              </a:spcBef>
+              <a:spcAft>
+                <a:spcPts val="0"/>
+              </a:spcAft>
+              <a:buNone/>
+            </a:pPr>
+            <a:r>
+              <a:t/>
+            </a:r>
+            <a:endParaRPr/>
+          </a:p>
+          <a:p>
+            <a:pPr indent="0" lvl="0" marL="0" rtl="0" algn="ctr">
+              <a:spcBef>
+                <a:spcPts val="0"/>
+              </a:spcBef>
+              <a:spcAft>
+                <a:spcPts val="0"/>
+              </a:spcAft>
+              <a:buNone/>
+            </a:pPr>
+            <a:r>
+              <a:rPr lang="en"/>
+              <a:t>Token: 119594 </a:t>
+            </a:r>
+            <a:endParaRPr/>
+          </a:p>
+          <a:p>
+            <a:pPr indent="0" lvl="0" marL="0" rtl="0" algn="ctr">
+              <a:spcBef>
+                <a:spcPts val="0"/>
+              </a:spcBef>
+              <a:spcAft>
+                <a:spcPts val="0"/>
+              </a:spcAft>
+              <a:buNone/>
+            </a:pPr>
+            <a:r>
+              <a:t/>
+            </a:r>
+            <a:endParaRPr/>
+          </a:p>
+        </p:txBody>
+      </p:sp>
+      <p:sp>
+        <p:nvSpPr>
+          <p:cNvPr id="104" name="Google Shape;104;g3bca1707a95_0_209"/>
+          <p:cNvSpPr/>
+          <p:nvPr/>
+        </p:nvSpPr>
+        <p:spPr>
+          <a:xfrm>
+            <a:off x="1699050" y="4503400"/>
+            <a:ext cx="5745900" cy="952500"/>
+          </a:xfrm>
+          <a:prstGeom prst="roundRect">
+            <a:avLst>
+              <a:gd fmla="val 16667" name="adj"/>
+            </a:avLst>
+          </a:prstGeom>
+          <a:solidFill>
+            <a:srgbClr val="ABFF95"/>
+          </a:solidFill>
+          <a:ln cap="flat" cmpd="sng" w="19050">
+            <a:solidFill>
+              <a:srgbClr val="000000"/>
+            </a:solidFill>
+            <a:prstDash val="solid"/>
+            <a:round/>
+            <a:headEnd len="sm" w="sm" type="none"/>
+            <a:tailEnd len="sm" w="sm" type="none"/>
+          </a:ln>
+        </p:spPr>
+        <p:txBody>
+          <a:bodyPr anchorCtr="0" anchor="ctr" bIns="91425" lIns="91425" spcFirstLastPara="1" rIns="91425" wrap="square" tIns="91425">
+            <a:noAutofit/>
+          </a:bodyPr>
+          <a:lstStyle/>
+          <a:p>
+            <a:pPr indent="0" lvl="0" marL="0" rtl="0" algn="ctr">
+              <a:spcBef>
+                <a:spcPts val="0"/>
+              </a:spcBef>
+              <a:spcAft>
+                <a:spcPts val="0"/>
+              </a:spcAft>
+              <a:buNone/>
+            </a:pPr>
+            <a:r>
+              <a:rPr lang="en"/>
+              <a:t>Embedding: </a:t>
+            </a:r>
+            <a:endParaRPr/>
+          </a:p>
+          <a:p>
+            <a:pPr indent="0" lvl="0" marL="0" rtl="0" algn="ctr">
+              <a:spcBef>
+                <a:spcPts val="0"/>
+              </a:spcBef>
+              <a:spcAft>
+                <a:spcPts val="0"/>
+              </a:spcAft>
+              <a:buNone/>
+            </a:pPr>
+            <a:r>
+              <a:rPr lang="en">
+                <a:solidFill>
+                  <a:schemeClr val="dk1"/>
+                </a:solidFill>
+              </a:rPr>
+              <a:t>tensor([[-0.0685, -0.2527,  0.0342,  ..., -0.0179, -0.0024,  0.0214]])</a:t>
+            </a:r>
+            <a:r>
+              <a:rPr lang="en"/>
+              <a:t> </a:t>
+            </a:r>
+            <a:endParaRPr/>
+          </a:p>
+        </p:txBody>
+      </p:sp>
+      <p:cxnSp>
+        <p:nvCxnSpPr>
+          <p:cNvPr id="105" name="Google Shape;105;g3bca1707a95_0_209"/>
+          <p:cNvCxnSpPr>
+            <a:stCxn id="102" idx="2"/>
+            <a:endCxn id="103" idx="0"/>
+          </p:cNvCxnSpPr>
+          <p:nvPr/>
+        </p:nvCxnSpPr>
+        <p:spPr>
+          <a:xfrm>
+            <a:off x="4572000" y="3343788"/>
+            <a:ext cx="0" cy="279600"/>
+          </a:xfrm>
+          <a:prstGeom prst="straightConnector1">
+            <a:avLst/>
+          </a:prstGeom>
+          <a:noFill/>
+          <a:ln cap="flat" cmpd="sng" w="19050">
+            <a:solidFill>
+              <a:srgbClr val="002B5B"/>
+            </a:solidFill>
+            <a:prstDash val="solid"/>
+            <a:round/>
+            <a:headEnd len="med" w="med" type="none"/>
+            <a:tailEnd len="med" w="med" type="triangle"/>
+          </a:ln>
+        </p:spPr>
+      </p:cxnSp>
+      <p:cxnSp>
+        <p:nvCxnSpPr>
+          <p:cNvPr id="106" name="Google Shape;106;g3bca1707a95_0_209"/>
+          <p:cNvCxnSpPr>
+            <a:stCxn id="103" idx="2"/>
+            <a:endCxn id="104" idx="0"/>
+          </p:cNvCxnSpPr>
+          <p:nvPr/>
+        </p:nvCxnSpPr>
+        <p:spPr>
+          <a:xfrm>
+            <a:off x="4572000" y="4223900"/>
+            <a:ext cx="0" cy="279600"/>
+          </a:xfrm>
+          <a:prstGeom prst="straightConnector1">
+            <a:avLst/>
+          </a:prstGeom>
+          <a:noFill/>
+          <a:ln cap="flat" cmpd="sng" w="19050">
+            <a:solidFill>
+              <a:srgbClr val="002B5B"/>
+            </a:solidFill>
+            <a:prstDash val="solid"/>
+            <a:round/>
+            <a:headEnd len="med" w="med" type="none"/>
+            <a:tailEnd len="med" w="med" type="triangle"/>
+          </a:ln>
+        </p:spPr>
+      </p:cxnSp>
+      <p:sp>
+        <p:nvSpPr>
+          <p:cNvPr id="107" name="Google Shape;107;g3bca1707a95_0_209"/>
+          <p:cNvSpPr txBox="1"/>
+          <p:nvPr>
+            <p:ph idx="1" type="body"/>
+          </p:nvPr>
+        </p:nvSpPr>
+        <p:spPr>
+          <a:xfrm>
+            <a:off x="457200" y="5549550"/>
+            <a:ext cx="8229600" cy="1143000"/>
+          </a:xfrm>
+          <a:prstGeom prst="rect">
+            <a:avLst/>
+          </a:prstGeom>
+        </p:spPr>
+        <p:txBody>
+          <a:bodyPr anchorCtr="0" anchor="t" bIns="91425" lIns="91425" spcFirstLastPara="1" rIns="91425" wrap="square" tIns="91425">
+            <a:noAutofit/>
+          </a:bodyPr>
+          <a:lstStyle/>
+          <a:p>
+            <a:pPr indent="0" lvl="0" marL="0" rtl="0" algn="l">
+              <a:spcBef>
+                <a:spcPts val="600"/>
+              </a:spcBef>
+              <a:spcAft>
+                <a:spcPts val="0"/>
+              </a:spcAft>
+              <a:buNone/>
+            </a:pPr>
+            <a:r>
+              <a:rPr lang="en"/>
+              <a:t>When we type a prompt into a model we first convert it to </a:t>
+            </a:r>
+            <a:r>
+              <a:rPr b="1" lang="en">
+                <a:solidFill>
+                  <a:srgbClr val="002B5B"/>
+                </a:solidFill>
+              </a:rPr>
+              <a:t>tokens</a:t>
+            </a:r>
+            <a:r>
+              <a:rPr lang="en"/>
+              <a:t> and then </a:t>
+            </a:r>
+            <a:r>
+              <a:rPr b="1" lang="en">
+                <a:solidFill>
+                  <a:srgbClr val="002B5B"/>
+                </a:solidFill>
+              </a:rPr>
+              <a:t>embeddings</a:t>
             </a:r>
             <a:endParaRPr b="1">
               <a:solidFill>
-                <a:srgbClr val="DCB439"/>
+                <a:srgbClr val="002B5B"/>
               </a:solidFill>
             </a:endParaRPr>
           </a:p>
@@ -9438,7 +12893,7 @@
   <p:cSld>
     <p:spTree>
       <p:nvGrpSpPr>
-        <p:cNvPr id="74" name="Shape 74"/>
+        <p:cNvPr id="111" name="Shape 111"/>
         <p:cNvGrpSpPr/>
         <p:nvPr/>
       </p:nvGrpSpPr>
@@ -9452,7 +12907,7 @@
       </p:grpSpPr>
       <p:sp>
         <p:nvSpPr>
-          <p:cNvPr id="75" name="Google Shape;75;g3bc35b5116e_0_107"/>
+          <p:cNvPr id="112" name="Google Shape;112;g3bc35b5116e_0_90"/>
           <p:cNvSpPr txBox="1"/>
           <p:nvPr>
             <p:ph type="title"/>
@@ -9492,15 +12947,42 @@
             </a:pPr>
             <a:r>
               <a:rPr lang="en"/>
-              <a:t>Predicting the Next Token: Markov</a:t>
+              <a:t>Space - Embeddings</a:t>
             </a:r>
             <a:endParaRPr/>
           </a:p>
         </p:txBody>
       </p:sp>
+      <p:pic>
+        <p:nvPicPr>
+          <p:cNvPr id="113" name="Google Shape;113;g3bc35b5116e_0_90"/>
+          <p:cNvPicPr preferRelativeResize="0"/>
+          <p:nvPr/>
+        </p:nvPicPr>
+        <p:blipFill rotWithShape="1">
+          <a:blip r:embed="rId3">
+            <a:alphaModFix/>
+          </a:blip>
+          <a:srcRect b="0" l="0" r="0" t="0"/>
+          <a:stretch/>
+        </p:blipFill>
+        <p:spPr>
+          <a:xfrm>
+            <a:off x="152400" y="1417638"/>
+            <a:ext cx="8839204" cy="3034160"/>
+          </a:xfrm>
+          <a:prstGeom prst="rect">
+            <a:avLst/>
+          </a:prstGeom>
+          <a:noFill/>
+          <a:ln>
+            <a:noFill/>
+          </a:ln>
+        </p:spPr>
+      </p:pic>
       <p:sp>
         <p:nvSpPr>
-          <p:cNvPr id="76" name="Google Shape;76;g3bc35b5116e_0_107"/>
+          <p:cNvPr id="114" name="Google Shape;114;g3bc35b5116e_0_90"/>
           <p:cNvSpPr txBox="1"/>
           <p:nvPr>
             <p:ph idx="1" type="body"/>
@@ -9508,16 +12990,12 @@
         </p:nvSpPr>
         <p:spPr>
           <a:xfrm>
-            <a:off x="457200" y="1600200"/>
-            <a:ext cx="8229600" cy="4967700"/>
+            <a:off x="457200" y="4534650"/>
+            <a:ext cx="8229600" cy="2184600"/>
           </a:xfrm>
           <a:prstGeom prst="rect">
             <a:avLst/>
           </a:prstGeom>
-          <a:noFill/>
-          <a:ln>
-            <a:noFill/>
-          </a:ln>
         </p:spPr>
         <p:txBody>
           <a:bodyPr anchorCtr="0" anchor="t" bIns="91425" lIns="91425" spcFirstLastPara="1" rIns="91425" wrap="square" tIns="91425">
@@ -9526,23 +13004,59 @@
           <a:lstStyle/>
           <a:p>
             <a:pPr indent="0" lvl="0" marL="0" rtl="0" algn="l">
-              <a:lnSpc>
-                <a:spcPct val="100000"/>
-              </a:lnSpc>
               <a:spcBef>
                 <a:spcPts val="600"/>
               </a:spcBef>
               <a:spcAft>
                 <a:spcPts val="0"/>
               </a:spcAft>
-              <a:buSzPts val="3000"/>
               <a:buNone/>
             </a:pPr>
             <a:r>
               <a:rPr lang="en"/>
-              <a:t>Prompt: “I like cute and fuzzy”</a:t>
-            </a:r>
-            <a:endParaRPr/>
+              <a:t>Converting </a:t>
+            </a:r>
+            <a:r>
+              <a:rPr b="1" lang="en">
+                <a:solidFill>
+                  <a:srgbClr val="002B5B"/>
+                </a:solidFill>
+              </a:rPr>
+              <a:t>tokens</a:t>
+            </a:r>
+            <a:r>
+              <a:rPr lang="en"/>
+              <a:t> to </a:t>
+            </a:r>
+            <a:r>
+              <a:rPr b="1" lang="en">
+                <a:solidFill>
+                  <a:srgbClr val="002B5B"/>
+                </a:solidFill>
+              </a:rPr>
+              <a:t>embeddings</a:t>
+            </a:r>
+            <a:r>
+              <a:rPr lang="en"/>
+              <a:t> allows us to </a:t>
+            </a:r>
+            <a:r>
+              <a:rPr b="1" lang="en">
+                <a:solidFill>
+                  <a:srgbClr val="DCB439"/>
+                </a:solidFill>
+              </a:rPr>
+              <a:t>interpret them as points in high dimensional space</a:t>
+            </a:r>
+            <a:r>
+              <a:rPr lang="en"/>
+              <a:t>, which then allows us to compare them against each other!</a:t>
+            </a:r>
+            <a:endParaRPr b="1">
+              <a:solidFill>
+                <a:srgbClr val="002B5B"/>
+              </a:solidFill>
+            </a:endParaRPr>
           </a:p>
         </p:txBody>
       </p:sp>
@@ -9559,7 +13073,7 @@
   <p:cSld>
     <p:spTree>
       <p:nvGrpSpPr>
-        <p:cNvPr id="80" name="Shape 80"/>
+        <p:cNvPr id="118" name="Shape 118"/>
         <p:cNvGrpSpPr/>
         <p:nvPr/>
       </p:nvGrpSpPr>
@@ -9573,7 +13087,7 @@
       </p:grpSpPr>
       <p:sp>
         <p:nvSpPr>
-          <p:cNvPr id="81" name="Google Shape;81;g3bc426a098a_0_10"/>
+          <p:cNvPr id="119" name="Google Shape;119;g3bca1707a95_0_35"/>
           <p:cNvSpPr txBox="1"/>
           <p:nvPr>
             <p:ph type="title"/>
@@ -9587,10 +13101,6 @@
           <a:prstGeom prst="rect">
             <a:avLst/>
           </a:prstGeom>
-          <a:noFill/>
-          <a:ln>
-            <a:noFill/>
-          </a:ln>
         </p:spPr>
         <p:txBody>
           <a:bodyPr anchorCtr="0" anchor="b" bIns="91425" lIns="91425" spcFirstLastPara="1" rIns="91425" wrap="square" tIns="91425">
@@ -9599,38 +13109,60 @@
           <a:lstStyle/>
           <a:p>
             <a:pPr indent="0" lvl="0" marL="0" rtl="0" algn="l">
-              <a:lnSpc>
-                <a:spcPct val="100000"/>
-              </a:lnSpc>
-              <a:spcBef>
-                <a:spcPts val="0"/>
-              </a:spcBef>
-              <a:spcAft>
-                <a:spcPts val="0"/>
-              </a:spcAft>
-              <a:buSzPts val="3600"/>
+              <a:spcBef>
+                <a:spcPts val="0"/>
+              </a:spcBef>
+              <a:spcAft>
+                <a:spcPts val="0"/>
+              </a:spcAft>
               <a:buNone/>
             </a:pPr>
             <a:r>
               <a:rPr lang="en"/>
-              <a:t>Predicting the Next Token: Markov</a:t>
+              <a:t>Embeddings</a:t>
             </a:r>
             <a:endParaRPr/>
           </a:p>
         </p:txBody>
       </p:sp>
+      <p:pic>
+        <p:nvPicPr>
+          <p:cNvPr id="120" name="Google Shape;120;g3bca1707a95_0_35"/>
+          <p:cNvPicPr preferRelativeResize="0"/>
+          <p:nvPr/>
+        </p:nvPicPr>
+        <p:blipFill>
+          <a:blip r:embed="rId3">
+            <a:alphaModFix/>
+          </a:blip>
+          <a:stretch>
+            <a:fillRect/>
+          </a:stretch>
+        </p:blipFill>
+        <p:spPr>
+          <a:xfrm>
+            <a:off x="338125" y="1476000"/>
+            <a:ext cx="8467725" cy="3714750"/>
+          </a:xfrm>
+          <a:prstGeom prst="rect">
+            <a:avLst/>
+          </a:prstGeom>
+          <a:noFill/>
+          <a:ln>
+            <a:noFill/>
+          </a:ln>
+        </p:spPr>
+      </p:pic>
       <p:sp>
         <p:nvSpPr>
-          <p:cNvPr id="82" name="Google Shape;82;g3bc426a098a_0_10"/>
+          <p:cNvPr id="121" name="Google Shape;121;g3bca1707a95_0_35"/>
           <p:cNvSpPr txBox="1"/>
-          <p:nvPr>
-            <p:ph idx="1" type="body"/>
-          </p:nvPr>
+          <p:nvPr/>
         </p:nvSpPr>
         <p:spPr>
           <a:xfrm>
-            <a:off x="457200" y="1600200"/>
-            <a:ext cx="8229600" cy="4967700"/>
+            <a:off x="457200" y="5249100"/>
+            <a:ext cx="8229600" cy="1408200"/>
           </a:xfrm>
           <a:prstGeom prst="rect">
             <a:avLst/>
@@ -9647,23 +13179,43 @@
           <a:lstStyle/>
           <a:p>
             <a:pPr indent="0" lvl="0" marL="0" rtl="0" algn="l">
-              <a:lnSpc>
-                <a:spcPct val="100000"/>
-              </a:lnSpc>
-              <a:spcBef>
-                <a:spcPts val="600"/>
-              </a:spcBef>
-              <a:spcAft>
-                <a:spcPts val="0"/>
-              </a:spcAft>
-              <a:buSzPts val="3000"/>
+              <a:spcBef>
+                <a:spcPts val="0"/>
+              </a:spcBef>
+              <a:spcAft>
+                <a:spcPts val="0"/>
+              </a:spcAft>
               <a:buNone/>
             </a:pPr>
             <a:r>
-              <a:rPr lang="en"/>
-              <a:t>Prompt: “I like cute and fuzzy”</a:t>
-            </a:r>
-            <a:endParaRPr/>
+              <a:rPr lang="en" sz="3000">
+                <a:solidFill>
+                  <a:schemeClr val="dk1"/>
+                </a:solidFill>
+              </a:rPr>
+              <a:t>This allows us to find words that are related to each other. </a:t>
+            </a:r>
+            <a:r>
+              <a:rPr b="1" lang="en" sz="3000">
+                <a:solidFill>
+                  <a:srgbClr val="A31415"/>
+                </a:solidFill>
+              </a:rPr>
+              <a:t>Remember that related is only based on co-</a:t>
+            </a:r>
+            <a:r>
+              <a:rPr b="1" lang="en" sz="3000">
+                <a:solidFill>
+                  <a:srgbClr val="A31415"/>
+                </a:solidFill>
+              </a:rPr>
+              <a:t>occurrences!!</a:t>
+            </a:r>
+            <a:endParaRPr b="1" sz="3000">
+              <a:solidFill>
+                <a:srgbClr val="A31415"/>
+              </a:solidFill>
+            </a:endParaRPr>
           </a:p>
         </p:txBody>
       </p:sp>
@@ -9680,7 +13232,7 @@
   <p:cSld>
     <p:spTree>
       <p:nvGrpSpPr>
-        <p:cNvPr id="86" name="Shape 86"/>
+        <p:cNvPr id="125" name="Shape 125"/>
         <p:cNvGrpSpPr/>
         <p:nvPr/>
       </p:nvGrpSpPr>
@@ -9694,7 +13246,109 @@
       </p:grpSpPr>
       <p:sp>
         <p:nvSpPr>
-          <p:cNvPr id="87" name="Google Shape;87;g3bc426a098a_0_0"/>
+          <p:cNvPr id="126" name="Google Shape;126;g3bca1707a95_0_62"/>
+          <p:cNvSpPr/>
+          <p:nvPr/>
+        </p:nvSpPr>
+        <p:spPr>
+          <a:xfrm>
+            <a:off x="321750" y="2444850"/>
+            <a:ext cx="6946800" cy="952500"/>
+          </a:xfrm>
+          <a:prstGeom prst="roundRect">
+            <a:avLst>
+              <a:gd fmla="val 16667" name="adj"/>
+            </a:avLst>
+          </a:prstGeom>
+          <a:solidFill>
+            <a:srgbClr val="ABFF95"/>
+          </a:solidFill>
+          <a:ln cap="flat" cmpd="sng" w="19050">
+            <a:solidFill>
+              <a:srgbClr val="000000"/>
+            </a:solidFill>
+            <a:prstDash val="solid"/>
+            <a:round/>
+            <a:headEnd len="sm" w="sm" type="none"/>
+            <a:tailEnd len="sm" w="sm" type="none"/>
+          </a:ln>
+        </p:spPr>
+        <p:txBody>
+          <a:bodyPr anchorCtr="0" anchor="ctr" bIns="91425" lIns="91425" spcFirstLastPara="1" rIns="91425" wrap="square" tIns="91425">
+            <a:noAutofit/>
+          </a:bodyPr>
+          <a:lstStyle/>
+          <a:p>
+            <a:pPr indent="0" lvl="0" marL="0" rtl="0" algn="ctr">
+              <a:spcBef>
+                <a:spcPts val="0"/>
+              </a:spcBef>
+              <a:spcAft>
+                <a:spcPts val="0"/>
+              </a:spcAft>
+              <a:buNone/>
+            </a:pPr>
+            <a:r>
+              <a:t/>
+            </a:r>
+            <a:endParaRPr/>
+          </a:p>
+        </p:txBody>
+      </p:sp>
+      <p:sp>
+        <p:nvSpPr>
+          <p:cNvPr id="127" name="Google Shape;127;g3bca1707a95_0_62"/>
+          <p:cNvSpPr/>
+          <p:nvPr/>
+        </p:nvSpPr>
+        <p:spPr>
+          <a:xfrm>
+            <a:off x="7491600" y="2547697"/>
+            <a:ext cx="1195200" cy="747000"/>
+          </a:xfrm>
+          <a:prstGeom prst="roundRect">
+            <a:avLst>
+              <a:gd fmla="val 16667" name="adj"/>
+            </a:avLst>
+          </a:prstGeom>
+          <a:solidFill>
+            <a:srgbClr val="95DCFF"/>
+          </a:solidFill>
+          <a:ln cap="flat" cmpd="sng" w="19050">
+            <a:solidFill>
+              <a:srgbClr val="000000"/>
+            </a:solidFill>
+            <a:prstDash val="solid"/>
+            <a:round/>
+            <a:headEnd len="sm" w="sm" type="none"/>
+            <a:tailEnd len="sm" w="sm" type="none"/>
+          </a:ln>
+        </p:spPr>
+        <p:txBody>
+          <a:bodyPr anchorCtr="0" anchor="ctr" bIns="91425" lIns="91425" spcFirstLastPara="1" rIns="91425" wrap="square" tIns="91425">
+            <a:noAutofit/>
+          </a:bodyPr>
+          <a:lstStyle/>
+          <a:p>
+            <a:pPr indent="0" lvl="0" marL="0" rtl="0" algn="ctr">
+              <a:spcBef>
+                <a:spcPts val="0"/>
+              </a:spcBef>
+              <a:spcAft>
+                <a:spcPts val="0"/>
+              </a:spcAft>
+              <a:buNone/>
+            </a:pPr>
+            <a:r>
+              <a:t/>
+            </a:r>
+            <a:endParaRPr/>
+          </a:p>
+        </p:txBody>
+      </p:sp>
+      <p:sp>
+        <p:nvSpPr>
+          <p:cNvPr id="128" name="Google Shape;128;g3bca1707a95_0_62"/>
           <p:cNvSpPr txBox="1"/>
           <p:nvPr>
             <p:ph type="title"/>
@@ -9734,7 +13388,75 @@
             </a:pPr>
             <a:r>
               <a:rPr lang="en"/>
-              <a:t>Predicting the Next Token: LLM</a:t>
+              <a:t>Predicting the Next Token: </a:t>
+            </a:r>
+            <a:r>
+              <a:rPr lang="en">
+                <a:solidFill>
+                  <a:srgbClr val="5AABBC"/>
+                </a:solidFill>
+                <a:latin typeface="Consolas"/>
+                <a:ea typeface="Consolas"/>
+                <a:cs typeface="Consolas"/>
+                <a:sym typeface="Consolas"/>
+              </a:rPr>
+              <a:t>SLM</a:t>
+            </a:r>
+            <a:endParaRPr>
+              <a:solidFill>
+                <a:srgbClr val="5AABBC"/>
+              </a:solidFill>
+              <a:latin typeface="Consolas"/>
+              <a:ea typeface="Consolas"/>
+              <a:cs typeface="Consolas"/>
+              <a:sym typeface="Consolas"/>
+            </a:endParaRPr>
+          </a:p>
+        </p:txBody>
+      </p:sp>
+      <p:sp>
+        <p:nvSpPr>
+          <p:cNvPr id="129" name="Google Shape;129;g3bca1707a95_0_62"/>
+          <p:cNvSpPr txBox="1"/>
+          <p:nvPr>
+            <p:ph idx="1" type="body"/>
+          </p:nvPr>
+        </p:nvSpPr>
+        <p:spPr>
+          <a:xfrm>
+            <a:off x="457200" y="1600200"/>
+            <a:ext cx="8229600" cy="662100"/>
+          </a:xfrm>
+          <a:prstGeom prst="rect">
+            <a:avLst/>
+          </a:prstGeom>
+          <a:noFill/>
+          <a:ln>
+            <a:noFill/>
+          </a:ln>
+        </p:spPr>
+        <p:txBody>
+          <a:bodyPr anchorCtr="0" anchor="t" bIns="91425" lIns="91425" spcFirstLastPara="1" rIns="91425" wrap="square" tIns="91425">
+            <a:noAutofit/>
+          </a:bodyPr>
+          <a:lstStyle/>
+          <a:p>
+            <a:pPr indent="0" lvl="0" marL="0" rtl="0" algn="ctr">
+              <a:lnSpc>
+                <a:spcPct val="100000"/>
+              </a:lnSpc>
+              <a:spcBef>
+                <a:spcPts val="600"/>
+              </a:spcBef>
+              <a:spcAft>
+                <a:spcPts val="0"/>
+              </a:spcAft>
+              <a:buSzPts val="3000"/>
+              <a:buNone/>
+            </a:pPr>
+            <a:r>
+              <a:rPr lang="en"/>
+              <a:t>Prompt: “I like cute and fuzzy”</a:t>
             </a:r>
             <a:endParaRPr/>
           </a:p>
@@ -9742,51 +13464,637 @@
       </p:sp>
       <p:sp>
         <p:nvSpPr>
-          <p:cNvPr id="88" name="Google Shape;88;g3bc426a098a_0_0"/>
-          <p:cNvSpPr txBox="1"/>
-          <p:nvPr>
-            <p:ph idx="1" type="body"/>
-          </p:nvPr>
+          <p:cNvPr id="130" name="Google Shape;130;g3bca1707a95_0_62"/>
+          <p:cNvSpPr/>
+          <p:nvPr/>
         </p:nvSpPr>
         <p:spPr>
           <a:xfrm>
-            <a:off x="457200" y="1600200"/>
-            <a:ext cx="8229600" cy="4967700"/>
-          </a:xfrm>
-          <a:prstGeom prst="rect">
-            <a:avLst/>
+            <a:off x="436200" y="2650600"/>
+            <a:ext cx="970500" cy="541200"/>
+          </a:xfrm>
+          <a:prstGeom prst="roundRect">
+            <a:avLst>
+              <a:gd fmla="val 16667" name="adj"/>
+            </a:avLst>
           </a:prstGeom>
           <a:noFill/>
-          <a:ln>
-            <a:noFill/>
+          <a:ln cap="flat" cmpd="sng" w="38100">
+            <a:solidFill>
+              <a:srgbClr val="002B5B"/>
+            </a:solidFill>
+            <a:prstDash val="solid"/>
+            <a:round/>
+            <a:headEnd len="sm" w="sm" type="none"/>
+            <a:tailEnd len="sm" w="sm" type="none"/>
           </a:ln>
         </p:spPr>
         <p:txBody>
-          <a:bodyPr anchorCtr="0" anchor="t" bIns="91425" lIns="91425" spcFirstLastPara="1" rIns="91425" wrap="square" tIns="91425">
+          <a:bodyPr anchorCtr="0" anchor="ctr" bIns="91425" lIns="91425" spcFirstLastPara="1" rIns="91425" wrap="square" tIns="91425">
             <a:noAutofit/>
           </a:bodyPr>
           <a:lstStyle/>
           <a:p>
-            <a:pPr indent="0" lvl="0" marL="0" rtl="0" algn="l">
-              <a:lnSpc>
-                <a:spcPct val="100000"/>
-              </a:lnSpc>
-              <a:spcBef>
-                <a:spcPts val="600"/>
-              </a:spcBef>
-              <a:spcAft>
-                <a:spcPts val="0"/>
-              </a:spcAft>
-              <a:buSzPts val="3000"/>
+            <a:pPr indent="0" lvl="0" marL="0" rtl="0" algn="ctr">
+              <a:spcBef>
+                <a:spcPts val="0"/>
+              </a:spcBef>
+              <a:spcAft>
+                <a:spcPts val="0"/>
+              </a:spcAft>
               <a:buNone/>
             </a:pPr>
             <a:r>
-              <a:t/>
-            </a:r>
-            <a:endParaRPr/>
+              <a:rPr b="1" lang="en">
+                <a:solidFill>
+                  <a:srgbClr val="A31415"/>
+                </a:solidFill>
+                <a:latin typeface="Consolas"/>
+                <a:ea typeface="Consolas"/>
+                <a:cs typeface="Consolas"/>
+                <a:sym typeface="Consolas"/>
+              </a:rPr>
+              <a:t>&lt;|sos|&gt;</a:t>
+            </a:r>
+            <a:endParaRPr b="1">
+              <a:solidFill>
+                <a:srgbClr val="A31415"/>
+              </a:solidFill>
+              <a:latin typeface="Consolas"/>
+              <a:ea typeface="Consolas"/>
+              <a:cs typeface="Consolas"/>
+              <a:sym typeface="Consolas"/>
+            </a:endParaRPr>
           </a:p>
         </p:txBody>
       </p:sp>
+      <p:sp>
+        <p:nvSpPr>
+          <p:cNvPr id="131" name="Google Shape;131;g3bca1707a95_0_62"/>
+          <p:cNvSpPr/>
+          <p:nvPr/>
+        </p:nvSpPr>
+        <p:spPr>
+          <a:xfrm>
+            <a:off x="1592900" y="2650600"/>
+            <a:ext cx="970500" cy="541200"/>
+          </a:xfrm>
+          <a:prstGeom prst="roundRect">
+            <a:avLst>
+              <a:gd fmla="val 16667" name="adj"/>
+            </a:avLst>
+          </a:prstGeom>
+          <a:noFill/>
+          <a:ln cap="flat" cmpd="sng" w="38100">
+            <a:solidFill>
+              <a:srgbClr val="002B5B"/>
+            </a:solidFill>
+            <a:prstDash val="solid"/>
+            <a:round/>
+            <a:headEnd len="sm" w="sm" type="none"/>
+            <a:tailEnd len="sm" w="sm" type="none"/>
+          </a:ln>
+        </p:spPr>
+        <p:txBody>
+          <a:bodyPr anchorCtr="0" anchor="ctr" bIns="91425" lIns="91425" spcFirstLastPara="1" rIns="91425" wrap="square" tIns="91425">
+            <a:noAutofit/>
+          </a:bodyPr>
+          <a:lstStyle/>
+          <a:p>
+            <a:pPr indent="0" lvl="0" marL="0" rtl="0" algn="ctr">
+              <a:spcBef>
+                <a:spcPts val="0"/>
+              </a:spcBef>
+              <a:spcAft>
+                <a:spcPts val="0"/>
+              </a:spcAft>
+              <a:buNone/>
+            </a:pPr>
+            <a:r>
+              <a:rPr b="1" lang="en">
+                <a:solidFill>
+                  <a:srgbClr val="A31415"/>
+                </a:solidFill>
+                <a:latin typeface="Consolas"/>
+                <a:ea typeface="Consolas"/>
+                <a:cs typeface="Consolas"/>
+                <a:sym typeface="Consolas"/>
+              </a:rPr>
+              <a:t>I</a:t>
+            </a:r>
+            <a:endParaRPr b="1">
+              <a:solidFill>
+                <a:srgbClr val="A31415"/>
+              </a:solidFill>
+              <a:latin typeface="Consolas"/>
+              <a:ea typeface="Consolas"/>
+              <a:cs typeface="Consolas"/>
+              <a:sym typeface="Consolas"/>
+            </a:endParaRPr>
+          </a:p>
+        </p:txBody>
+      </p:sp>
+      <p:sp>
+        <p:nvSpPr>
+          <p:cNvPr id="132" name="Google Shape;132;g3bca1707a95_0_62"/>
+          <p:cNvSpPr/>
+          <p:nvPr/>
+        </p:nvSpPr>
+        <p:spPr>
+          <a:xfrm>
+            <a:off x="2749588" y="2650500"/>
+            <a:ext cx="970500" cy="541200"/>
+          </a:xfrm>
+          <a:prstGeom prst="roundRect">
+            <a:avLst>
+              <a:gd fmla="val 16667" name="adj"/>
+            </a:avLst>
+          </a:prstGeom>
+          <a:noFill/>
+          <a:ln cap="flat" cmpd="sng" w="38100">
+            <a:solidFill>
+              <a:srgbClr val="002B5B"/>
+            </a:solidFill>
+            <a:prstDash val="solid"/>
+            <a:round/>
+            <a:headEnd len="sm" w="sm" type="none"/>
+            <a:tailEnd len="sm" w="sm" type="none"/>
+          </a:ln>
+        </p:spPr>
+        <p:txBody>
+          <a:bodyPr anchorCtr="0" anchor="ctr" bIns="91425" lIns="91425" spcFirstLastPara="1" rIns="91425" wrap="square" tIns="91425">
+            <a:noAutofit/>
+          </a:bodyPr>
+          <a:lstStyle/>
+          <a:p>
+            <a:pPr indent="0" lvl="0" marL="0" rtl="0" algn="ctr">
+              <a:spcBef>
+                <a:spcPts val="0"/>
+              </a:spcBef>
+              <a:spcAft>
+                <a:spcPts val="0"/>
+              </a:spcAft>
+              <a:buNone/>
+            </a:pPr>
+            <a:r>
+              <a:rPr b="1" lang="en">
+                <a:solidFill>
+                  <a:srgbClr val="A31415"/>
+                </a:solidFill>
+                <a:latin typeface="Consolas"/>
+                <a:ea typeface="Consolas"/>
+                <a:cs typeface="Consolas"/>
+                <a:sym typeface="Consolas"/>
+              </a:rPr>
+              <a:t>like</a:t>
+            </a:r>
+            <a:endParaRPr b="1">
+              <a:solidFill>
+                <a:srgbClr val="A31415"/>
+              </a:solidFill>
+              <a:latin typeface="Consolas"/>
+              <a:ea typeface="Consolas"/>
+              <a:cs typeface="Consolas"/>
+              <a:sym typeface="Consolas"/>
+            </a:endParaRPr>
+          </a:p>
+        </p:txBody>
+      </p:sp>
+      <p:sp>
+        <p:nvSpPr>
+          <p:cNvPr id="133" name="Google Shape;133;g3bca1707a95_0_62"/>
+          <p:cNvSpPr/>
+          <p:nvPr/>
+        </p:nvSpPr>
+        <p:spPr>
+          <a:xfrm>
+            <a:off x="3906300" y="2650600"/>
+            <a:ext cx="970500" cy="541200"/>
+          </a:xfrm>
+          <a:prstGeom prst="roundRect">
+            <a:avLst>
+              <a:gd fmla="val 16667" name="adj"/>
+            </a:avLst>
+          </a:prstGeom>
+          <a:noFill/>
+          <a:ln cap="flat" cmpd="sng" w="38100">
+            <a:solidFill>
+              <a:srgbClr val="002B5B"/>
+            </a:solidFill>
+            <a:prstDash val="solid"/>
+            <a:round/>
+            <a:headEnd len="sm" w="sm" type="none"/>
+            <a:tailEnd len="sm" w="sm" type="none"/>
+          </a:ln>
+        </p:spPr>
+        <p:txBody>
+          <a:bodyPr anchorCtr="0" anchor="ctr" bIns="91425" lIns="91425" spcFirstLastPara="1" rIns="91425" wrap="square" tIns="91425">
+            <a:noAutofit/>
+          </a:bodyPr>
+          <a:lstStyle/>
+          <a:p>
+            <a:pPr indent="0" lvl="0" marL="0" rtl="0" algn="ctr">
+              <a:spcBef>
+                <a:spcPts val="0"/>
+              </a:spcBef>
+              <a:spcAft>
+                <a:spcPts val="0"/>
+              </a:spcAft>
+              <a:buNone/>
+            </a:pPr>
+            <a:r>
+              <a:rPr b="1" lang="en">
+                <a:solidFill>
+                  <a:srgbClr val="A31415"/>
+                </a:solidFill>
+                <a:latin typeface="Consolas"/>
+                <a:ea typeface="Consolas"/>
+                <a:cs typeface="Consolas"/>
+                <a:sym typeface="Consolas"/>
+              </a:rPr>
+              <a:t>cute</a:t>
+            </a:r>
+            <a:endParaRPr b="1">
+              <a:solidFill>
+                <a:srgbClr val="A31415"/>
+              </a:solidFill>
+              <a:latin typeface="Consolas"/>
+              <a:ea typeface="Consolas"/>
+              <a:cs typeface="Consolas"/>
+              <a:sym typeface="Consolas"/>
+            </a:endParaRPr>
+          </a:p>
+        </p:txBody>
+      </p:sp>
+      <p:sp>
+        <p:nvSpPr>
+          <p:cNvPr id="134" name="Google Shape;134;g3bca1707a95_0_62"/>
+          <p:cNvSpPr/>
+          <p:nvPr/>
+        </p:nvSpPr>
+        <p:spPr>
+          <a:xfrm>
+            <a:off x="5062988" y="2650488"/>
+            <a:ext cx="970500" cy="541200"/>
+          </a:xfrm>
+          <a:prstGeom prst="roundRect">
+            <a:avLst>
+              <a:gd fmla="val 16667" name="adj"/>
+            </a:avLst>
+          </a:prstGeom>
+          <a:noFill/>
+          <a:ln cap="flat" cmpd="sng" w="38100">
+            <a:solidFill>
+              <a:srgbClr val="002B5B"/>
+            </a:solidFill>
+            <a:prstDash val="solid"/>
+            <a:round/>
+            <a:headEnd len="sm" w="sm" type="none"/>
+            <a:tailEnd len="sm" w="sm" type="none"/>
+          </a:ln>
+        </p:spPr>
+        <p:txBody>
+          <a:bodyPr anchorCtr="0" anchor="ctr" bIns="91425" lIns="91425" spcFirstLastPara="1" rIns="91425" wrap="square" tIns="91425">
+            <a:noAutofit/>
+          </a:bodyPr>
+          <a:lstStyle/>
+          <a:p>
+            <a:pPr indent="0" lvl="0" marL="0" rtl="0" algn="ctr">
+              <a:spcBef>
+                <a:spcPts val="0"/>
+              </a:spcBef>
+              <a:spcAft>
+                <a:spcPts val="0"/>
+              </a:spcAft>
+              <a:buNone/>
+            </a:pPr>
+            <a:r>
+              <a:rPr b="1" lang="en">
+                <a:solidFill>
+                  <a:srgbClr val="A31415"/>
+                </a:solidFill>
+                <a:latin typeface="Consolas"/>
+                <a:ea typeface="Consolas"/>
+                <a:cs typeface="Consolas"/>
+                <a:sym typeface="Consolas"/>
+              </a:rPr>
+              <a:t>and</a:t>
+            </a:r>
+            <a:endParaRPr b="1">
+              <a:solidFill>
+                <a:srgbClr val="A31415"/>
+              </a:solidFill>
+              <a:latin typeface="Consolas"/>
+              <a:ea typeface="Consolas"/>
+              <a:cs typeface="Consolas"/>
+              <a:sym typeface="Consolas"/>
+            </a:endParaRPr>
+          </a:p>
+        </p:txBody>
+      </p:sp>
+      <p:sp>
+        <p:nvSpPr>
+          <p:cNvPr id="135" name="Google Shape;135;g3bca1707a95_0_62"/>
+          <p:cNvSpPr/>
+          <p:nvPr/>
+        </p:nvSpPr>
+        <p:spPr>
+          <a:xfrm>
+            <a:off x="6197013" y="2650550"/>
+            <a:ext cx="970500" cy="541200"/>
+          </a:xfrm>
+          <a:prstGeom prst="roundRect">
+            <a:avLst>
+              <a:gd fmla="val 16667" name="adj"/>
+            </a:avLst>
+          </a:prstGeom>
+          <a:noFill/>
+          <a:ln cap="flat" cmpd="sng" w="38100">
+            <a:solidFill>
+              <a:srgbClr val="002B5B"/>
+            </a:solidFill>
+            <a:prstDash val="solid"/>
+            <a:round/>
+            <a:headEnd len="sm" w="sm" type="none"/>
+            <a:tailEnd len="sm" w="sm" type="none"/>
+          </a:ln>
+        </p:spPr>
+        <p:txBody>
+          <a:bodyPr anchorCtr="0" anchor="ctr" bIns="91425" lIns="91425" spcFirstLastPara="1" rIns="91425" wrap="square" tIns="91425">
+            <a:noAutofit/>
+          </a:bodyPr>
+          <a:lstStyle/>
+          <a:p>
+            <a:pPr indent="0" lvl="0" marL="0" rtl="0" algn="ctr">
+              <a:spcBef>
+                <a:spcPts val="0"/>
+              </a:spcBef>
+              <a:spcAft>
+                <a:spcPts val="0"/>
+              </a:spcAft>
+              <a:buNone/>
+            </a:pPr>
+            <a:r>
+              <a:rPr b="1" lang="en">
+                <a:solidFill>
+                  <a:srgbClr val="A31415"/>
+                </a:solidFill>
+                <a:latin typeface="Consolas"/>
+                <a:ea typeface="Consolas"/>
+                <a:cs typeface="Consolas"/>
+                <a:sym typeface="Consolas"/>
+              </a:rPr>
+              <a:t>fuzzy</a:t>
+            </a:r>
+            <a:endParaRPr b="1">
+              <a:solidFill>
+                <a:srgbClr val="A31415"/>
+              </a:solidFill>
+              <a:latin typeface="Consolas"/>
+              <a:ea typeface="Consolas"/>
+              <a:cs typeface="Consolas"/>
+              <a:sym typeface="Consolas"/>
+            </a:endParaRPr>
+          </a:p>
+        </p:txBody>
+      </p:sp>
+      <p:sp>
+        <p:nvSpPr>
+          <p:cNvPr id="136" name="Google Shape;136;g3bca1707a95_0_62"/>
+          <p:cNvSpPr/>
+          <p:nvPr/>
+        </p:nvSpPr>
+        <p:spPr>
+          <a:xfrm>
+            <a:off x="7603938" y="2650550"/>
+            <a:ext cx="970500" cy="541200"/>
+          </a:xfrm>
+          <a:prstGeom prst="roundRect">
+            <a:avLst>
+              <a:gd fmla="val 16667" name="adj"/>
+            </a:avLst>
+          </a:prstGeom>
+          <a:noFill/>
+          <a:ln cap="flat" cmpd="sng" w="38100">
+            <a:solidFill>
+              <a:srgbClr val="002B5B"/>
+            </a:solidFill>
+            <a:prstDash val="solid"/>
+            <a:round/>
+            <a:headEnd len="sm" w="sm" type="none"/>
+            <a:tailEnd len="sm" w="sm" type="none"/>
+          </a:ln>
+        </p:spPr>
+        <p:txBody>
+          <a:bodyPr anchorCtr="0" anchor="ctr" bIns="91425" lIns="91425" spcFirstLastPara="1" rIns="91425" wrap="square" tIns="91425">
+            <a:noAutofit/>
+          </a:bodyPr>
+          <a:lstStyle/>
+          <a:p>
+            <a:pPr indent="0" lvl="0" marL="0" rtl="0" algn="ctr">
+              <a:spcBef>
+                <a:spcPts val="0"/>
+              </a:spcBef>
+              <a:spcAft>
+                <a:spcPts val="0"/>
+              </a:spcAft>
+              <a:buNone/>
+            </a:pPr>
+            <a:r>
+              <a:rPr b="1" lang="en">
+                <a:solidFill>
+                  <a:srgbClr val="A31415"/>
+                </a:solidFill>
+                <a:latin typeface="Consolas"/>
+                <a:ea typeface="Consolas"/>
+                <a:cs typeface="Consolas"/>
+                <a:sym typeface="Consolas"/>
+              </a:rPr>
+              <a:t>output</a:t>
+            </a:r>
+            <a:endParaRPr b="1">
+              <a:solidFill>
+                <a:srgbClr val="A31415"/>
+              </a:solidFill>
+              <a:latin typeface="Consolas"/>
+              <a:ea typeface="Consolas"/>
+              <a:cs typeface="Consolas"/>
+              <a:sym typeface="Consolas"/>
+            </a:endParaRPr>
+          </a:p>
+          <a:p>
+            <a:pPr indent="0" lvl="0" marL="0" rtl="0" algn="ctr">
+              <a:spcBef>
+                <a:spcPts val="0"/>
+              </a:spcBef>
+              <a:spcAft>
+                <a:spcPts val="0"/>
+              </a:spcAft>
+              <a:buNone/>
+            </a:pPr>
+            <a:r>
+              <a:rPr b="1" lang="en">
+                <a:solidFill>
+                  <a:srgbClr val="A31415"/>
+                </a:solidFill>
+                <a:latin typeface="Consolas"/>
+                <a:ea typeface="Consolas"/>
+                <a:cs typeface="Consolas"/>
+                <a:sym typeface="Consolas"/>
+              </a:rPr>
+              <a:t>vector</a:t>
+            </a:r>
+            <a:endParaRPr b="1">
+              <a:solidFill>
+                <a:srgbClr val="A31415"/>
+              </a:solidFill>
+              <a:latin typeface="Consolas"/>
+              <a:ea typeface="Consolas"/>
+              <a:cs typeface="Consolas"/>
+              <a:sym typeface="Consolas"/>
+            </a:endParaRPr>
+          </a:p>
+        </p:txBody>
+      </p:sp>
+      <p:cxnSp>
+        <p:nvCxnSpPr>
+          <p:cNvPr id="137" name="Google Shape;137;g3bca1707a95_0_62"/>
+          <p:cNvCxnSpPr>
+            <a:stCxn id="130" idx="3"/>
+            <a:endCxn id="131" idx="1"/>
+          </p:cNvCxnSpPr>
+          <p:nvPr/>
+        </p:nvCxnSpPr>
+        <p:spPr>
+          <a:xfrm>
+            <a:off x="1406700" y="2921200"/>
+            <a:ext cx="186300" cy="0"/>
+          </a:xfrm>
+          <a:prstGeom prst="straightConnector1">
+            <a:avLst/>
+          </a:prstGeom>
+          <a:noFill/>
+          <a:ln cap="flat" cmpd="sng" w="19050">
+            <a:solidFill>
+              <a:srgbClr val="002B5B"/>
+            </a:solidFill>
+            <a:prstDash val="solid"/>
+            <a:round/>
+            <a:headEnd len="med" w="med" type="none"/>
+            <a:tailEnd len="med" w="med" type="triangle"/>
+          </a:ln>
+        </p:spPr>
+      </p:cxnSp>
+      <p:cxnSp>
+        <p:nvCxnSpPr>
+          <p:cNvPr id="138" name="Google Shape;138;g3bca1707a95_0_62"/>
+          <p:cNvCxnSpPr>
+            <a:stCxn id="131" idx="3"/>
+            <a:endCxn id="132" idx="1"/>
+          </p:cNvCxnSpPr>
+          <p:nvPr/>
+        </p:nvCxnSpPr>
+        <p:spPr>
+          <a:xfrm>
+            <a:off x="2563400" y="2921200"/>
+            <a:ext cx="186300" cy="0"/>
+          </a:xfrm>
+          <a:prstGeom prst="straightConnector1">
+            <a:avLst/>
+          </a:prstGeom>
+          <a:noFill/>
+          <a:ln cap="flat" cmpd="sng" w="19050">
+            <a:solidFill>
+              <a:srgbClr val="002B5B"/>
+            </a:solidFill>
+            <a:prstDash val="solid"/>
+            <a:round/>
+            <a:headEnd len="med" w="med" type="none"/>
+            <a:tailEnd len="med" w="med" type="triangle"/>
+          </a:ln>
+        </p:spPr>
+      </p:cxnSp>
+      <p:cxnSp>
+        <p:nvCxnSpPr>
+          <p:cNvPr id="139" name="Google Shape;139;g3bca1707a95_0_62"/>
+          <p:cNvCxnSpPr>
+            <a:stCxn id="132" idx="3"/>
+            <a:endCxn id="133" idx="1"/>
+          </p:cNvCxnSpPr>
+          <p:nvPr/>
+        </p:nvCxnSpPr>
+        <p:spPr>
+          <a:xfrm>
+            <a:off x="3720088" y="2921100"/>
+            <a:ext cx="186300" cy="0"/>
+          </a:xfrm>
+          <a:prstGeom prst="straightConnector1">
+            <a:avLst/>
+          </a:prstGeom>
+          <a:noFill/>
+          <a:ln cap="flat" cmpd="sng" w="19050">
+            <a:solidFill>
+              <a:srgbClr val="002B5B"/>
+            </a:solidFill>
+            <a:prstDash val="solid"/>
+            <a:round/>
+            <a:headEnd len="med" w="med" type="none"/>
+            <a:tailEnd len="med" w="med" type="triangle"/>
+          </a:ln>
+        </p:spPr>
+      </p:cxnSp>
+      <p:cxnSp>
+        <p:nvCxnSpPr>
+          <p:cNvPr id="140" name="Google Shape;140;g3bca1707a95_0_62"/>
+          <p:cNvCxnSpPr/>
+          <p:nvPr/>
+        </p:nvCxnSpPr>
+        <p:spPr>
+          <a:xfrm>
+            <a:off x="4865400" y="2921200"/>
+            <a:ext cx="186300" cy="0"/>
+          </a:xfrm>
+          <a:prstGeom prst="straightConnector1">
+            <a:avLst/>
+          </a:prstGeom>
+          <a:noFill/>
+          <a:ln cap="flat" cmpd="sng" w="19050">
+            <a:solidFill>
+              <a:srgbClr val="002B5B"/>
+            </a:solidFill>
+            <a:prstDash val="solid"/>
+            <a:round/>
+            <a:headEnd len="med" w="med" type="none"/>
+            <a:tailEnd len="med" w="med" type="triangle"/>
+          </a:ln>
+        </p:spPr>
+      </p:cxnSp>
+      <p:cxnSp>
+        <p:nvCxnSpPr>
+          <p:cNvPr id="141" name="Google Shape;141;g3bca1707a95_0_62"/>
+          <p:cNvCxnSpPr/>
+          <p:nvPr/>
+        </p:nvCxnSpPr>
+        <p:spPr>
+          <a:xfrm>
+            <a:off x="6033500" y="2921200"/>
+            <a:ext cx="186300" cy="0"/>
+          </a:xfrm>
+          <a:prstGeom prst="straightConnector1">
+            <a:avLst/>
+          </a:prstGeom>
+          <a:noFill/>
+          <a:ln cap="flat" cmpd="sng" w="19050">
+            <a:solidFill>
+              <a:srgbClr val="002B5B"/>
+            </a:solidFill>
+            <a:prstDash val="solid"/>
+            <a:round/>
+            <a:headEnd len="med" w="med" type="none"/>
+            <a:tailEnd len="med" w="med" type="triangle"/>
+          </a:ln>
+        </p:spPr>
+      </p:cxnSp>
     </p:spTree>
   </p:cSld>
   <p:clrMapOvr>
@@ -9796,6 +14104,285 @@
 </file>
 
 <file path=ppt/theme/theme1.xml><?xml version="1.0" encoding="utf-8"?>
+<a:theme xmlns:a="http://schemas.openxmlformats.org/drawingml/2006/main" xmlns:r="http://schemas.openxmlformats.org/officeDocument/2006/relationships" name="PB Theme">
+  <a:themeElements>
+    <a:clrScheme name="Custom 347">
+      <a:dk1>
+        <a:srgbClr val="000000"/>
+      </a:dk1>
+      <a:lt1>
+        <a:srgbClr val="FFFFFF"/>
+      </a:lt1>
+      <a:dk2>
+        <a:srgbClr val="666666"/>
+      </a:dk2>
+      <a:lt2>
+        <a:srgbClr val="CCCCCC"/>
+      </a:lt2>
+      <a:accent1>
+        <a:srgbClr val="3A81BA"/>
+      </a:accent1>
+      <a:accent2>
+        <a:srgbClr val="D89F39"/>
+      </a:accent2>
+      <a:accent3>
+        <a:srgbClr val="8BAB42"/>
+      </a:accent3>
+      <a:accent4>
+        <a:srgbClr val="57A7B5"/>
+      </a:accent4>
+      <a:accent5>
+        <a:srgbClr val="8B81D2"/>
+      </a:accent5>
+      <a:accent6>
+        <a:srgbClr val="963334"/>
+      </a:accent6>
+      <a:hlink>
+        <a:srgbClr val="1155CC"/>
+      </a:hlink>
+      <a:folHlink>
+        <a:srgbClr val="6611CC"/>
+      </a:folHlink>
+    </a:clrScheme>
+    <a:fontScheme name="Office">
+      <a:majorFont>
+        <a:latin typeface="Arial"/>
+        <a:ea typeface=""/>
+        <a:cs typeface=""/>
+        <a:font script="Jpan" typeface="ＭＳ Ｐゴシック"/>
+        <a:font script="Hang" typeface="맑은 고딕"/>
+        <a:font script="Hans" typeface="宋体"/>
+        <a:font script="Hant" typeface="新細明體"/>
+        <a:font script="Arab" typeface="Times New Roman"/>
+        <a:font script="Hebr" typeface="Times New Roman"/>
+        <a:font script="Thai" typeface="Angsana New"/>
+        <a:font script="Ethi" typeface="Nyala"/>
+        <a:font script="Beng" typeface="Vrinda"/>
+        <a:font script="Gujr" typeface="Shruti"/>
+        <a:font script="Khmr" typeface="MoolBoran"/>
+        <a:font script="Knda" typeface="Tunga"/>
+        <a:font script="Guru" typeface="Raavi"/>
+        <a:font script="Cans" typeface="Euphemia"/>
+        <a:font script="Cher" typeface="Plantagenet Cherokee"/>
+        <a:font script="Yiii" typeface="Microsoft Yi Baiti"/>
+        <a:font script="Tibt" typeface="Microsoft Himalaya"/>
+        <a:font script="Thaa" typeface="MV Boli"/>
+        <a:font script="Deva" typeface="Mangal"/>
+        <a:font script="Telu" typeface="Gautami"/>
+        <a:font script="Taml" typeface="Latha"/>
+        <a:font script="Syrc" typeface="Estrangelo Edessa"/>
+        <a:font script="Orya" typeface="Kalinga"/>
+        <a:font script="Mlym" typeface="Kartika"/>
+        <a:font script="Laoo" typeface="DokChampa"/>
+        <a:font script="Sinh" typeface="Iskoola Pota"/>
+        <a:font script="Mong" typeface="Mongolian Baiti"/>
+        <a:font script="Viet" typeface="Times New Roman"/>
+        <a:font script="Uigh" typeface="Microsoft Uighur"/>
+        <a:font script="Geor" typeface="Sylfaen"/>
+      </a:majorFont>
+      <a:minorFont>
+        <a:latin typeface="Arial"/>
+        <a:ea typeface=""/>
+        <a:cs typeface=""/>
+        <a:font script="Jpan" typeface="ＭＳ Ｐゴシック"/>
+        <a:font script="Hang" typeface="맑은 고딕"/>
+        <a:font script="Hans" typeface="宋体"/>
+        <a:font script="Hant" typeface="新細明體"/>
+        <a:font script="Arab" typeface="Arial"/>
+        <a:font script="Hebr" typeface="Arial"/>
+        <a:font script="Thai" typeface="Cordia New"/>
+        <a:font script="Ethi" typeface="Nyala"/>
+        <a:font script="Beng" typeface="Vrinda"/>
+        <a:font script="Gujr" typeface="Shruti"/>
+        <a:font script="Khmr" typeface="DaunPenh"/>
+        <a:font script="Knda" typeface="Tunga"/>
+        <a:font script="Guru" typeface="Raavi"/>
+        <a:font script="Cans" typeface="Euphemia"/>
+        <a:font script="Cher" typeface="Plantagenet Cherokee"/>
+        <a:font script="Yiii" typeface="Microsoft Yi Baiti"/>
+        <a:font script="Tibt" typeface="Microsoft Himalaya"/>
+        <a:font script="Thaa" typeface="MV Boli"/>
+        <a:font script="Deva" typeface="Mangal"/>
+        <a:font script="Telu" typeface="Gautami"/>
+        <a:font script="Taml" typeface="Latha"/>
+        <a:font script="Syrc" typeface="Estrangelo Edessa"/>
+        <a:font script="Orya" typeface="Kalinga"/>
+        <a:font script="Mlym" typeface="Kartika"/>
+        <a:font script="Laoo" typeface="DokChampa"/>
+        <a:font script="Sinh" typeface="Iskoola Pota"/>
+        <a:font script="Mong" typeface="Mongolian Baiti"/>
+        <a:font script="Viet" typeface="Arial"/>
+        <a:font script="Uigh" typeface="Microsoft Uighur"/>
+        <a:font script="Geor" typeface="Sylfaen"/>
+      </a:minorFont>
+    </a:fontScheme>
+    <a:fmtScheme name="Office">
+      <a:fillStyleLst>
+        <a:solidFill>
+          <a:schemeClr val="phClr"/>
+        </a:solidFill>
+        <a:gradFill rotWithShape="1">
+          <a:gsLst>
+            <a:gs pos="0">
+              <a:schemeClr val="phClr">
+                <a:tint val="50000"/>
+                <a:satMod val="300000"/>
+              </a:schemeClr>
+            </a:gs>
+            <a:gs pos="35000">
+              <a:schemeClr val="phClr">
+                <a:tint val="37000"/>
+                <a:satMod val="300000"/>
+              </a:schemeClr>
+            </a:gs>
+            <a:gs pos="100000">
+              <a:schemeClr val="phClr">
+                <a:tint val="15000"/>
+                <a:satMod val="350000"/>
+              </a:schemeClr>
+            </a:gs>
+          </a:gsLst>
+          <a:lin ang="16200000" scaled="1"/>
+        </a:gradFill>
+        <a:gradFill rotWithShape="1">
+          <a:gsLst>
+            <a:gs pos="0">
+              <a:schemeClr val="phClr">
+                <a:tint val="100000"/>
+                <a:shade val="100000"/>
+                <a:satMod val="130000"/>
+              </a:schemeClr>
+            </a:gs>
+            <a:gs pos="100000">
+              <a:schemeClr val="phClr">
+                <a:tint val="50000"/>
+                <a:shade val="100000"/>
+                <a:satMod val="350000"/>
+              </a:schemeClr>
+            </a:gs>
+          </a:gsLst>
+          <a:lin ang="16200000" scaled="0"/>
+        </a:gradFill>
+      </a:fillStyleLst>
+      <a:lnStyleLst>
+        <a:ln w="9525" cap="flat" cmpd="sng" algn="ctr">
+          <a:solidFill>
+            <a:schemeClr val="phClr">
+              <a:shade val="95000"/>
+              <a:satMod val="105000"/>
+            </a:schemeClr>
+          </a:solidFill>
+          <a:prstDash val="solid"/>
+        </a:ln>
+        <a:ln w="25400" cap="flat" cmpd="sng" algn="ctr">
+          <a:solidFill>
+            <a:schemeClr val="phClr"/>
+          </a:solidFill>
+          <a:prstDash val="solid"/>
+        </a:ln>
+        <a:ln w="38100" cap="flat" cmpd="sng" algn="ctr">
+          <a:solidFill>
+            <a:schemeClr val="phClr"/>
+          </a:solidFill>
+          <a:prstDash val="solid"/>
+        </a:ln>
+      </a:lnStyleLst>
+      <a:effectStyleLst>
+        <a:effectStyle>
+          <a:effectLst>
+            <a:outerShdw blurRad="40000" dist="20000" dir="5400000" rotWithShape="0">
+              <a:srgbClr val="000000">
+                <a:alpha val="38000"/>
+              </a:srgbClr>
+            </a:outerShdw>
+          </a:effectLst>
+        </a:effectStyle>
+        <a:effectStyle>
+          <a:effectLst>
+            <a:outerShdw blurRad="40000" dist="23000" dir="5400000" rotWithShape="0">
+              <a:srgbClr val="000000">
+                <a:alpha val="35000"/>
+              </a:srgbClr>
+            </a:outerShdw>
+          </a:effectLst>
+        </a:effectStyle>
+        <a:effectStyle>
+          <a:effectLst>
+            <a:outerShdw blurRad="40000" dist="23000" dir="5400000" rotWithShape="0">
+              <a:srgbClr val="000000">
+                <a:alpha val="35000"/>
+              </a:srgbClr>
+            </a:outerShdw>
+          </a:effectLst>
+          <a:scene3d>
+            <a:camera prst="orthographicFront">
+              <a:rot lat="0" lon="0" rev="0"/>
+            </a:camera>
+            <a:lightRig rig="threePt" dir="t">
+              <a:rot lat="0" lon="0" rev="1200000"/>
+            </a:lightRig>
+          </a:scene3d>
+          <a:sp3d>
+            <a:bevelT w="63500" h="25400"/>
+          </a:sp3d>
+        </a:effectStyle>
+      </a:effectStyleLst>
+      <a:bgFillStyleLst>
+        <a:solidFill>
+          <a:schemeClr val="phClr"/>
+        </a:solidFill>
+        <a:gradFill rotWithShape="1">
+          <a:gsLst>
+            <a:gs pos="0">
+              <a:schemeClr val="phClr">
+                <a:tint val="40000"/>
+                <a:satMod val="350000"/>
+              </a:schemeClr>
+            </a:gs>
+            <a:gs pos="40000">
+              <a:schemeClr val="phClr">
+                <a:tint val="45000"/>
+                <a:shade val="99000"/>
+                <a:satMod val="350000"/>
+              </a:schemeClr>
+            </a:gs>
+            <a:gs pos="100000">
+              <a:schemeClr val="phClr">
+                <a:shade val="20000"/>
+                <a:satMod val="255000"/>
+              </a:schemeClr>
+            </a:gs>
+          </a:gsLst>
+          <a:path path="circle">
+            <a:fillToRect l="50000" t="-80000" r="50000" b="180000"/>
+          </a:path>
+        </a:gradFill>
+        <a:gradFill rotWithShape="1">
+          <a:gsLst>
+            <a:gs pos="0">
+              <a:schemeClr val="phClr">
+                <a:tint val="80000"/>
+                <a:satMod val="300000"/>
+              </a:schemeClr>
+            </a:gs>
+            <a:gs pos="100000">
+              <a:schemeClr val="phClr">
+                <a:shade val="30000"/>
+                <a:satMod val="200000"/>
+              </a:schemeClr>
+            </a:gs>
+          </a:gsLst>
+          <a:path path="circle">
+            <a:fillToRect l="50000" t="50000" r="50000" b="50000"/>
+          </a:path>
+        </a:gradFill>
+      </a:bgFillStyleLst>
+    </a:fmtScheme>
+  </a:themeElements>
+</a:theme>
+</file>
+
+<file path=ppt/theme/theme2.xml><?xml version="1.0" encoding="utf-8"?>
 <a:theme xmlns:a="http://schemas.openxmlformats.org/drawingml/2006/main" xmlns:r="http://schemas.openxmlformats.org/officeDocument/2006/relationships">
   <a:themeElements>
     <a:clrScheme name="Default">
@@ -10072,283 +14659,4 @@
     </a:fmtScheme>
   </a:themeElements>
 </a:theme>
-</file>
-
-<file path=ppt/theme/theme2.xml><?xml version="1.0" encoding="utf-8"?>
-<a:theme xmlns:a="http://schemas.openxmlformats.org/drawingml/2006/main" xmlns:r="http://schemas.openxmlformats.org/officeDocument/2006/relationships" name="PB Theme">
-  <a:themeElements>
-    <a:clrScheme name="Custom 347">
-      <a:dk1>
-        <a:srgbClr val="000000"/>
-      </a:dk1>
-      <a:lt1>
-        <a:srgbClr val="FFFFFF"/>
-      </a:lt1>
-      <a:dk2>
-        <a:srgbClr val="666666"/>
-      </a:dk2>
-      <a:lt2>
-        <a:srgbClr val="CCCCCC"/>
-      </a:lt2>
-      <a:accent1>
-        <a:srgbClr val="3A81BA"/>
-      </a:accent1>
-      <a:accent2>
-        <a:srgbClr val="D89F39"/>
-      </a:accent2>
-      <a:accent3>
-        <a:srgbClr val="8BAB42"/>
-      </a:accent3>
-      <a:accent4>
-        <a:srgbClr val="57A7B5"/>
-      </a:accent4>
-      <a:accent5>
-        <a:srgbClr val="8B81D2"/>
-      </a:accent5>
-      <a:accent6>
-        <a:srgbClr val="963334"/>
-      </a:accent6>
-      <a:hlink>
-        <a:srgbClr val="1155CC"/>
-      </a:hlink>
-      <a:folHlink>
-        <a:srgbClr val="6611CC"/>
-      </a:folHlink>
-    </a:clrScheme>
-    <a:fontScheme name="Office">
-      <a:majorFont>
-        <a:latin typeface="Arial"/>
-        <a:ea typeface=""/>
-        <a:cs typeface=""/>
-        <a:font script="Jpan" typeface="ＭＳ Ｐゴシック"/>
-        <a:font script="Hang" typeface="맑은 고딕"/>
-        <a:font script="Hans" typeface="宋体"/>
-        <a:font script="Hant" typeface="新細明體"/>
-        <a:font script="Arab" typeface="Times New Roman"/>
-        <a:font script="Hebr" typeface="Times New Roman"/>
-        <a:font script="Thai" typeface="Angsana New"/>
-        <a:font script="Ethi" typeface="Nyala"/>
-        <a:font script="Beng" typeface="Vrinda"/>
-        <a:font script="Gujr" typeface="Shruti"/>
-        <a:font script="Khmr" typeface="MoolBoran"/>
-        <a:font script="Knda" typeface="Tunga"/>
-        <a:font script="Guru" typeface="Raavi"/>
-        <a:font script="Cans" typeface="Euphemia"/>
-        <a:font script="Cher" typeface="Plantagenet Cherokee"/>
-        <a:font script="Yiii" typeface="Microsoft Yi Baiti"/>
-        <a:font script="Tibt" typeface="Microsoft Himalaya"/>
-        <a:font script="Thaa" typeface="MV Boli"/>
-        <a:font script="Deva" typeface="Mangal"/>
-        <a:font script="Telu" typeface="Gautami"/>
-        <a:font script="Taml" typeface="Latha"/>
-        <a:font script="Syrc" typeface="Estrangelo Edessa"/>
-        <a:font script="Orya" typeface="Kalinga"/>
-        <a:font script="Mlym" typeface="Kartika"/>
-        <a:font script="Laoo" typeface="DokChampa"/>
-        <a:font script="Sinh" typeface="Iskoola Pota"/>
-        <a:font script="Mong" typeface="Mongolian Baiti"/>
-        <a:font script="Viet" typeface="Times New Roman"/>
-        <a:font script="Uigh" typeface="Microsoft Uighur"/>
-        <a:font script="Geor" typeface="Sylfaen"/>
-      </a:majorFont>
-      <a:minorFont>
-        <a:latin typeface="Arial"/>
-        <a:ea typeface=""/>
-        <a:cs typeface=""/>
-        <a:font script="Jpan" typeface="ＭＳ Ｐゴシック"/>
-        <a:font script="Hang" typeface="맑은 고딕"/>
-        <a:font script="Hans" typeface="宋体"/>
-        <a:font script="Hant" typeface="新細明體"/>
-        <a:font script="Arab" typeface="Arial"/>
-        <a:font script="Hebr" typeface="Arial"/>
-        <a:font script="Thai" typeface="Cordia New"/>
-        <a:font script="Ethi" typeface="Nyala"/>
-        <a:font script="Beng" typeface="Vrinda"/>
-        <a:font script="Gujr" typeface="Shruti"/>
-        <a:font script="Khmr" typeface="DaunPenh"/>
-        <a:font script="Knda" typeface="Tunga"/>
-        <a:font script="Guru" typeface="Raavi"/>
-        <a:font script="Cans" typeface="Euphemia"/>
-        <a:font script="Cher" typeface="Plantagenet Cherokee"/>
-        <a:font script="Yiii" typeface="Microsoft Yi Baiti"/>
-        <a:font script="Tibt" typeface="Microsoft Himalaya"/>
-        <a:font script="Thaa" typeface="MV Boli"/>
-        <a:font script="Deva" typeface="Mangal"/>
-        <a:font script="Telu" typeface="Gautami"/>
-        <a:font script="Taml" typeface="Latha"/>
-        <a:font script="Syrc" typeface="Estrangelo Edessa"/>
-        <a:font script="Orya" typeface="Kalinga"/>
-        <a:font script="Mlym" typeface="Kartika"/>
-        <a:font script="Laoo" typeface="DokChampa"/>
-        <a:font script="Sinh" typeface="Iskoola Pota"/>
-        <a:font script="Mong" typeface="Mongolian Baiti"/>
-        <a:font script="Viet" typeface="Arial"/>
-        <a:font script="Uigh" typeface="Microsoft Uighur"/>
-        <a:font script="Geor" typeface="Sylfaen"/>
-      </a:minorFont>
-    </a:fontScheme>
-    <a:fmtScheme name="Office">
-      <a:fillStyleLst>
-        <a:solidFill>
-          <a:schemeClr val="phClr"/>
-        </a:solidFill>
-        <a:gradFill rotWithShape="1">
-          <a:gsLst>
-            <a:gs pos="0">
-              <a:schemeClr val="phClr">
-                <a:tint val="50000"/>
-                <a:satMod val="300000"/>
-              </a:schemeClr>
-            </a:gs>
-            <a:gs pos="35000">
-              <a:schemeClr val="phClr">
-                <a:tint val="37000"/>
-                <a:satMod val="300000"/>
-              </a:schemeClr>
-            </a:gs>
-            <a:gs pos="100000">
-              <a:schemeClr val="phClr">
-                <a:tint val="15000"/>
-                <a:satMod val="350000"/>
-              </a:schemeClr>
-            </a:gs>
-          </a:gsLst>
-          <a:lin ang="16200000" scaled="1"/>
-        </a:gradFill>
-        <a:gradFill rotWithShape="1">
-          <a:gsLst>
-            <a:gs pos="0">
-              <a:schemeClr val="phClr">
-                <a:tint val="100000"/>
-                <a:shade val="100000"/>
-                <a:satMod val="130000"/>
-              </a:schemeClr>
-            </a:gs>
-            <a:gs pos="100000">
-              <a:schemeClr val="phClr">
-                <a:tint val="50000"/>
-                <a:shade val="100000"/>
-                <a:satMod val="350000"/>
-              </a:schemeClr>
-            </a:gs>
-          </a:gsLst>
-          <a:lin ang="16200000" scaled="0"/>
-        </a:gradFill>
-      </a:fillStyleLst>
-      <a:lnStyleLst>
-        <a:ln w="9525" cap="flat" cmpd="sng" algn="ctr">
-          <a:solidFill>
-            <a:schemeClr val="phClr">
-              <a:shade val="95000"/>
-              <a:satMod val="105000"/>
-            </a:schemeClr>
-          </a:solidFill>
-          <a:prstDash val="solid"/>
-        </a:ln>
-        <a:ln w="25400" cap="flat" cmpd="sng" algn="ctr">
-          <a:solidFill>
-            <a:schemeClr val="phClr"/>
-          </a:solidFill>
-          <a:prstDash val="solid"/>
-        </a:ln>
-        <a:ln w="38100" cap="flat" cmpd="sng" algn="ctr">
-          <a:solidFill>
-            <a:schemeClr val="phClr"/>
-          </a:solidFill>
-          <a:prstDash val="solid"/>
-        </a:ln>
-      </a:lnStyleLst>
-      <a:effectStyleLst>
-        <a:effectStyle>
-          <a:effectLst>
-            <a:outerShdw blurRad="40000" dist="20000" dir="5400000" rotWithShape="0">
-              <a:srgbClr val="000000">
-                <a:alpha val="38000"/>
-              </a:srgbClr>
-            </a:outerShdw>
-          </a:effectLst>
-        </a:effectStyle>
-        <a:effectStyle>
-          <a:effectLst>
-            <a:outerShdw blurRad="40000" dist="23000" dir="5400000" rotWithShape="0">
-              <a:srgbClr val="000000">
-                <a:alpha val="35000"/>
-              </a:srgbClr>
-            </a:outerShdw>
-          </a:effectLst>
-        </a:effectStyle>
-        <a:effectStyle>
-          <a:effectLst>
-            <a:outerShdw blurRad="40000" dist="23000" dir="5400000" rotWithShape="0">
-              <a:srgbClr val="000000">
-                <a:alpha val="35000"/>
-              </a:srgbClr>
-            </a:outerShdw>
-          </a:effectLst>
-          <a:scene3d>
-            <a:camera prst="orthographicFront">
-              <a:rot lat="0" lon="0" rev="0"/>
-            </a:camera>
-            <a:lightRig rig="threePt" dir="t">
-              <a:rot lat="0" lon="0" rev="1200000"/>
-            </a:lightRig>
-          </a:scene3d>
-          <a:sp3d>
-            <a:bevelT w="63500" h="25400"/>
-          </a:sp3d>
-        </a:effectStyle>
-      </a:effectStyleLst>
-      <a:bgFillStyleLst>
-        <a:solidFill>
-          <a:schemeClr val="phClr"/>
-        </a:solidFill>
-        <a:gradFill rotWithShape="1">
-          <a:gsLst>
-            <a:gs pos="0">
-              <a:schemeClr val="phClr">
-                <a:tint val="40000"/>
-                <a:satMod val="350000"/>
-              </a:schemeClr>
-            </a:gs>
-            <a:gs pos="40000">
-              <a:schemeClr val="phClr">
-                <a:tint val="45000"/>
-                <a:shade val="99000"/>
-                <a:satMod val="350000"/>
-              </a:schemeClr>
-            </a:gs>
-            <a:gs pos="100000">
-              <a:schemeClr val="phClr">
-                <a:shade val="20000"/>
-                <a:satMod val="255000"/>
-              </a:schemeClr>
-            </a:gs>
-          </a:gsLst>
-          <a:path path="circle">
-            <a:fillToRect l="50000" t="-80000" r="50000" b="180000"/>
-          </a:path>
-        </a:gradFill>
-        <a:gradFill rotWithShape="1">
-          <a:gsLst>
-            <a:gs pos="0">
-              <a:schemeClr val="phClr">
-                <a:tint val="80000"/>
-                <a:satMod val="300000"/>
-              </a:schemeClr>
-            </a:gs>
-            <a:gs pos="100000">
-              <a:schemeClr val="phClr">
-                <a:shade val="30000"/>
-                <a:satMod val="200000"/>
-              </a:schemeClr>
-            </a:gs>
-          </a:gsLst>
-          <a:path path="circle">
-            <a:fillToRect l="50000" t="50000" r="50000" b="50000"/>
-          </a:path>
-        </a:gradFill>
-      </a:bgFillStyleLst>
-    </a:fmtScheme>
-  </a:themeElements>
-</a:theme>
 </file>